--- a/CamelRouteEmbeddingAnalysis-Apresentacao.pptx
+++ b/CamelRouteEmbeddingAnalysis-Apresentacao.pptx
@@ -5,7 +5,7 @@
     <p:sldMasterId id="2147483648" r:id="rId1"/>
   </p:sldMasterIdLst>
   <p:notesMasterIdLst>
-    <p:notesMasterId r:id="rId12"/>
+    <p:notesMasterId r:id="rId17"/>
   </p:notesMasterIdLst>
   <p:sldIdLst>
     <p:sldId id="256" r:id="rId2"/>
@@ -18,6 +18,11 @@
     <p:sldId id="266" r:id="rId9"/>
     <p:sldId id="267" r:id="rId10"/>
     <p:sldId id="268" r:id="rId11"/>
+    <p:sldId id="269" r:id="rId12"/>
+    <p:sldId id="270" r:id="rId13"/>
+    <p:sldId id="271" r:id="rId14"/>
+    <p:sldId id="272" r:id="rId15"/>
+    <p:sldId id="273" r:id="rId16"/>
   </p:sldIdLst>
   <p:sldSz cx="12192000" cy="6858000"/>
   <p:notesSz cx="6858000" cy="9144000"/>
@@ -4131,7 +4136,7 @@
           <a:p>
             <a:fld id="{0D3CA9E5-A0B5-054A-813B-A8EEE27E5859}" type="datetimeFigureOut">
               <a:rPr lang="es-ES_tradnl" smtClean="0"/>
-              <a:t>12/12/25</a:t>
+              <a:t>17/12/25</a:t>
             </a:fld>
             <a:endParaRPr lang="es-ES_tradnl"/>
           </a:p>
@@ -4483,114 +4488,6 @@
 </p:notes>
 </file>
 
-<file path=ppt/notesSlides/notesSlide10.xml><?xml version="1.0" encoding="utf-8"?>
-<p:notes xmlns:a="http://schemas.openxmlformats.org/drawingml/2006/main" xmlns:r="http://schemas.openxmlformats.org/officeDocument/2006/relationships" xmlns:p="http://schemas.openxmlformats.org/presentationml/2006/main">
-  <p:cSld>
-    <p:spTree>
-      <p:nvGrpSpPr>
-        <p:cNvPr id="1" name="">
-          <a:extLst>
-            <a:ext uri="{FF2B5EF4-FFF2-40B4-BE49-F238E27FC236}">
-              <a16:creationId xmlns:a16="http://schemas.microsoft.com/office/drawing/2014/main" id="{EEA6DFB3-AC98-22D1-EAD3-1EB8E44898EE}"/>
-            </a:ext>
-          </a:extLst>
-        </p:cNvPr>
-        <p:cNvGrpSpPr/>
-        <p:nvPr/>
-      </p:nvGrpSpPr>
-      <p:grpSpPr>
-        <a:xfrm>
-          <a:off x="0" y="0"/>
-          <a:ext cx="0" cy="0"/>
-          <a:chOff x="0" y="0"/>
-          <a:chExt cx="0" cy="0"/>
-        </a:xfrm>
-      </p:grpSpPr>
-      <p:sp>
-        <p:nvSpPr>
-          <p:cNvPr id="2" name="Espaço Reservado para Imagem de Slide 1">
-            <a:extLst>
-              <a:ext uri="{FF2B5EF4-FFF2-40B4-BE49-F238E27FC236}">
-                <a16:creationId xmlns:a16="http://schemas.microsoft.com/office/drawing/2014/main" id="{F4298A85-A00C-B317-F45F-DE2F20DEEB50}"/>
-              </a:ext>
-            </a:extLst>
-          </p:cNvPr>
-          <p:cNvSpPr>
-            <a:spLocks noGrp="1" noRot="1" noChangeAspect="1"/>
-          </p:cNvSpPr>
-          <p:nvPr>
-            <p:ph type="sldImg"/>
-          </p:nvPr>
-        </p:nvSpPr>
-        <p:spPr/>
-      </p:sp>
-      <p:sp>
-        <p:nvSpPr>
-          <p:cNvPr id="3" name="Espaço Reservado para Anotações 2">
-            <a:extLst>
-              <a:ext uri="{FF2B5EF4-FFF2-40B4-BE49-F238E27FC236}">
-                <a16:creationId xmlns:a16="http://schemas.microsoft.com/office/drawing/2014/main" id="{FFAD6740-2B7C-88ED-31AC-6F62CD2BE29F}"/>
-              </a:ext>
-            </a:extLst>
-          </p:cNvPr>
-          <p:cNvSpPr>
-            <a:spLocks noGrp="1"/>
-          </p:cNvSpPr>
-          <p:nvPr>
-            <p:ph type="body" idx="1"/>
-          </p:nvPr>
-        </p:nvSpPr>
-        <p:spPr/>
-        <p:txBody>
-          <a:bodyPr/>
-          <a:lstStyle/>
-          <a:p>
-            <a:endParaRPr lang="es-ES_tradnl"/>
-          </a:p>
-        </p:txBody>
-      </p:sp>
-      <p:sp>
-        <p:nvSpPr>
-          <p:cNvPr id="4" name="Espaço Reservado para Número de Slide 3">
-            <a:extLst>
-              <a:ext uri="{FF2B5EF4-FFF2-40B4-BE49-F238E27FC236}">
-                <a16:creationId xmlns:a16="http://schemas.microsoft.com/office/drawing/2014/main" id="{0039DE6F-1AA1-12B1-CE33-323353998EF4}"/>
-              </a:ext>
-            </a:extLst>
-          </p:cNvPr>
-          <p:cNvSpPr>
-            <a:spLocks noGrp="1"/>
-          </p:cNvSpPr>
-          <p:nvPr>
-            <p:ph type="sldNum" sz="quarter" idx="5"/>
-          </p:nvPr>
-        </p:nvSpPr>
-        <p:spPr/>
-        <p:txBody>
-          <a:bodyPr/>
-          <a:lstStyle/>
-          <a:p>
-            <a:fld id="{7E804731-88E0-F440-BCDA-8AF9564BD6BA}" type="slidenum">
-              <a:rPr lang="es-ES_tradnl" smtClean="0"/>
-              <a:t>10</a:t>
-            </a:fld>
-            <a:endParaRPr lang="es-ES_tradnl"/>
-          </a:p>
-        </p:txBody>
-      </p:sp>
-    </p:spTree>
-    <p:extLst>
-      <p:ext uri="{BB962C8B-B14F-4D97-AF65-F5344CB8AC3E}">
-        <p14:creationId xmlns:p14="http://schemas.microsoft.com/office/powerpoint/2010/main" val="3519335170"/>
-      </p:ext>
-    </p:extLst>
-  </p:cSld>
-  <p:clrMapOvr>
-    <a:masterClrMapping/>
-  </p:clrMapOvr>
-</p:notes>
-</file>
-
 <file path=ppt/notesSlides/notesSlide2.xml><?xml version="1.0" encoding="utf-8"?>
 <p:notes xmlns:a="http://schemas.openxmlformats.org/drawingml/2006/main" xmlns:r="http://schemas.openxmlformats.org/officeDocument/2006/relationships" xmlns:p="http://schemas.openxmlformats.org/presentationml/2006/main">
   <p:cSld>
@@ -5532,7 +5429,7 @@
           <a:p>
             <a:fld id="{FB07B9DB-ABE5-A84D-A937-869D17F4CABF}" type="datetimeFigureOut">
               <a:rPr lang="es-ES_tradnl" smtClean="0"/>
-              <a:t>12/12/25</a:t>
+              <a:t>17/12/25</a:t>
             </a:fld>
             <a:endParaRPr lang="es-ES_tradnl"/>
           </a:p>
@@ -5732,7 +5629,7 @@
           <a:p>
             <a:fld id="{FB07B9DB-ABE5-A84D-A937-869D17F4CABF}" type="datetimeFigureOut">
               <a:rPr lang="es-ES_tradnl" smtClean="0"/>
-              <a:t>12/12/25</a:t>
+              <a:t>17/12/25</a:t>
             </a:fld>
             <a:endParaRPr lang="es-ES_tradnl"/>
           </a:p>
@@ -5942,7 +5839,7 @@
           <a:p>
             <a:fld id="{FB07B9DB-ABE5-A84D-A937-869D17F4CABF}" type="datetimeFigureOut">
               <a:rPr lang="es-ES_tradnl" smtClean="0"/>
-              <a:t>12/12/25</a:t>
+              <a:t>17/12/25</a:t>
             </a:fld>
             <a:endParaRPr lang="es-ES_tradnl"/>
           </a:p>
@@ -6142,7 +6039,7 @@
           <a:p>
             <a:fld id="{FB07B9DB-ABE5-A84D-A937-869D17F4CABF}" type="datetimeFigureOut">
               <a:rPr lang="es-ES_tradnl" smtClean="0"/>
-              <a:t>12/12/25</a:t>
+              <a:t>17/12/25</a:t>
             </a:fld>
             <a:endParaRPr lang="es-ES_tradnl"/>
           </a:p>
@@ -6418,7 +6315,7 @@
           <a:p>
             <a:fld id="{FB07B9DB-ABE5-A84D-A937-869D17F4CABF}" type="datetimeFigureOut">
               <a:rPr lang="es-ES_tradnl" smtClean="0"/>
-              <a:t>12/12/25</a:t>
+              <a:t>17/12/25</a:t>
             </a:fld>
             <a:endParaRPr lang="es-ES_tradnl"/>
           </a:p>
@@ -6686,7 +6583,7 @@
           <a:p>
             <a:fld id="{FB07B9DB-ABE5-A84D-A937-869D17F4CABF}" type="datetimeFigureOut">
               <a:rPr lang="es-ES_tradnl" smtClean="0"/>
-              <a:t>12/12/25</a:t>
+              <a:t>17/12/25</a:t>
             </a:fld>
             <a:endParaRPr lang="es-ES_tradnl"/>
           </a:p>
@@ -7101,7 +6998,7 @@
           <a:p>
             <a:fld id="{FB07B9DB-ABE5-A84D-A937-869D17F4CABF}" type="datetimeFigureOut">
               <a:rPr lang="es-ES_tradnl" smtClean="0"/>
-              <a:t>12/12/25</a:t>
+              <a:t>17/12/25</a:t>
             </a:fld>
             <a:endParaRPr lang="es-ES_tradnl"/>
           </a:p>
@@ -7243,7 +7140,7 @@
           <a:p>
             <a:fld id="{FB07B9DB-ABE5-A84D-A937-869D17F4CABF}" type="datetimeFigureOut">
               <a:rPr lang="es-ES_tradnl" smtClean="0"/>
-              <a:t>12/12/25</a:t>
+              <a:t>17/12/25</a:t>
             </a:fld>
             <a:endParaRPr lang="es-ES_tradnl"/>
           </a:p>
@@ -7356,7 +7253,7 @@
           <a:p>
             <a:fld id="{FB07B9DB-ABE5-A84D-A937-869D17F4CABF}" type="datetimeFigureOut">
               <a:rPr lang="es-ES_tradnl" smtClean="0"/>
-              <a:t>12/12/25</a:t>
+              <a:t>17/12/25</a:t>
             </a:fld>
             <a:endParaRPr lang="es-ES_tradnl"/>
           </a:p>
@@ -7669,7 +7566,7 @@
           <a:p>
             <a:fld id="{FB07B9DB-ABE5-A84D-A937-869D17F4CABF}" type="datetimeFigureOut">
               <a:rPr lang="es-ES_tradnl" smtClean="0"/>
-              <a:t>12/12/25</a:t>
+              <a:t>17/12/25</a:t>
             </a:fld>
             <a:endParaRPr lang="es-ES_tradnl"/>
           </a:p>
@@ -7958,7 +7855,7 @@
           <a:p>
             <a:fld id="{FB07B9DB-ABE5-A84D-A937-869D17F4CABF}" type="datetimeFigureOut">
               <a:rPr lang="es-ES_tradnl" smtClean="0"/>
-              <a:t>12/12/25</a:t>
+              <a:t>17/12/25</a:t>
             </a:fld>
             <a:endParaRPr lang="es-ES_tradnl"/>
           </a:p>
@@ -8201,7 +8098,7 @@
           <a:p>
             <a:fld id="{FB07B9DB-ABE5-A84D-A937-869D17F4CABF}" type="datetimeFigureOut">
               <a:rPr lang="es-ES_tradnl" smtClean="0"/>
-              <a:t>12/12/25</a:t>
+              <a:t>17/12/25</a:t>
             </a:fld>
             <a:endParaRPr lang="es-ES_tradnl"/>
           </a:p>
@@ -8892,12 +8789,505 @@
 <file path=ppt/slides/slide10.xml><?xml version="1.0" encoding="utf-8"?>
 <p:sld xmlns:a="http://schemas.openxmlformats.org/drawingml/2006/main" xmlns:r="http://schemas.openxmlformats.org/officeDocument/2006/relationships" xmlns:p="http://schemas.openxmlformats.org/presentationml/2006/main">
   <p:cSld>
+    <p:bg>
+      <p:bgPr>
+        <a:solidFill>
+          <a:schemeClr val="bg1"/>
+        </a:solidFill>
+        <a:effectLst/>
+      </p:bgPr>
+    </p:bg>
+    <p:spTree>
+      <p:nvGrpSpPr>
+        <p:cNvPr id="1" name=""/>
+        <p:cNvGrpSpPr/>
+        <p:nvPr/>
+      </p:nvGrpSpPr>
+      <p:grpSpPr>
+        <a:xfrm>
+          <a:off x="0" y="0"/>
+          <a:ext cx="0" cy="0"/>
+          <a:chOff x="0" y="0"/>
+          <a:chExt cx="0" cy="0"/>
+        </a:xfrm>
+      </p:grpSpPr>
+      <p:sp useBgFill="1">
+        <p:nvSpPr>
+          <p:cNvPr id="26" name="Rectangle 25">
+            <a:extLst>
+              <a:ext uri="{FF2B5EF4-FFF2-40B4-BE49-F238E27FC236}">
+                <a16:creationId xmlns:a16="http://schemas.microsoft.com/office/drawing/2014/main" id="{2B97F24A-32CE-4C1C-A50D-3016B394DCFB}"/>
+              </a:ext>
+              <a:ext uri="{C183D7F6-B498-43B3-948B-1728B52AA6E4}">
+                <adec:decorative xmlns:adec="http://schemas.microsoft.com/office/drawing/2017/decorative" val="1"/>
+              </a:ext>
+            </a:extLst>
+          </p:cNvPr>
+          <p:cNvSpPr>
+            <a:spLocks noGrp="1" noRot="1" noChangeAspect="1" noMove="1" noResize="1" noEditPoints="1" noAdjustHandles="1" noChangeArrowheads="1" noChangeShapeType="1" noTextEdit="1"/>
+          </p:cNvSpPr>
+          <p:nvPr>
+            <p:extLst>
+              <p:ext uri="{386F3935-93C4-4BCD-93E2-E3B085C9AB24}">
+                <p16:designElem xmlns:p16="http://schemas.microsoft.com/office/powerpoint/2015/main" val="1"/>
+              </p:ext>
+            </p:extLst>
+          </p:nvPr>
+        </p:nvSpPr>
+        <p:spPr>
+          <a:xfrm>
+            <a:off x="0" y="0"/>
+            <a:ext cx="12192000" cy="6858000"/>
+          </a:xfrm>
+          <a:prstGeom prst="rect">
+            <a:avLst/>
+          </a:prstGeom>
+          <a:ln>
+            <a:noFill/>
+          </a:ln>
+        </p:spPr>
+        <p:style>
+          <a:lnRef idx="2">
+            <a:schemeClr val="accent1">
+              <a:shade val="50000"/>
+            </a:schemeClr>
+          </a:lnRef>
+          <a:fillRef idx="1">
+            <a:schemeClr val="accent1"/>
+          </a:fillRef>
+          <a:effectRef idx="0">
+            <a:schemeClr val="accent1"/>
+          </a:effectRef>
+          <a:fontRef idx="minor">
+            <a:schemeClr val="lt1"/>
+          </a:fontRef>
+        </p:style>
+        <p:txBody>
+          <a:bodyPr rtlCol="0" anchor="ctr"/>
+          <a:lstStyle/>
+          <a:p>
+            <a:pPr algn="ctr"/>
+            <a:endParaRPr lang="en-US"/>
+          </a:p>
+        </p:txBody>
+      </p:sp>
+      <p:sp>
+        <p:nvSpPr>
+          <p:cNvPr id="2" name="Título 1">
+            <a:extLst>
+              <a:ext uri="{FF2B5EF4-FFF2-40B4-BE49-F238E27FC236}">
+                <a16:creationId xmlns:a16="http://schemas.microsoft.com/office/drawing/2014/main" id="{F1287EE7-35BA-4222-86DF-D4A1E000C60C}"/>
+              </a:ext>
+            </a:extLst>
+          </p:cNvPr>
+          <p:cNvSpPr>
+            <a:spLocks noGrp="1"/>
+          </p:cNvSpPr>
+          <p:nvPr>
+            <p:ph type="title"/>
+          </p:nvPr>
+        </p:nvSpPr>
+        <p:spPr>
+          <a:xfrm>
+            <a:off x="630936" y="639520"/>
+            <a:ext cx="3429000" cy="1719072"/>
+          </a:xfrm>
+        </p:spPr>
+        <p:txBody>
+          <a:bodyPr anchor="b">
+            <a:normAutofit/>
+          </a:bodyPr>
+          <a:lstStyle/>
+          <a:p>
+            <a:r>
+              <a:rPr lang="es-ES_tradnl" sz="4600"/>
+              <a:t>Supercluster</a:t>
+            </a:r>
+          </a:p>
+        </p:txBody>
+      </p:sp>
+      <p:sp>
+        <p:nvSpPr>
+          <p:cNvPr id="28" name="sketch line">
+            <a:extLst>
+              <a:ext uri="{FF2B5EF4-FFF2-40B4-BE49-F238E27FC236}">
+                <a16:creationId xmlns:a16="http://schemas.microsoft.com/office/drawing/2014/main" id="{6357EC4F-235E-4222-A36F-C7878ACE37F2}"/>
+              </a:ext>
+              <a:ext uri="{C183D7F6-B498-43B3-948B-1728B52AA6E4}">
+                <adec:decorative xmlns:adec="http://schemas.microsoft.com/office/drawing/2017/decorative" val="1"/>
+              </a:ext>
+            </a:extLst>
+          </p:cNvPr>
+          <p:cNvSpPr>
+            <a:spLocks noGrp="1" noRot="1" noChangeAspect="1" noMove="1" noResize="1" noEditPoints="1" noAdjustHandles="1" noChangeArrowheads="1" noChangeShapeType="1" noTextEdit="1"/>
+          </p:cNvSpPr>
+          <p:nvPr>
+            <p:extLst>
+              <p:ext uri="{386F3935-93C4-4BCD-93E2-E3B085C9AB24}">
+                <p16:designElem xmlns:p16="http://schemas.microsoft.com/office/powerpoint/2015/main" val="1"/>
+              </p:ext>
+            </p:extLst>
+          </p:nvPr>
+        </p:nvSpPr>
+        <p:spPr>
+          <a:xfrm>
+            <a:off x="643278" y="2573756"/>
+            <a:ext cx="3255095" cy="18288"/>
+          </a:xfrm>
+          <a:custGeom>
+            <a:avLst/>
+            <a:gdLst>
+              <a:gd name="csX0" fmla="*/ 0 w 3255095"/>
+              <a:gd name="csY0" fmla="*/ 0 h 18288"/>
+              <a:gd name="csX1" fmla="*/ 618468 w 3255095"/>
+              <a:gd name="csY1" fmla="*/ 0 h 18288"/>
+              <a:gd name="csX2" fmla="*/ 1269487 w 3255095"/>
+              <a:gd name="csY2" fmla="*/ 0 h 18288"/>
+              <a:gd name="csX3" fmla="*/ 1953057 w 3255095"/>
+              <a:gd name="csY3" fmla="*/ 0 h 18288"/>
+              <a:gd name="csX4" fmla="*/ 2636627 w 3255095"/>
+              <a:gd name="csY4" fmla="*/ 0 h 18288"/>
+              <a:gd name="csX5" fmla="*/ 3255095 w 3255095"/>
+              <a:gd name="csY5" fmla="*/ 0 h 18288"/>
+              <a:gd name="csX6" fmla="*/ 3255095 w 3255095"/>
+              <a:gd name="csY6" fmla="*/ 18288 h 18288"/>
+              <a:gd name="csX7" fmla="*/ 2538974 w 3255095"/>
+              <a:gd name="csY7" fmla="*/ 18288 h 18288"/>
+              <a:gd name="csX8" fmla="*/ 1822853 w 3255095"/>
+              <a:gd name="csY8" fmla="*/ 18288 h 18288"/>
+              <a:gd name="csX9" fmla="*/ 1171834 w 3255095"/>
+              <a:gd name="csY9" fmla="*/ 18288 h 18288"/>
+              <a:gd name="csX10" fmla="*/ 0 w 3255095"/>
+              <a:gd name="csY10" fmla="*/ 18288 h 18288"/>
+              <a:gd name="csX11" fmla="*/ 0 w 3255095"/>
+              <a:gd name="csY11" fmla="*/ 0 h 18288"/>
+            </a:gdLst>
+            <a:ahLst/>
+            <a:cxnLst>
+              <a:cxn ang="0">
+                <a:pos x="csX0" y="csY0"/>
+              </a:cxn>
+              <a:cxn ang="0">
+                <a:pos x="csX1" y="csY1"/>
+              </a:cxn>
+              <a:cxn ang="0">
+                <a:pos x="csX2" y="csY2"/>
+              </a:cxn>
+              <a:cxn ang="0">
+                <a:pos x="csX3" y="csY3"/>
+              </a:cxn>
+              <a:cxn ang="0">
+                <a:pos x="csX4" y="csY4"/>
+              </a:cxn>
+              <a:cxn ang="0">
+                <a:pos x="csX5" y="csY5"/>
+              </a:cxn>
+              <a:cxn ang="0">
+                <a:pos x="csX6" y="csY6"/>
+              </a:cxn>
+              <a:cxn ang="0">
+                <a:pos x="csX7" y="csY7"/>
+              </a:cxn>
+              <a:cxn ang="0">
+                <a:pos x="csX8" y="csY8"/>
+              </a:cxn>
+              <a:cxn ang="0">
+                <a:pos x="csX9" y="csY9"/>
+              </a:cxn>
+              <a:cxn ang="0">
+                <a:pos x="csX10" y="csY10"/>
+              </a:cxn>
+              <a:cxn ang="0">
+                <a:pos x="csX11" y="csY11"/>
+              </a:cxn>
+            </a:cxnLst>
+            <a:rect l="l" t="t" r="r" b="b"/>
+            <a:pathLst>
+              <a:path w="3255095" h="18288" fill="none" extrusionOk="0">
+                <a:moveTo>
+                  <a:pt x="0" y="0"/>
+                </a:moveTo>
+                <a:cubicBezTo>
+                  <a:pt x="240201" y="-22123"/>
+                  <a:pt x="462021" y="-19623"/>
+                  <a:pt x="618468" y="0"/>
+                </a:cubicBezTo>
+                <a:cubicBezTo>
+                  <a:pt x="774915" y="19623"/>
+                  <a:pt x="974734" y="2035"/>
+                  <a:pt x="1269487" y="0"/>
+                </a:cubicBezTo>
+                <a:cubicBezTo>
+                  <a:pt x="1564240" y="-2035"/>
+                  <a:pt x="1733579" y="10639"/>
+                  <a:pt x="1953057" y="0"/>
+                </a:cubicBezTo>
+                <a:cubicBezTo>
+                  <a:pt x="2172535" y="-10639"/>
+                  <a:pt x="2453962" y="14018"/>
+                  <a:pt x="2636627" y="0"/>
+                </a:cubicBezTo>
+                <a:cubicBezTo>
+                  <a:pt x="2819292" y="-14018"/>
+                  <a:pt x="3121375" y="5399"/>
+                  <a:pt x="3255095" y="0"/>
+                </a:cubicBezTo>
+                <a:cubicBezTo>
+                  <a:pt x="3254386" y="8157"/>
+                  <a:pt x="3254682" y="12125"/>
+                  <a:pt x="3255095" y="18288"/>
+                </a:cubicBezTo>
+                <a:cubicBezTo>
+                  <a:pt x="3088545" y="23203"/>
+                  <a:pt x="2687475" y="7419"/>
+                  <a:pt x="2538974" y="18288"/>
+                </a:cubicBezTo>
+                <a:cubicBezTo>
+                  <a:pt x="2390473" y="29157"/>
+                  <a:pt x="2137381" y="-8959"/>
+                  <a:pt x="1822853" y="18288"/>
+                </a:cubicBezTo>
+                <a:cubicBezTo>
+                  <a:pt x="1508325" y="45535"/>
+                  <a:pt x="1466437" y="20385"/>
+                  <a:pt x="1171834" y="18288"/>
+                </a:cubicBezTo>
+                <a:cubicBezTo>
+                  <a:pt x="877231" y="16191"/>
+                  <a:pt x="561097" y="37643"/>
+                  <a:pt x="0" y="18288"/>
+                </a:cubicBezTo>
+                <a:cubicBezTo>
+                  <a:pt x="-46" y="12483"/>
+                  <a:pt x="-203" y="6491"/>
+                  <a:pt x="0" y="0"/>
+                </a:cubicBezTo>
+                <a:close/>
+              </a:path>
+              <a:path w="3255095" h="18288" stroke="0" extrusionOk="0">
+                <a:moveTo>
+                  <a:pt x="0" y="0"/>
+                </a:moveTo>
+                <a:cubicBezTo>
+                  <a:pt x="291965" y="19429"/>
+                  <a:pt x="363155" y="8568"/>
+                  <a:pt x="618468" y="0"/>
+                </a:cubicBezTo>
+                <a:cubicBezTo>
+                  <a:pt x="873781" y="-8568"/>
+                  <a:pt x="904459" y="-19505"/>
+                  <a:pt x="1171834" y="0"/>
+                </a:cubicBezTo>
+                <a:cubicBezTo>
+                  <a:pt x="1439209" y="19505"/>
+                  <a:pt x="1744369" y="9790"/>
+                  <a:pt x="1887955" y="0"/>
+                </a:cubicBezTo>
+                <a:cubicBezTo>
+                  <a:pt x="2031541" y="-9790"/>
+                  <a:pt x="2346378" y="21240"/>
+                  <a:pt x="2506423" y="0"/>
+                </a:cubicBezTo>
+                <a:cubicBezTo>
+                  <a:pt x="2666468" y="-21240"/>
+                  <a:pt x="2990257" y="30414"/>
+                  <a:pt x="3255095" y="0"/>
+                </a:cubicBezTo>
+                <a:cubicBezTo>
+                  <a:pt x="3254831" y="4493"/>
+                  <a:pt x="3255479" y="9472"/>
+                  <a:pt x="3255095" y="18288"/>
+                </a:cubicBezTo>
+                <a:cubicBezTo>
+                  <a:pt x="3120743" y="16690"/>
+                  <a:pt x="2759628" y="42462"/>
+                  <a:pt x="2604076" y="18288"/>
+                </a:cubicBezTo>
+                <a:cubicBezTo>
+                  <a:pt x="2448524" y="-5886"/>
+                  <a:pt x="2184336" y="19599"/>
+                  <a:pt x="1887955" y="18288"/>
+                </a:cubicBezTo>
+                <a:cubicBezTo>
+                  <a:pt x="1591574" y="16977"/>
+                  <a:pt x="1548845" y="6870"/>
+                  <a:pt x="1334589" y="18288"/>
+                </a:cubicBezTo>
+                <a:cubicBezTo>
+                  <a:pt x="1120333" y="29706"/>
+                  <a:pt x="996014" y="9662"/>
+                  <a:pt x="683570" y="18288"/>
+                </a:cubicBezTo>
+                <a:cubicBezTo>
+                  <a:pt x="371126" y="26914"/>
+                  <a:pt x="198687" y="16167"/>
+                  <a:pt x="0" y="18288"/>
+                </a:cubicBezTo>
+                <a:cubicBezTo>
+                  <a:pt x="843" y="9577"/>
+                  <a:pt x="371" y="6900"/>
+                  <a:pt x="0" y="0"/>
+                </a:cubicBezTo>
+                <a:close/>
+              </a:path>
+            </a:pathLst>
+          </a:custGeom>
+          <a:solidFill>
+            <a:schemeClr val="accent2"/>
+          </a:solidFill>
+          <a:ln w="38100" cap="rnd">
+            <a:solidFill>
+              <a:schemeClr val="accent2"/>
+            </a:solidFill>
+            <a:round/>
+            <a:extLst>
+              <a:ext uri="{C807C97D-BFC1-408E-A445-0C87EB9F89A2}">
+                <ask:lineSketchStyleProps xmlns:ask="http://schemas.microsoft.com/office/drawing/2018/sketchyshapes" sd="1219033472">
+                  <a:prstGeom prst="rect">
+                    <a:avLst/>
+                  </a:prstGeom>
+                  <ask:type>
+                    <ask:lineSketchFreehand/>
+                  </ask:type>
+                </ask:lineSketchStyleProps>
+              </a:ext>
+            </a:extLst>
+          </a:ln>
+        </p:spPr>
+        <p:style>
+          <a:lnRef idx="2">
+            <a:schemeClr val="accent1">
+              <a:shade val="50000"/>
+            </a:schemeClr>
+          </a:lnRef>
+          <a:fillRef idx="1">
+            <a:schemeClr val="accent1"/>
+          </a:fillRef>
+          <a:effectRef idx="0">
+            <a:schemeClr val="accent1"/>
+          </a:effectRef>
+          <a:fontRef idx="minor">
+            <a:schemeClr val="lt1"/>
+          </a:fontRef>
+        </p:style>
+        <p:txBody>
+          <a:bodyPr rtlCol="0" anchor="ctr"/>
+          <a:lstStyle/>
+          <a:p>
+            <a:pPr algn="ctr"/>
+            <a:endParaRPr lang="en-US"/>
+          </a:p>
+        </p:txBody>
+      </p:sp>
+      <p:sp>
+        <p:nvSpPr>
+          <p:cNvPr id="3" name="Espaço Reservado para Conteúdo 2">
+            <a:extLst>
+              <a:ext uri="{FF2B5EF4-FFF2-40B4-BE49-F238E27FC236}">
+                <a16:creationId xmlns:a16="http://schemas.microsoft.com/office/drawing/2014/main" id="{90EDE52E-815E-828F-4071-890E7E9EC47B}"/>
+              </a:ext>
+            </a:extLst>
+          </p:cNvPr>
+          <p:cNvSpPr>
+            <a:spLocks noGrp="1"/>
+          </p:cNvSpPr>
+          <p:nvPr>
+            <p:ph idx="1"/>
+          </p:nvPr>
+        </p:nvSpPr>
+        <p:spPr>
+          <a:xfrm>
+            <a:off x="630936" y="2807208"/>
+            <a:ext cx="3429000" cy="3410712"/>
+          </a:xfrm>
+        </p:spPr>
+        <p:txBody>
+          <a:bodyPr anchor="t">
+            <a:normAutofit/>
+          </a:bodyPr>
+          <a:lstStyle/>
+          <a:p>
+            <a:r>
+              <a:rPr lang="es-ES_tradnl" sz="2000"/>
+              <a:t>Aplicar HDBSCAN apenas sobre o supercluster com parámetros mais específicos resulta em duas vertentes:</a:t>
+            </a:r>
+          </a:p>
+          <a:p>
+            <a:pPr lvl="1"/>
+            <a:r>
+              <a:rPr lang="es-ES_tradnl" sz="2000"/>
+              <a:t>Quantidade de clusters e ruido explode</a:t>
+            </a:r>
+          </a:p>
+          <a:p>
+            <a:pPr lvl="1"/>
+            <a:r>
+              <a:rPr lang="es-ES_tradnl" sz="2000"/>
+              <a:t>Cluster colapsa em um grande grupo coeso</a:t>
+            </a:r>
+          </a:p>
+        </p:txBody>
+      </p:sp>
+      <p:pic>
+        <p:nvPicPr>
+          <p:cNvPr id="7" name="Imagem 6" descr="Gráfico, Gráfico de dispersão&#10;&#10;O conteúdo gerado por IA pode estar incorreto.">
+            <a:extLst>
+              <a:ext uri="{FF2B5EF4-FFF2-40B4-BE49-F238E27FC236}">
+                <a16:creationId xmlns:a16="http://schemas.microsoft.com/office/drawing/2014/main" id="{9E6D87D1-8C3D-DAAB-AD13-F061E3755C8A}"/>
+              </a:ext>
+            </a:extLst>
+          </p:cNvPr>
+          <p:cNvPicPr>
+            <a:picLocks noChangeAspect="1"/>
+          </p:cNvPicPr>
+          <p:nvPr/>
+        </p:nvPicPr>
+        <p:blipFill>
+          <a:blip r:embed="rId2"/>
+          <a:stretch>
+            <a:fillRect/>
+          </a:stretch>
+        </p:blipFill>
+        <p:spPr>
+          <a:xfrm>
+            <a:off x="3898373" y="875009"/>
+            <a:ext cx="8198309" cy="5107981"/>
+          </a:xfrm>
+          <a:prstGeom prst="rect">
+            <a:avLst/>
+          </a:prstGeom>
+        </p:spPr>
+      </p:pic>
+    </p:spTree>
+    <p:extLst>
+      <p:ext uri="{BB962C8B-B14F-4D97-AF65-F5344CB8AC3E}">
+        <p14:creationId xmlns:p14="http://schemas.microsoft.com/office/powerpoint/2010/main" val="1377048057"/>
+      </p:ext>
+    </p:extLst>
+  </p:cSld>
+  <p:clrMapOvr>
+    <a:masterClrMapping/>
+  </p:clrMapOvr>
+</p:sld>
+</file>
+
+<file path=ppt/slides/slide11.xml><?xml version="1.0" encoding="utf-8"?>
+<p:sld xmlns:a="http://schemas.openxmlformats.org/drawingml/2006/main" xmlns:r="http://schemas.openxmlformats.org/officeDocument/2006/relationships" xmlns:p="http://schemas.openxmlformats.org/presentationml/2006/main">
+  <p:cSld>
+    <p:bg>
+      <p:bgPr>
+        <a:solidFill>
+          <a:schemeClr val="bg1"/>
+        </a:solidFill>
+        <a:effectLst/>
+      </p:bgPr>
+    </p:bg>
     <p:spTree>
       <p:nvGrpSpPr>
         <p:cNvPr id="1" name="">
           <a:extLst>
             <a:ext uri="{FF2B5EF4-FFF2-40B4-BE49-F238E27FC236}">
-              <a16:creationId xmlns:a16="http://schemas.microsoft.com/office/drawing/2014/main" id="{B88AF267-51F3-AE04-45AD-CB9CCAB18817}"/>
+              <a16:creationId xmlns:a16="http://schemas.microsoft.com/office/drawing/2014/main" id="{3F1B6D33-13BD-0FCA-AC3E-383E0C528BEA}"/>
             </a:ext>
           </a:extLst>
         </p:cNvPr>
@@ -8912,12 +9302,72 @@
           <a:chExt cx="0" cy="0"/>
         </a:xfrm>
       </p:grpSpPr>
+      <p:sp useBgFill="1">
+        <p:nvSpPr>
+          <p:cNvPr id="21" name="Rectangle 16">
+            <a:extLst>
+              <a:ext uri="{FF2B5EF4-FFF2-40B4-BE49-F238E27FC236}">
+                <a16:creationId xmlns:a16="http://schemas.microsoft.com/office/drawing/2014/main" id="{32AEEBC8-9D30-42EF-95F2-386C2653FBF0}"/>
+              </a:ext>
+              <a:ext uri="{C183D7F6-B498-43B3-948B-1728B52AA6E4}">
+                <adec:decorative xmlns:adec="http://schemas.microsoft.com/office/drawing/2017/decorative" val="1"/>
+              </a:ext>
+            </a:extLst>
+          </p:cNvPr>
+          <p:cNvSpPr>
+            <a:spLocks noGrp="1" noRot="1" noChangeAspect="1" noMove="1" noResize="1" noEditPoints="1" noAdjustHandles="1" noChangeArrowheads="1" noChangeShapeType="1" noTextEdit="1"/>
+          </p:cNvSpPr>
+          <p:nvPr>
+            <p:extLst>
+              <p:ext uri="{386F3935-93C4-4BCD-93E2-E3B085C9AB24}">
+                <p16:designElem xmlns:p16="http://schemas.microsoft.com/office/powerpoint/2015/main" val="1"/>
+              </p:ext>
+            </p:extLst>
+          </p:nvPr>
+        </p:nvSpPr>
+        <p:spPr>
+          <a:xfrm>
+            <a:off x="0" y="0"/>
+            <a:ext cx="12192000" cy="6858000"/>
+          </a:xfrm>
+          <a:prstGeom prst="rect">
+            <a:avLst/>
+          </a:prstGeom>
+          <a:ln>
+            <a:noFill/>
+          </a:ln>
+        </p:spPr>
+        <p:style>
+          <a:lnRef idx="2">
+            <a:schemeClr val="accent1">
+              <a:shade val="50000"/>
+            </a:schemeClr>
+          </a:lnRef>
+          <a:fillRef idx="1">
+            <a:schemeClr val="accent1"/>
+          </a:fillRef>
+          <a:effectRef idx="0">
+            <a:schemeClr val="accent1"/>
+          </a:effectRef>
+          <a:fontRef idx="minor">
+            <a:schemeClr val="lt1"/>
+          </a:fontRef>
+        </p:style>
+        <p:txBody>
+          <a:bodyPr rtlCol="0" anchor="ctr"/>
+          <a:lstStyle/>
+          <a:p>
+            <a:pPr algn="ctr"/>
+            <a:endParaRPr lang="en-US"/>
+          </a:p>
+        </p:txBody>
+      </p:sp>
       <p:sp>
         <p:nvSpPr>
           <p:cNvPr id="2" name="Título 1">
             <a:extLst>
               <a:ext uri="{FF2B5EF4-FFF2-40B4-BE49-F238E27FC236}">
-                <a16:creationId xmlns:a16="http://schemas.microsoft.com/office/drawing/2014/main" id="{AAFAE219-716C-D8DA-46CD-CFDADFECB64F}"/>
+                <a16:creationId xmlns:a16="http://schemas.microsoft.com/office/drawing/2014/main" id="{6F87E104-4C7C-3A4D-385D-31B341A2E50F}"/>
               </a:ext>
             </a:extLst>
           </p:cNvPr>
@@ -8928,41 +9378,254 @@
             <p:ph type="title"/>
           </p:nvPr>
         </p:nvSpPr>
-        <p:spPr/>
+        <p:spPr>
+          <a:xfrm>
+            <a:off x="630936" y="502920"/>
+            <a:ext cx="3419856" cy="1463040"/>
+          </a:xfrm>
+        </p:spPr>
         <p:txBody>
-          <a:bodyPr/>
+          <a:bodyPr anchor="ctr">
+            <a:normAutofit/>
+          </a:bodyPr>
           <a:lstStyle/>
           <a:p>
             <a:r>
-              <a:rPr lang="es-ES_tradnl" dirty="0" err="1"/>
-              <a:t>Analisar</a:t>
-            </a:r>
-            <a:r>
-              <a:rPr lang="es-ES_tradnl" dirty="0"/>
-              <a:t> de </a:t>
-            </a:r>
-            <a:r>
-              <a:rPr lang="es-ES_tradnl" dirty="0" err="1"/>
-              <a:t>Coesão</a:t>
-            </a:r>
-            <a:r>
-              <a:rPr lang="es-ES_tradnl" dirty="0"/>
-              <a:t> </a:t>
-            </a:r>
-            <a:r>
-              <a:rPr lang="es-ES_tradnl" dirty="0" err="1"/>
-              <a:t>Semantica</a:t>
-            </a:r>
-            <a:endParaRPr lang="es-ES_tradnl" dirty="0"/>
+              <a:rPr lang="es-ES_tradnl" sz="4800"/>
+              <a:t>Supercluster</a:t>
+            </a:r>
           </a:p>
         </p:txBody>
       </p:sp>
       <p:sp>
         <p:nvSpPr>
-          <p:cNvPr id="14" name="Espaço Reservado para Conteúdo 13">
+          <p:cNvPr id="22" name="sketch line">
             <a:extLst>
               <a:ext uri="{FF2B5EF4-FFF2-40B4-BE49-F238E27FC236}">
-                <a16:creationId xmlns:a16="http://schemas.microsoft.com/office/drawing/2014/main" id="{F3BDAAF7-1F22-B416-B725-652E0EEF9248}"/>
+                <a16:creationId xmlns:a16="http://schemas.microsoft.com/office/drawing/2014/main" id="{2E92FA66-67D7-4CB4-94D3-E643A9AD4757}"/>
+              </a:ext>
+              <a:ext uri="{C183D7F6-B498-43B3-948B-1728B52AA6E4}">
+                <adec:decorative xmlns:adec="http://schemas.microsoft.com/office/drawing/2017/decorative" val="1"/>
+              </a:ext>
+            </a:extLst>
+          </p:cNvPr>
+          <p:cNvSpPr>
+            <a:spLocks noGrp="1" noRot="1" noChangeAspect="1" noMove="1" noResize="1" noEditPoints="1" noAdjustHandles="1" noChangeArrowheads="1" noChangeShapeType="1" noTextEdit="1"/>
+          </p:cNvSpPr>
+          <p:nvPr>
+            <p:extLst>
+              <p:ext uri="{386F3935-93C4-4BCD-93E2-E3B085C9AB24}">
+                <p16:designElem xmlns:p16="http://schemas.microsoft.com/office/powerpoint/2015/main" val="1"/>
+              </p:ext>
+            </p:extLst>
+          </p:nvPr>
+        </p:nvSpPr>
+        <p:spPr>
+          <a:xfrm rot="5400000">
+            <a:off x="3566159" y="1225296"/>
+            <a:ext cx="1554480" cy="18288"/>
+          </a:xfrm>
+          <a:custGeom>
+            <a:avLst/>
+            <a:gdLst>
+              <a:gd name="csX0" fmla="*/ 0 w 1554480"/>
+              <a:gd name="csY0" fmla="*/ 0 h 18288"/>
+              <a:gd name="csX1" fmla="*/ 549250 w 1554480"/>
+              <a:gd name="csY1" fmla="*/ 0 h 18288"/>
+              <a:gd name="csX2" fmla="*/ 1082954 w 1554480"/>
+              <a:gd name="csY2" fmla="*/ 0 h 18288"/>
+              <a:gd name="csX3" fmla="*/ 1554480 w 1554480"/>
+              <a:gd name="csY3" fmla="*/ 0 h 18288"/>
+              <a:gd name="csX4" fmla="*/ 1554480 w 1554480"/>
+              <a:gd name="csY4" fmla="*/ 18288 h 18288"/>
+              <a:gd name="csX5" fmla="*/ 1067410 w 1554480"/>
+              <a:gd name="csY5" fmla="*/ 18288 h 18288"/>
+              <a:gd name="csX6" fmla="*/ 549250 w 1554480"/>
+              <a:gd name="csY6" fmla="*/ 18288 h 18288"/>
+              <a:gd name="csX7" fmla="*/ 0 w 1554480"/>
+              <a:gd name="csY7" fmla="*/ 18288 h 18288"/>
+              <a:gd name="csX8" fmla="*/ 0 w 1554480"/>
+              <a:gd name="csY8" fmla="*/ 0 h 18288"/>
+            </a:gdLst>
+            <a:ahLst/>
+            <a:cxnLst>
+              <a:cxn ang="0">
+                <a:pos x="csX0" y="csY0"/>
+              </a:cxn>
+              <a:cxn ang="0">
+                <a:pos x="csX1" y="csY1"/>
+              </a:cxn>
+              <a:cxn ang="0">
+                <a:pos x="csX2" y="csY2"/>
+              </a:cxn>
+              <a:cxn ang="0">
+                <a:pos x="csX3" y="csY3"/>
+              </a:cxn>
+              <a:cxn ang="0">
+                <a:pos x="csX4" y="csY4"/>
+              </a:cxn>
+              <a:cxn ang="0">
+                <a:pos x="csX5" y="csY5"/>
+              </a:cxn>
+              <a:cxn ang="0">
+                <a:pos x="csX6" y="csY6"/>
+              </a:cxn>
+              <a:cxn ang="0">
+                <a:pos x="csX7" y="csY7"/>
+              </a:cxn>
+              <a:cxn ang="0">
+                <a:pos x="csX8" y="csY8"/>
+              </a:cxn>
+            </a:cxnLst>
+            <a:rect l="l" t="t" r="r" b="b"/>
+            <a:pathLst>
+              <a:path w="1554480" h="18288" fill="none" extrusionOk="0">
+                <a:moveTo>
+                  <a:pt x="0" y="0"/>
+                </a:moveTo>
+                <a:cubicBezTo>
+                  <a:pt x="114141" y="-19864"/>
+                  <a:pt x="345055" y="-1657"/>
+                  <a:pt x="549250" y="0"/>
+                </a:cubicBezTo>
+                <a:cubicBezTo>
+                  <a:pt x="753445" y="1657"/>
+                  <a:pt x="862292" y="-5674"/>
+                  <a:pt x="1082954" y="0"/>
+                </a:cubicBezTo>
+                <a:cubicBezTo>
+                  <a:pt x="1303616" y="5674"/>
+                  <a:pt x="1363530" y="4537"/>
+                  <a:pt x="1554480" y="0"/>
+                </a:cubicBezTo>
+                <a:cubicBezTo>
+                  <a:pt x="1554963" y="7176"/>
+                  <a:pt x="1553909" y="13682"/>
+                  <a:pt x="1554480" y="18288"/>
+                </a:cubicBezTo>
+                <a:cubicBezTo>
+                  <a:pt x="1338847" y="6127"/>
+                  <a:pt x="1215066" y="37851"/>
+                  <a:pt x="1067410" y="18288"/>
+                </a:cubicBezTo>
+                <a:cubicBezTo>
+                  <a:pt x="919754" y="-1275"/>
+                  <a:pt x="800465" y="3080"/>
+                  <a:pt x="549250" y="18288"/>
+                </a:cubicBezTo>
+                <a:cubicBezTo>
+                  <a:pt x="298035" y="33496"/>
+                  <a:pt x="158868" y="22769"/>
+                  <a:pt x="0" y="18288"/>
+                </a:cubicBezTo>
+                <a:cubicBezTo>
+                  <a:pt x="-655" y="13237"/>
+                  <a:pt x="709" y="4645"/>
+                  <a:pt x="0" y="0"/>
+                </a:cubicBezTo>
+                <a:close/>
+              </a:path>
+              <a:path w="1554480" h="18288" stroke="0" extrusionOk="0">
+                <a:moveTo>
+                  <a:pt x="0" y="0"/>
+                </a:moveTo>
+                <a:cubicBezTo>
+                  <a:pt x="249941" y="-58"/>
+                  <a:pt x="367334" y="23448"/>
+                  <a:pt x="502615" y="0"/>
+                </a:cubicBezTo>
+                <a:cubicBezTo>
+                  <a:pt x="637897" y="-23448"/>
+                  <a:pt x="813653" y="-20418"/>
+                  <a:pt x="974141" y="0"/>
+                </a:cubicBezTo>
+                <a:cubicBezTo>
+                  <a:pt x="1134629" y="20418"/>
+                  <a:pt x="1268772" y="6288"/>
+                  <a:pt x="1554480" y="0"/>
+                </a:cubicBezTo>
+                <a:cubicBezTo>
+                  <a:pt x="1554917" y="7222"/>
+                  <a:pt x="1555359" y="13299"/>
+                  <a:pt x="1554480" y="18288"/>
+                </a:cubicBezTo>
+                <a:cubicBezTo>
+                  <a:pt x="1336087" y="12172"/>
+                  <a:pt x="1310024" y="19759"/>
+                  <a:pt x="1067410" y="18288"/>
+                </a:cubicBezTo>
+                <a:cubicBezTo>
+                  <a:pt x="824796" y="16818"/>
+                  <a:pt x="787902" y="34647"/>
+                  <a:pt x="518160" y="18288"/>
+                </a:cubicBezTo>
+                <a:cubicBezTo>
+                  <a:pt x="248418" y="1930"/>
+                  <a:pt x="133160" y="9205"/>
+                  <a:pt x="0" y="18288"/>
+                </a:cubicBezTo>
+                <a:cubicBezTo>
+                  <a:pt x="-643" y="9451"/>
+                  <a:pt x="-340" y="7114"/>
+                  <a:pt x="0" y="0"/>
+                </a:cubicBezTo>
+                <a:close/>
+              </a:path>
+            </a:pathLst>
+          </a:custGeom>
+          <a:solidFill>
+            <a:schemeClr val="accent2"/>
+          </a:solidFill>
+          <a:ln w="41275" cap="rnd">
+            <a:solidFill>
+              <a:schemeClr val="accent2"/>
+            </a:solidFill>
+            <a:round/>
+            <a:extLst>
+              <a:ext uri="{C807C97D-BFC1-408E-A445-0C87EB9F89A2}">
+                <ask:lineSketchStyleProps xmlns:ask="http://schemas.microsoft.com/office/drawing/2018/sketchyshapes" sd="1219033472">
+                  <a:prstGeom prst="rect">
+                    <a:avLst/>
+                  </a:prstGeom>
+                  <ask:type>
+                    <ask:lineSketchFreehand/>
+                  </ask:type>
+                </ask:lineSketchStyleProps>
+              </a:ext>
+            </a:extLst>
+          </a:ln>
+        </p:spPr>
+        <p:style>
+          <a:lnRef idx="2">
+            <a:schemeClr val="accent1">
+              <a:shade val="50000"/>
+            </a:schemeClr>
+          </a:lnRef>
+          <a:fillRef idx="1">
+            <a:schemeClr val="accent1"/>
+          </a:fillRef>
+          <a:effectRef idx="0">
+            <a:schemeClr val="accent1"/>
+          </a:effectRef>
+          <a:fontRef idx="minor">
+            <a:schemeClr val="lt1"/>
+          </a:fontRef>
+        </p:style>
+        <p:txBody>
+          <a:bodyPr rtlCol="0" anchor="ctr"/>
+          <a:lstStyle/>
+          <a:p>
+            <a:pPr algn="ctr"/>
+            <a:endParaRPr lang="en-US"/>
+          </a:p>
+        </p:txBody>
+      </p:sp>
+      <p:sp>
+        <p:nvSpPr>
+          <p:cNvPr id="3" name="Espaço Reservado para Conteúdo 2">
+            <a:extLst>
+              <a:ext uri="{FF2B5EF4-FFF2-40B4-BE49-F238E27FC236}">
+                <a16:creationId xmlns:a16="http://schemas.microsoft.com/office/drawing/2014/main" id="{FB3F6FFE-3C81-C52A-0CFC-B8AEF3A6F50D}"/>
               </a:ext>
             </a:extLst>
           </p:cNvPr>
@@ -8973,106 +9636,1896 @@
             <p:ph idx="1"/>
           </p:nvPr>
         </p:nvSpPr>
-        <p:spPr/>
+        <p:spPr>
+          <a:xfrm>
+            <a:off x="4654295" y="502920"/>
+            <a:ext cx="6894576" cy="1463040"/>
+          </a:xfrm>
+        </p:spPr>
         <p:txBody>
-          <a:bodyPr/>
+          <a:bodyPr anchor="ctr">
+            <a:normAutofit/>
+          </a:bodyPr>
           <a:lstStyle/>
           <a:p>
             <a:r>
-              <a:rPr lang="es-ES_tradnl" dirty="0" err="1"/>
-              <a:t>Analisar</a:t>
-            </a:r>
-            <a:r>
-              <a:rPr lang="es-ES_tradnl" dirty="0"/>
+              <a:rPr lang="es-ES_tradnl" sz="2000" dirty="0"/>
+              <a:t>Aplicar </a:t>
+            </a:r>
+            <a:r>
+              <a:rPr lang="es-ES_tradnl" sz="2000" dirty="0" err="1"/>
+              <a:t>Agglomerative</a:t>
+            </a:r>
+            <a:r>
+              <a:rPr lang="es-ES_tradnl" sz="2000" dirty="0"/>
               <a:t> </a:t>
             </a:r>
             <a:r>
-              <a:rPr lang="es-ES_tradnl" dirty="0" err="1"/>
-              <a:t>na</a:t>
-            </a:r>
-            <a:r>
-              <a:rPr lang="es-ES_tradnl" dirty="0"/>
+              <a:rPr lang="es-ES_tradnl" sz="2000" dirty="0" err="1"/>
+              <a:t>Clustering</a:t>
+            </a:r>
+            <a:r>
+              <a:rPr lang="es-ES_tradnl" sz="2000" dirty="0"/>
+              <a:t> ignora </a:t>
+            </a:r>
+            <a:r>
+              <a:rPr lang="es-ES_tradnl" sz="2000" dirty="0" err="1"/>
+              <a:t>densidade</a:t>
+            </a:r>
+            <a:r>
+              <a:rPr lang="es-ES_tradnl" sz="2000" dirty="0"/>
+              <a:t> e permite separar de forma </a:t>
+            </a:r>
+            <a:r>
+              <a:rPr lang="es-ES_tradnl" sz="2000" dirty="0" err="1"/>
+              <a:t>mais</a:t>
+            </a:r>
+            <a:r>
+              <a:rPr lang="es-ES_tradnl" sz="2000" dirty="0"/>
               <a:t> </a:t>
             </a:r>
             <a:r>
-              <a:rPr lang="es-ES_tradnl" dirty="0" err="1"/>
-              <a:t>melhor</a:t>
-            </a:r>
-            <a:r>
-              <a:rPr lang="es-ES_tradnl" dirty="0"/>
-              <a:t> </a:t>
-            </a:r>
-            <a:r>
-              <a:rPr lang="es-ES_tradnl" dirty="0" err="1"/>
-              <a:t>configuração</a:t>
-            </a:r>
-            <a:r>
-              <a:rPr lang="es-ES_tradnl" dirty="0"/>
-              <a:t> </a:t>
-            </a:r>
-            <a:r>
-              <a:rPr lang="es-ES_tradnl" dirty="0" err="1"/>
-              <a:t>obtida</a:t>
-            </a:r>
-            <a:r>
-              <a:rPr lang="es-ES_tradnl" dirty="0"/>
-              <a:t> se os grupos </a:t>
-            </a:r>
-            <a:r>
-              <a:rPr lang="es-ES_tradnl" dirty="0" err="1"/>
-              <a:t>gerados</a:t>
-            </a:r>
-            <a:r>
-              <a:rPr lang="es-ES_tradnl" dirty="0"/>
-              <a:t> </a:t>
-            </a:r>
-            <a:r>
-              <a:rPr lang="es-ES_tradnl" dirty="0" err="1"/>
-              <a:t>possuem</a:t>
-            </a:r>
-            <a:r>
-              <a:rPr lang="es-ES_tradnl" dirty="0"/>
-              <a:t> boa </a:t>
-            </a:r>
-            <a:r>
-              <a:rPr lang="es-ES_tradnl" dirty="0" err="1"/>
-              <a:t>coesão</a:t>
-            </a:r>
-            <a:r>
-              <a:rPr lang="es-ES_tradnl" dirty="0"/>
-              <a:t> </a:t>
-            </a:r>
-            <a:r>
-              <a:rPr lang="es-ES_tradnl" dirty="0" err="1"/>
-              <a:t>semântica</a:t>
-            </a:r>
-            <a:r>
-              <a:rPr lang="es-ES_tradnl" dirty="0"/>
-              <a:t>, </a:t>
-            </a:r>
-            <a:r>
-              <a:rPr lang="es-ES_tradnl" dirty="0" err="1"/>
-              <a:t>servindo</a:t>
-            </a:r>
-            <a:r>
-              <a:rPr lang="es-ES_tradnl" dirty="0"/>
-              <a:t> </a:t>
-            </a:r>
-            <a:r>
-              <a:rPr lang="es-ES_tradnl" dirty="0" err="1"/>
-              <a:t>ao</a:t>
-            </a:r>
-            <a:r>
-              <a:rPr lang="es-ES_tradnl" dirty="0"/>
-              <a:t> objetivo de encontrar rotas parecidas </a:t>
-            </a:r>
+              <a:rPr lang="es-ES_tradnl" sz="2000" dirty="0" err="1"/>
+              <a:t>adequada</a:t>
+            </a:r>
+            <a:r>
+              <a:rPr lang="es-ES_tradnl" sz="2000" dirty="0"/>
+              <a:t> o </a:t>
+            </a:r>
+            <a:r>
+              <a:rPr lang="es-ES_tradnl" sz="2000" dirty="0" err="1"/>
+              <a:t>supercluster</a:t>
+            </a:r>
+            <a:endParaRPr lang="es-ES_tradnl" sz="2000" dirty="0"/>
           </a:p>
         </p:txBody>
       </p:sp>
+      <p:pic>
+        <p:nvPicPr>
+          <p:cNvPr id="5" name="Imagem 4" descr="Uma imagem contendo Histograma&#10;&#10;O conteúdo gerado por IA pode estar incorreto.">
+            <a:extLst>
+              <a:ext uri="{FF2B5EF4-FFF2-40B4-BE49-F238E27FC236}">
+                <a16:creationId xmlns:a16="http://schemas.microsoft.com/office/drawing/2014/main" id="{C72A03DC-ABF8-E73D-D5EA-AF7430E93EB2}"/>
+              </a:ext>
+            </a:extLst>
+          </p:cNvPr>
+          <p:cNvPicPr>
+            <a:picLocks noChangeAspect="1"/>
+          </p:cNvPicPr>
+          <p:nvPr/>
+        </p:nvPicPr>
+        <p:blipFill>
+          <a:blip r:embed="rId2"/>
+          <a:stretch>
+            <a:fillRect/>
+          </a:stretch>
+        </p:blipFill>
+        <p:spPr>
+          <a:xfrm>
+            <a:off x="361492" y="1965960"/>
+            <a:ext cx="11469016" cy="4874332"/>
+          </a:xfrm>
+          <a:prstGeom prst="rect">
+            <a:avLst/>
+          </a:prstGeom>
+        </p:spPr>
+      </p:pic>
     </p:spTree>
     <p:extLst>
       <p:ext uri="{BB962C8B-B14F-4D97-AF65-F5344CB8AC3E}">
-        <p14:creationId xmlns:p14="http://schemas.microsoft.com/office/powerpoint/2010/main" val="49136264"/>
+        <p14:creationId xmlns:p14="http://schemas.microsoft.com/office/powerpoint/2010/main" val="3776493284"/>
+      </p:ext>
+    </p:extLst>
+  </p:cSld>
+  <p:clrMapOvr>
+    <a:masterClrMapping/>
+  </p:clrMapOvr>
+</p:sld>
+</file>
+
+<file path=ppt/slides/slide12.xml><?xml version="1.0" encoding="utf-8"?>
+<p:sld xmlns:a="http://schemas.openxmlformats.org/drawingml/2006/main" xmlns:r="http://schemas.openxmlformats.org/officeDocument/2006/relationships" xmlns:p="http://schemas.openxmlformats.org/presentationml/2006/main">
+  <p:cSld>
+    <p:bg>
+      <p:bgPr>
+        <a:solidFill>
+          <a:schemeClr val="bg1"/>
+        </a:solidFill>
+        <a:effectLst/>
+      </p:bgPr>
+    </p:bg>
+    <p:spTree>
+      <p:nvGrpSpPr>
+        <p:cNvPr id="1" name="">
+          <a:extLst>
+            <a:ext uri="{FF2B5EF4-FFF2-40B4-BE49-F238E27FC236}">
+              <a16:creationId xmlns:a16="http://schemas.microsoft.com/office/drawing/2014/main" id="{45BBEFB1-E2AC-E621-B33F-F5D4DEF26A1B}"/>
+            </a:ext>
+          </a:extLst>
+        </p:cNvPr>
+        <p:cNvGrpSpPr/>
+        <p:nvPr/>
+      </p:nvGrpSpPr>
+      <p:grpSpPr>
+        <a:xfrm>
+          <a:off x="0" y="0"/>
+          <a:ext cx="0" cy="0"/>
+          <a:chOff x="0" y="0"/>
+          <a:chExt cx="0" cy="0"/>
+        </a:xfrm>
+      </p:grpSpPr>
+      <p:sp useBgFill="1">
+        <p:nvSpPr>
+          <p:cNvPr id="11" name="Rectangle 10">
+            <a:extLst>
+              <a:ext uri="{FF2B5EF4-FFF2-40B4-BE49-F238E27FC236}">
+                <a16:creationId xmlns:a16="http://schemas.microsoft.com/office/drawing/2014/main" id="{32AEEBC8-9D30-42EF-95F2-386C2653FBF0}"/>
+              </a:ext>
+              <a:ext uri="{C183D7F6-B498-43B3-948B-1728B52AA6E4}">
+                <adec:decorative xmlns:adec="http://schemas.microsoft.com/office/drawing/2017/decorative" val="1"/>
+              </a:ext>
+            </a:extLst>
+          </p:cNvPr>
+          <p:cNvSpPr>
+            <a:spLocks noGrp="1" noRot="1" noChangeAspect="1" noMove="1" noResize="1" noEditPoints="1" noAdjustHandles="1" noChangeArrowheads="1" noChangeShapeType="1" noTextEdit="1"/>
+          </p:cNvSpPr>
+          <p:nvPr>
+            <p:extLst>
+              <p:ext uri="{386F3935-93C4-4BCD-93E2-E3B085C9AB24}">
+                <p16:designElem xmlns:p16="http://schemas.microsoft.com/office/powerpoint/2015/main" val="1"/>
+              </p:ext>
+            </p:extLst>
+          </p:nvPr>
+        </p:nvSpPr>
+        <p:spPr>
+          <a:xfrm>
+            <a:off x="0" y="0"/>
+            <a:ext cx="12192000" cy="6858000"/>
+          </a:xfrm>
+          <a:prstGeom prst="rect">
+            <a:avLst/>
+          </a:prstGeom>
+          <a:ln>
+            <a:noFill/>
+          </a:ln>
+        </p:spPr>
+        <p:style>
+          <a:lnRef idx="2">
+            <a:schemeClr val="accent1">
+              <a:shade val="50000"/>
+            </a:schemeClr>
+          </a:lnRef>
+          <a:fillRef idx="1">
+            <a:schemeClr val="accent1"/>
+          </a:fillRef>
+          <a:effectRef idx="0">
+            <a:schemeClr val="accent1"/>
+          </a:effectRef>
+          <a:fontRef idx="minor">
+            <a:schemeClr val="lt1"/>
+          </a:fontRef>
+        </p:style>
+        <p:txBody>
+          <a:bodyPr rtlCol="0" anchor="ctr"/>
+          <a:lstStyle/>
+          <a:p>
+            <a:pPr algn="ctr"/>
+            <a:endParaRPr lang="en-US"/>
+          </a:p>
+        </p:txBody>
+      </p:sp>
+      <p:sp>
+        <p:nvSpPr>
+          <p:cNvPr id="2" name="Título 1">
+            <a:extLst>
+              <a:ext uri="{FF2B5EF4-FFF2-40B4-BE49-F238E27FC236}">
+                <a16:creationId xmlns:a16="http://schemas.microsoft.com/office/drawing/2014/main" id="{E8D66595-EBE7-61DA-8AD1-491C18A00ACB}"/>
+              </a:ext>
+            </a:extLst>
+          </p:cNvPr>
+          <p:cNvSpPr>
+            <a:spLocks noGrp="1"/>
+          </p:cNvSpPr>
+          <p:nvPr>
+            <p:ph type="title"/>
+          </p:nvPr>
+        </p:nvSpPr>
+        <p:spPr>
+          <a:xfrm>
+            <a:off x="630936" y="502920"/>
+            <a:ext cx="3419856" cy="1463040"/>
+          </a:xfrm>
+        </p:spPr>
+        <p:txBody>
+          <a:bodyPr anchor="ctr">
+            <a:normAutofit/>
+          </a:bodyPr>
+          <a:lstStyle/>
+          <a:p>
+            <a:r>
+              <a:rPr lang="es-ES_tradnl" sz="4800"/>
+              <a:t>Supercluster</a:t>
+            </a:r>
+          </a:p>
+        </p:txBody>
+      </p:sp>
+      <p:sp>
+        <p:nvSpPr>
+          <p:cNvPr id="13" name="sketch line">
+            <a:extLst>
+              <a:ext uri="{FF2B5EF4-FFF2-40B4-BE49-F238E27FC236}">
+                <a16:creationId xmlns:a16="http://schemas.microsoft.com/office/drawing/2014/main" id="{2E92FA66-67D7-4CB4-94D3-E643A9AD4757}"/>
+              </a:ext>
+              <a:ext uri="{C183D7F6-B498-43B3-948B-1728B52AA6E4}">
+                <adec:decorative xmlns:adec="http://schemas.microsoft.com/office/drawing/2017/decorative" val="1"/>
+              </a:ext>
+            </a:extLst>
+          </p:cNvPr>
+          <p:cNvSpPr>
+            <a:spLocks noGrp="1" noRot="1" noChangeAspect="1" noMove="1" noResize="1" noEditPoints="1" noAdjustHandles="1" noChangeArrowheads="1" noChangeShapeType="1" noTextEdit="1"/>
+          </p:cNvSpPr>
+          <p:nvPr>
+            <p:extLst>
+              <p:ext uri="{386F3935-93C4-4BCD-93E2-E3B085C9AB24}">
+                <p16:designElem xmlns:p16="http://schemas.microsoft.com/office/powerpoint/2015/main" val="1"/>
+              </p:ext>
+            </p:extLst>
+          </p:nvPr>
+        </p:nvSpPr>
+        <p:spPr>
+          <a:xfrm rot="5400000">
+            <a:off x="3566159" y="1225296"/>
+            <a:ext cx="1554480" cy="18288"/>
+          </a:xfrm>
+          <a:custGeom>
+            <a:avLst/>
+            <a:gdLst>
+              <a:gd name="csX0" fmla="*/ 0 w 1554480"/>
+              <a:gd name="csY0" fmla="*/ 0 h 18288"/>
+              <a:gd name="csX1" fmla="*/ 549250 w 1554480"/>
+              <a:gd name="csY1" fmla="*/ 0 h 18288"/>
+              <a:gd name="csX2" fmla="*/ 1082954 w 1554480"/>
+              <a:gd name="csY2" fmla="*/ 0 h 18288"/>
+              <a:gd name="csX3" fmla="*/ 1554480 w 1554480"/>
+              <a:gd name="csY3" fmla="*/ 0 h 18288"/>
+              <a:gd name="csX4" fmla="*/ 1554480 w 1554480"/>
+              <a:gd name="csY4" fmla="*/ 18288 h 18288"/>
+              <a:gd name="csX5" fmla="*/ 1067410 w 1554480"/>
+              <a:gd name="csY5" fmla="*/ 18288 h 18288"/>
+              <a:gd name="csX6" fmla="*/ 549250 w 1554480"/>
+              <a:gd name="csY6" fmla="*/ 18288 h 18288"/>
+              <a:gd name="csX7" fmla="*/ 0 w 1554480"/>
+              <a:gd name="csY7" fmla="*/ 18288 h 18288"/>
+              <a:gd name="csX8" fmla="*/ 0 w 1554480"/>
+              <a:gd name="csY8" fmla="*/ 0 h 18288"/>
+            </a:gdLst>
+            <a:ahLst/>
+            <a:cxnLst>
+              <a:cxn ang="0">
+                <a:pos x="csX0" y="csY0"/>
+              </a:cxn>
+              <a:cxn ang="0">
+                <a:pos x="csX1" y="csY1"/>
+              </a:cxn>
+              <a:cxn ang="0">
+                <a:pos x="csX2" y="csY2"/>
+              </a:cxn>
+              <a:cxn ang="0">
+                <a:pos x="csX3" y="csY3"/>
+              </a:cxn>
+              <a:cxn ang="0">
+                <a:pos x="csX4" y="csY4"/>
+              </a:cxn>
+              <a:cxn ang="0">
+                <a:pos x="csX5" y="csY5"/>
+              </a:cxn>
+              <a:cxn ang="0">
+                <a:pos x="csX6" y="csY6"/>
+              </a:cxn>
+              <a:cxn ang="0">
+                <a:pos x="csX7" y="csY7"/>
+              </a:cxn>
+              <a:cxn ang="0">
+                <a:pos x="csX8" y="csY8"/>
+              </a:cxn>
+            </a:cxnLst>
+            <a:rect l="l" t="t" r="r" b="b"/>
+            <a:pathLst>
+              <a:path w="1554480" h="18288" fill="none" extrusionOk="0">
+                <a:moveTo>
+                  <a:pt x="0" y="0"/>
+                </a:moveTo>
+                <a:cubicBezTo>
+                  <a:pt x="114141" y="-19864"/>
+                  <a:pt x="345055" y="-1657"/>
+                  <a:pt x="549250" y="0"/>
+                </a:cubicBezTo>
+                <a:cubicBezTo>
+                  <a:pt x="753445" y="1657"/>
+                  <a:pt x="862292" y="-5674"/>
+                  <a:pt x="1082954" y="0"/>
+                </a:cubicBezTo>
+                <a:cubicBezTo>
+                  <a:pt x="1303616" y="5674"/>
+                  <a:pt x="1363530" y="4537"/>
+                  <a:pt x="1554480" y="0"/>
+                </a:cubicBezTo>
+                <a:cubicBezTo>
+                  <a:pt x="1554963" y="7176"/>
+                  <a:pt x="1553909" y="13682"/>
+                  <a:pt x="1554480" y="18288"/>
+                </a:cubicBezTo>
+                <a:cubicBezTo>
+                  <a:pt x="1338847" y="6127"/>
+                  <a:pt x="1215066" y="37851"/>
+                  <a:pt x="1067410" y="18288"/>
+                </a:cubicBezTo>
+                <a:cubicBezTo>
+                  <a:pt x="919754" y="-1275"/>
+                  <a:pt x="800465" y="3080"/>
+                  <a:pt x="549250" y="18288"/>
+                </a:cubicBezTo>
+                <a:cubicBezTo>
+                  <a:pt x="298035" y="33496"/>
+                  <a:pt x="158868" y="22769"/>
+                  <a:pt x="0" y="18288"/>
+                </a:cubicBezTo>
+                <a:cubicBezTo>
+                  <a:pt x="-655" y="13237"/>
+                  <a:pt x="709" y="4645"/>
+                  <a:pt x="0" y="0"/>
+                </a:cubicBezTo>
+                <a:close/>
+              </a:path>
+              <a:path w="1554480" h="18288" stroke="0" extrusionOk="0">
+                <a:moveTo>
+                  <a:pt x="0" y="0"/>
+                </a:moveTo>
+                <a:cubicBezTo>
+                  <a:pt x="249941" y="-58"/>
+                  <a:pt x="367334" y="23448"/>
+                  <a:pt x="502615" y="0"/>
+                </a:cubicBezTo>
+                <a:cubicBezTo>
+                  <a:pt x="637897" y="-23448"/>
+                  <a:pt x="813653" y="-20418"/>
+                  <a:pt x="974141" y="0"/>
+                </a:cubicBezTo>
+                <a:cubicBezTo>
+                  <a:pt x="1134629" y="20418"/>
+                  <a:pt x="1268772" y="6288"/>
+                  <a:pt x="1554480" y="0"/>
+                </a:cubicBezTo>
+                <a:cubicBezTo>
+                  <a:pt x="1554917" y="7222"/>
+                  <a:pt x="1555359" y="13299"/>
+                  <a:pt x="1554480" y="18288"/>
+                </a:cubicBezTo>
+                <a:cubicBezTo>
+                  <a:pt x="1336087" y="12172"/>
+                  <a:pt x="1310024" y="19759"/>
+                  <a:pt x="1067410" y="18288"/>
+                </a:cubicBezTo>
+                <a:cubicBezTo>
+                  <a:pt x="824796" y="16818"/>
+                  <a:pt x="787902" y="34647"/>
+                  <a:pt x="518160" y="18288"/>
+                </a:cubicBezTo>
+                <a:cubicBezTo>
+                  <a:pt x="248418" y="1930"/>
+                  <a:pt x="133160" y="9205"/>
+                  <a:pt x="0" y="18288"/>
+                </a:cubicBezTo>
+                <a:cubicBezTo>
+                  <a:pt x="-643" y="9451"/>
+                  <a:pt x="-340" y="7114"/>
+                  <a:pt x="0" y="0"/>
+                </a:cubicBezTo>
+                <a:close/>
+              </a:path>
+            </a:pathLst>
+          </a:custGeom>
+          <a:solidFill>
+            <a:schemeClr val="accent2"/>
+          </a:solidFill>
+          <a:ln w="41275" cap="rnd">
+            <a:solidFill>
+              <a:schemeClr val="accent2"/>
+            </a:solidFill>
+            <a:round/>
+            <a:extLst>
+              <a:ext uri="{C807C97D-BFC1-408E-A445-0C87EB9F89A2}">
+                <ask:lineSketchStyleProps xmlns:ask="http://schemas.microsoft.com/office/drawing/2018/sketchyshapes" sd="1219033472">
+                  <a:prstGeom prst="rect">
+                    <a:avLst/>
+                  </a:prstGeom>
+                  <ask:type>
+                    <ask:lineSketchFreehand/>
+                  </ask:type>
+                </ask:lineSketchStyleProps>
+              </a:ext>
+            </a:extLst>
+          </a:ln>
+        </p:spPr>
+        <p:style>
+          <a:lnRef idx="2">
+            <a:schemeClr val="accent1">
+              <a:shade val="50000"/>
+            </a:schemeClr>
+          </a:lnRef>
+          <a:fillRef idx="1">
+            <a:schemeClr val="accent1"/>
+          </a:fillRef>
+          <a:effectRef idx="0">
+            <a:schemeClr val="accent1"/>
+          </a:effectRef>
+          <a:fontRef idx="minor">
+            <a:schemeClr val="lt1"/>
+          </a:fontRef>
+        </p:style>
+        <p:txBody>
+          <a:bodyPr rtlCol="0" anchor="ctr"/>
+          <a:lstStyle/>
+          <a:p>
+            <a:pPr algn="ctr"/>
+            <a:endParaRPr lang="en-US"/>
+          </a:p>
+        </p:txBody>
+      </p:sp>
+      <p:sp>
+        <p:nvSpPr>
+          <p:cNvPr id="3" name="Espaço Reservado para Conteúdo 2">
+            <a:extLst>
+              <a:ext uri="{FF2B5EF4-FFF2-40B4-BE49-F238E27FC236}">
+                <a16:creationId xmlns:a16="http://schemas.microsoft.com/office/drawing/2014/main" id="{8EA23D62-CE20-CB2D-B435-8C66909B81DD}"/>
+              </a:ext>
+            </a:extLst>
+          </p:cNvPr>
+          <p:cNvSpPr>
+            <a:spLocks noGrp="1"/>
+          </p:cNvSpPr>
+          <p:nvPr>
+            <p:ph idx="1"/>
+          </p:nvPr>
+        </p:nvSpPr>
+        <p:spPr>
+          <a:xfrm>
+            <a:off x="4654295" y="502920"/>
+            <a:ext cx="6894576" cy="1463040"/>
+          </a:xfrm>
+        </p:spPr>
+        <p:txBody>
+          <a:bodyPr anchor="ctr">
+            <a:normAutofit/>
+          </a:bodyPr>
+          <a:lstStyle/>
+          <a:p>
+            <a:r>
+              <a:rPr lang="es-ES_tradnl" sz="2200"/>
+              <a:t>Altura de corte 12 gera 6 clusters, grupos estão começando a apresentar fronteras pouco estaveis</a:t>
+            </a:r>
+          </a:p>
+        </p:txBody>
+      </p:sp>
+      <p:pic>
+        <p:nvPicPr>
+          <p:cNvPr id="6" name="Imagem 5" descr="Tela de computador com texto preto sobre fundo branco&#10;&#10;O conteúdo gerado por IA pode estar incorreto.">
+            <a:extLst>
+              <a:ext uri="{FF2B5EF4-FFF2-40B4-BE49-F238E27FC236}">
+                <a16:creationId xmlns:a16="http://schemas.microsoft.com/office/drawing/2014/main" id="{60B34DB8-39D2-2365-EF48-495CA683C799}"/>
+              </a:ext>
+            </a:extLst>
+          </p:cNvPr>
+          <p:cNvPicPr>
+            <a:picLocks noChangeAspect="1"/>
+          </p:cNvPicPr>
+          <p:nvPr/>
+        </p:nvPicPr>
+        <p:blipFill>
+          <a:blip r:embed="rId2"/>
+          <a:stretch>
+            <a:fillRect/>
+          </a:stretch>
+        </p:blipFill>
+        <p:spPr>
+          <a:xfrm>
+            <a:off x="1924326" y="1965960"/>
+            <a:ext cx="8343348" cy="4860000"/>
+          </a:xfrm>
+          <a:prstGeom prst="rect">
+            <a:avLst/>
+          </a:prstGeom>
+        </p:spPr>
+      </p:pic>
+    </p:spTree>
+    <p:extLst>
+      <p:ext uri="{BB962C8B-B14F-4D97-AF65-F5344CB8AC3E}">
+        <p14:creationId xmlns:p14="http://schemas.microsoft.com/office/powerpoint/2010/main" val="3789463574"/>
+      </p:ext>
+    </p:extLst>
+  </p:cSld>
+  <p:clrMapOvr>
+    <a:masterClrMapping/>
+  </p:clrMapOvr>
+</p:sld>
+</file>
+
+<file path=ppt/slides/slide13.xml><?xml version="1.0" encoding="utf-8"?>
+<p:sld xmlns:a="http://schemas.openxmlformats.org/drawingml/2006/main" xmlns:r="http://schemas.openxmlformats.org/officeDocument/2006/relationships" xmlns:p="http://schemas.openxmlformats.org/presentationml/2006/main">
+  <p:cSld>
+    <p:bg>
+      <p:bgPr>
+        <a:solidFill>
+          <a:schemeClr val="bg1"/>
+        </a:solidFill>
+        <a:effectLst/>
+      </p:bgPr>
+    </p:bg>
+    <p:spTree>
+      <p:nvGrpSpPr>
+        <p:cNvPr id="1" name="">
+          <a:extLst>
+            <a:ext uri="{FF2B5EF4-FFF2-40B4-BE49-F238E27FC236}">
+              <a16:creationId xmlns:a16="http://schemas.microsoft.com/office/drawing/2014/main" id="{D8B4B74E-445D-AF62-2CBA-D6F5FF989F43}"/>
+            </a:ext>
+          </a:extLst>
+        </p:cNvPr>
+        <p:cNvGrpSpPr/>
+        <p:nvPr/>
+      </p:nvGrpSpPr>
+      <p:grpSpPr>
+        <a:xfrm>
+          <a:off x="0" y="0"/>
+          <a:ext cx="0" cy="0"/>
+          <a:chOff x="0" y="0"/>
+          <a:chExt cx="0" cy="0"/>
+        </a:xfrm>
+      </p:grpSpPr>
+      <p:sp useBgFill="1">
+        <p:nvSpPr>
+          <p:cNvPr id="10" name="Rectangle 9">
+            <a:extLst>
+              <a:ext uri="{FF2B5EF4-FFF2-40B4-BE49-F238E27FC236}">
+                <a16:creationId xmlns:a16="http://schemas.microsoft.com/office/drawing/2014/main" id="{32AEEBC8-9D30-42EF-95F2-386C2653FBF0}"/>
+              </a:ext>
+              <a:ext uri="{C183D7F6-B498-43B3-948B-1728B52AA6E4}">
+                <adec:decorative xmlns:adec="http://schemas.microsoft.com/office/drawing/2017/decorative" val="1"/>
+              </a:ext>
+            </a:extLst>
+          </p:cNvPr>
+          <p:cNvSpPr>
+            <a:spLocks noGrp="1" noRot="1" noChangeAspect="1" noMove="1" noResize="1" noEditPoints="1" noAdjustHandles="1" noChangeArrowheads="1" noChangeShapeType="1" noTextEdit="1"/>
+          </p:cNvSpPr>
+          <p:nvPr>
+            <p:extLst>
+              <p:ext uri="{386F3935-93C4-4BCD-93E2-E3B085C9AB24}">
+                <p16:designElem xmlns:p16="http://schemas.microsoft.com/office/powerpoint/2015/main" val="1"/>
+              </p:ext>
+            </p:extLst>
+          </p:nvPr>
+        </p:nvSpPr>
+        <p:spPr>
+          <a:xfrm>
+            <a:off x="0" y="0"/>
+            <a:ext cx="12192000" cy="6858000"/>
+          </a:xfrm>
+          <a:prstGeom prst="rect">
+            <a:avLst/>
+          </a:prstGeom>
+          <a:ln>
+            <a:noFill/>
+          </a:ln>
+        </p:spPr>
+        <p:style>
+          <a:lnRef idx="2">
+            <a:schemeClr val="accent1">
+              <a:shade val="50000"/>
+            </a:schemeClr>
+          </a:lnRef>
+          <a:fillRef idx="1">
+            <a:schemeClr val="accent1"/>
+          </a:fillRef>
+          <a:effectRef idx="0">
+            <a:schemeClr val="accent1"/>
+          </a:effectRef>
+          <a:fontRef idx="minor">
+            <a:schemeClr val="lt1"/>
+          </a:fontRef>
+        </p:style>
+        <p:txBody>
+          <a:bodyPr rtlCol="0" anchor="ctr"/>
+          <a:lstStyle/>
+          <a:p>
+            <a:pPr algn="ctr"/>
+            <a:endParaRPr lang="en-US"/>
+          </a:p>
+        </p:txBody>
+      </p:sp>
+      <p:sp>
+        <p:nvSpPr>
+          <p:cNvPr id="2" name="Título 1">
+            <a:extLst>
+              <a:ext uri="{FF2B5EF4-FFF2-40B4-BE49-F238E27FC236}">
+                <a16:creationId xmlns:a16="http://schemas.microsoft.com/office/drawing/2014/main" id="{5FBDC2DC-701B-9AEC-D910-04A1C2A969AE}"/>
+              </a:ext>
+            </a:extLst>
+          </p:cNvPr>
+          <p:cNvSpPr>
+            <a:spLocks noGrp="1"/>
+          </p:cNvSpPr>
+          <p:nvPr>
+            <p:ph type="title"/>
+          </p:nvPr>
+        </p:nvSpPr>
+        <p:spPr>
+          <a:xfrm>
+            <a:off x="630936" y="502920"/>
+            <a:ext cx="3419856" cy="1463040"/>
+          </a:xfrm>
+        </p:spPr>
+        <p:txBody>
+          <a:bodyPr anchor="ctr">
+            <a:normAutofit/>
+          </a:bodyPr>
+          <a:lstStyle/>
+          <a:p>
+            <a:r>
+              <a:rPr lang="es-ES_tradnl" sz="4800"/>
+              <a:t>Supercluster</a:t>
+            </a:r>
+          </a:p>
+        </p:txBody>
+      </p:sp>
+      <p:sp>
+        <p:nvSpPr>
+          <p:cNvPr id="12" name="sketch line">
+            <a:extLst>
+              <a:ext uri="{FF2B5EF4-FFF2-40B4-BE49-F238E27FC236}">
+                <a16:creationId xmlns:a16="http://schemas.microsoft.com/office/drawing/2014/main" id="{2E92FA66-67D7-4CB4-94D3-E643A9AD4757}"/>
+              </a:ext>
+              <a:ext uri="{C183D7F6-B498-43B3-948B-1728B52AA6E4}">
+                <adec:decorative xmlns:adec="http://schemas.microsoft.com/office/drawing/2017/decorative" val="1"/>
+              </a:ext>
+            </a:extLst>
+          </p:cNvPr>
+          <p:cNvSpPr>
+            <a:spLocks noGrp="1" noRot="1" noChangeAspect="1" noMove="1" noResize="1" noEditPoints="1" noAdjustHandles="1" noChangeArrowheads="1" noChangeShapeType="1" noTextEdit="1"/>
+          </p:cNvSpPr>
+          <p:nvPr>
+            <p:extLst>
+              <p:ext uri="{386F3935-93C4-4BCD-93E2-E3B085C9AB24}">
+                <p16:designElem xmlns:p16="http://schemas.microsoft.com/office/powerpoint/2015/main" val="1"/>
+              </p:ext>
+            </p:extLst>
+          </p:nvPr>
+        </p:nvSpPr>
+        <p:spPr>
+          <a:xfrm rot="5400000">
+            <a:off x="3566159" y="1225296"/>
+            <a:ext cx="1554480" cy="18288"/>
+          </a:xfrm>
+          <a:custGeom>
+            <a:avLst/>
+            <a:gdLst>
+              <a:gd name="csX0" fmla="*/ 0 w 1554480"/>
+              <a:gd name="csY0" fmla="*/ 0 h 18288"/>
+              <a:gd name="csX1" fmla="*/ 549250 w 1554480"/>
+              <a:gd name="csY1" fmla="*/ 0 h 18288"/>
+              <a:gd name="csX2" fmla="*/ 1082954 w 1554480"/>
+              <a:gd name="csY2" fmla="*/ 0 h 18288"/>
+              <a:gd name="csX3" fmla="*/ 1554480 w 1554480"/>
+              <a:gd name="csY3" fmla="*/ 0 h 18288"/>
+              <a:gd name="csX4" fmla="*/ 1554480 w 1554480"/>
+              <a:gd name="csY4" fmla="*/ 18288 h 18288"/>
+              <a:gd name="csX5" fmla="*/ 1067410 w 1554480"/>
+              <a:gd name="csY5" fmla="*/ 18288 h 18288"/>
+              <a:gd name="csX6" fmla="*/ 549250 w 1554480"/>
+              <a:gd name="csY6" fmla="*/ 18288 h 18288"/>
+              <a:gd name="csX7" fmla="*/ 0 w 1554480"/>
+              <a:gd name="csY7" fmla="*/ 18288 h 18288"/>
+              <a:gd name="csX8" fmla="*/ 0 w 1554480"/>
+              <a:gd name="csY8" fmla="*/ 0 h 18288"/>
+            </a:gdLst>
+            <a:ahLst/>
+            <a:cxnLst>
+              <a:cxn ang="0">
+                <a:pos x="csX0" y="csY0"/>
+              </a:cxn>
+              <a:cxn ang="0">
+                <a:pos x="csX1" y="csY1"/>
+              </a:cxn>
+              <a:cxn ang="0">
+                <a:pos x="csX2" y="csY2"/>
+              </a:cxn>
+              <a:cxn ang="0">
+                <a:pos x="csX3" y="csY3"/>
+              </a:cxn>
+              <a:cxn ang="0">
+                <a:pos x="csX4" y="csY4"/>
+              </a:cxn>
+              <a:cxn ang="0">
+                <a:pos x="csX5" y="csY5"/>
+              </a:cxn>
+              <a:cxn ang="0">
+                <a:pos x="csX6" y="csY6"/>
+              </a:cxn>
+              <a:cxn ang="0">
+                <a:pos x="csX7" y="csY7"/>
+              </a:cxn>
+              <a:cxn ang="0">
+                <a:pos x="csX8" y="csY8"/>
+              </a:cxn>
+            </a:cxnLst>
+            <a:rect l="l" t="t" r="r" b="b"/>
+            <a:pathLst>
+              <a:path w="1554480" h="18288" fill="none" extrusionOk="0">
+                <a:moveTo>
+                  <a:pt x="0" y="0"/>
+                </a:moveTo>
+                <a:cubicBezTo>
+                  <a:pt x="114141" y="-19864"/>
+                  <a:pt x="345055" y="-1657"/>
+                  <a:pt x="549250" y="0"/>
+                </a:cubicBezTo>
+                <a:cubicBezTo>
+                  <a:pt x="753445" y="1657"/>
+                  <a:pt x="862292" y="-5674"/>
+                  <a:pt x="1082954" y="0"/>
+                </a:cubicBezTo>
+                <a:cubicBezTo>
+                  <a:pt x="1303616" y="5674"/>
+                  <a:pt x="1363530" y="4537"/>
+                  <a:pt x="1554480" y="0"/>
+                </a:cubicBezTo>
+                <a:cubicBezTo>
+                  <a:pt x="1554963" y="7176"/>
+                  <a:pt x="1553909" y="13682"/>
+                  <a:pt x="1554480" y="18288"/>
+                </a:cubicBezTo>
+                <a:cubicBezTo>
+                  <a:pt x="1338847" y="6127"/>
+                  <a:pt x="1215066" y="37851"/>
+                  <a:pt x="1067410" y="18288"/>
+                </a:cubicBezTo>
+                <a:cubicBezTo>
+                  <a:pt x="919754" y="-1275"/>
+                  <a:pt x="800465" y="3080"/>
+                  <a:pt x="549250" y="18288"/>
+                </a:cubicBezTo>
+                <a:cubicBezTo>
+                  <a:pt x="298035" y="33496"/>
+                  <a:pt x="158868" y="22769"/>
+                  <a:pt x="0" y="18288"/>
+                </a:cubicBezTo>
+                <a:cubicBezTo>
+                  <a:pt x="-655" y="13237"/>
+                  <a:pt x="709" y="4645"/>
+                  <a:pt x="0" y="0"/>
+                </a:cubicBezTo>
+                <a:close/>
+              </a:path>
+              <a:path w="1554480" h="18288" stroke="0" extrusionOk="0">
+                <a:moveTo>
+                  <a:pt x="0" y="0"/>
+                </a:moveTo>
+                <a:cubicBezTo>
+                  <a:pt x="249941" y="-58"/>
+                  <a:pt x="367334" y="23448"/>
+                  <a:pt x="502615" y="0"/>
+                </a:cubicBezTo>
+                <a:cubicBezTo>
+                  <a:pt x="637897" y="-23448"/>
+                  <a:pt x="813653" y="-20418"/>
+                  <a:pt x="974141" y="0"/>
+                </a:cubicBezTo>
+                <a:cubicBezTo>
+                  <a:pt x="1134629" y="20418"/>
+                  <a:pt x="1268772" y="6288"/>
+                  <a:pt x="1554480" y="0"/>
+                </a:cubicBezTo>
+                <a:cubicBezTo>
+                  <a:pt x="1554917" y="7222"/>
+                  <a:pt x="1555359" y="13299"/>
+                  <a:pt x="1554480" y="18288"/>
+                </a:cubicBezTo>
+                <a:cubicBezTo>
+                  <a:pt x="1336087" y="12172"/>
+                  <a:pt x="1310024" y="19759"/>
+                  <a:pt x="1067410" y="18288"/>
+                </a:cubicBezTo>
+                <a:cubicBezTo>
+                  <a:pt x="824796" y="16818"/>
+                  <a:pt x="787902" y="34647"/>
+                  <a:pt x="518160" y="18288"/>
+                </a:cubicBezTo>
+                <a:cubicBezTo>
+                  <a:pt x="248418" y="1930"/>
+                  <a:pt x="133160" y="9205"/>
+                  <a:pt x="0" y="18288"/>
+                </a:cubicBezTo>
+                <a:cubicBezTo>
+                  <a:pt x="-643" y="9451"/>
+                  <a:pt x="-340" y="7114"/>
+                  <a:pt x="0" y="0"/>
+                </a:cubicBezTo>
+                <a:close/>
+              </a:path>
+            </a:pathLst>
+          </a:custGeom>
+          <a:solidFill>
+            <a:schemeClr val="accent2"/>
+          </a:solidFill>
+          <a:ln w="41275" cap="rnd">
+            <a:solidFill>
+              <a:schemeClr val="accent2"/>
+            </a:solidFill>
+            <a:round/>
+            <a:extLst>
+              <a:ext uri="{C807C97D-BFC1-408E-A445-0C87EB9F89A2}">
+                <ask:lineSketchStyleProps xmlns:ask="http://schemas.microsoft.com/office/drawing/2018/sketchyshapes" sd="1219033472">
+                  <a:prstGeom prst="rect">
+                    <a:avLst/>
+                  </a:prstGeom>
+                  <ask:type>
+                    <ask:lineSketchFreehand/>
+                  </ask:type>
+                </ask:lineSketchStyleProps>
+              </a:ext>
+            </a:extLst>
+          </a:ln>
+        </p:spPr>
+        <p:style>
+          <a:lnRef idx="2">
+            <a:schemeClr val="accent1">
+              <a:shade val="50000"/>
+            </a:schemeClr>
+          </a:lnRef>
+          <a:fillRef idx="1">
+            <a:schemeClr val="accent1"/>
+          </a:fillRef>
+          <a:effectRef idx="0">
+            <a:schemeClr val="accent1"/>
+          </a:effectRef>
+          <a:fontRef idx="minor">
+            <a:schemeClr val="lt1"/>
+          </a:fontRef>
+        </p:style>
+        <p:txBody>
+          <a:bodyPr rtlCol="0" anchor="ctr"/>
+          <a:lstStyle/>
+          <a:p>
+            <a:pPr algn="ctr"/>
+            <a:endParaRPr lang="en-US"/>
+          </a:p>
+        </p:txBody>
+      </p:sp>
+      <p:sp>
+        <p:nvSpPr>
+          <p:cNvPr id="3" name="Espaço Reservado para Conteúdo 2">
+            <a:extLst>
+              <a:ext uri="{FF2B5EF4-FFF2-40B4-BE49-F238E27FC236}">
+                <a16:creationId xmlns:a16="http://schemas.microsoft.com/office/drawing/2014/main" id="{378D4924-8640-1C85-DF39-C31F9FD7D4D8}"/>
+              </a:ext>
+            </a:extLst>
+          </p:cNvPr>
+          <p:cNvSpPr>
+            <a:spLocks noGrp="1"/>
+          </p:cNvSpPr>
+          <p:nvPr>
+            <p:ph idx="1"/>
+          </p:nvPr>
+        </p:nvSpPr>
+        <p:spPr>
+          <a:xfrm>
+            <a:off x="4654295" y="502920"/>
+            <a:ext cx="6894576" cy="1463040"/>
+          </a:xfrm>
+        </p:spPr>
+        <p:txBody>
+          <a:bodyPr anchor="ctr">
+            <a:normAutofit/>
+          </a:bodyPr>
+          <a:lstStyle/>
+          <a:p>
+            <a:r>
+              <a:rPr lang="es-ES_tradnl" sz="2200" dirty="0"/>
+              <a:t>Altura de corte 14 </a:t>
+            </a:r>
+            <a:r>
+              <a:rPr lang="es-ES_tradnl" sz="2200" dirty="0" err="1"/>
+              <a:t>gera</a:t>
+            </a:r>
+            <a:r>
+              <a:rPr lang="es-ES_tradnl" sz="2200" dirty="0"/>
+              <a:t> 5 </a:t>
+            </a:r>
+            <a:r>
+              <a:rPr lang="es-ES_tradnl" sz="2200" dirty="0" err="1"/>
+              <a:t>clusters</a:t>
+            </a:r>
+            <a:r>
+              <a:rPr lang="es-ES_tradnl" sz="2200" dirty="0"/>
+              <a:t>, grupos </a:t>
+            </a:r>
+            <a:r>
+              <a:rPr lang="es-ES_tradnl" sz="2200" dirty="0" err="1"/>
+              <a:t>começam</a:t>
+            </a:r>
+            <a:r>
+              <a:rPr lang="es-ES_tradnl" sz="2200" dirty="0"/>
+              <a:t> a </a:t>
+            </a:r>
+            <a:r>
+              <a:rPr lang="es-ES_tradnl" sz="2200" dirty="0" err="1"/>
+              <a:t>apresentar</a:t>
+            </a:r>
+            <a:r>
+              <a:rPr lang="es-ES_tradnl" sz="2200" dirty="0"/>
+              <a:t> fronteras </a:t>
+            </a:r>
+            <a:r>
+              <a:rPr lang="es-ES_tradnl" sz="2200" dirty="0" err="1"/>
+              <a:t>estaveis</a:t>
+            </a:r>
+            <a:r>
+              <a:rPr lang="es-ES_tradnl" sz="2200" dirty="0"/>
+              <a:t>, mas </a:t>
+            </a:r>
+            <a:r>
+              <a:rPr lang="es-ES_tradnl" sz="2200" dirty="0" err="1"/>
+              <a:t>ainda</a:t>
+            </a:r>
+            <a:r>
+              <a:rPr lang="es-ES_tradnl" sz="2200" dirty="0"/>
+              <a:t> cabe ajuste</a:t>
+            </a:r>
+          </a:p>
+        </p:txBody>
+      </p:sp>
+      <p:pic>
+        <p:nvPicPr>
+          <p:cNvPr id="5" name="Imagem 4" descr="Gráfico, Gráfico de dispersão&#10;&#10;O conteúdo gerado por IA pode estar incorreto.">
+            <a:extLst>
+              <a:ext uri="{FF2B5EF4-FFF2-40B4-BE49-F238E27FC236}">
+                <a16:creationId xmlns:a16="http://schemas.microsoft.com/office/drawing/2014/main" id="{73F81EE6-1C49-077E-BC29-CCF38B9CD23F}"/>
+              </a:ext>
+            </a:extLst>
+          </p:cNvPr>
+          <p:cNvPicPr>
+            <a:picLocks noChangeAspect="1"/>
+          </p:cNvPicPr>
+          <p:nvPr/>
+        </p:nvPicPr>
+        <p:blipFill>
+          <a:blip r:embed="rId2"/>
+          <a:stretch>
+            <a:fillRect/>
+          </a:stretch>
+        </p:blipFill>
+        <p:spPr>
+          <a:xfrm>
+            <a:off x="1924326" y="1965960"/>
+            <a:ext cx="8343348" cy="4860000"/>
+          </a:xfrm>
+          <a:prstGeom prst="rect">
+            <a:avLst/>
+          </a:prstGeom>
+        </p:spPr>
+      </p:pic>
+    </p:spTree>
+    <p:extLst>
+      <p:ext uri="{BB962C8B-B14F-4D97-AF65-F5344CB8AC3E}">
+        <p14:creationId xmlns:p14="http://schemas.microsoft.com/office/powerpoint/2010/main" val="4010654470"/>
+      </p:ext>
+    </p:extLst>
+  </p:cSld>
+  <p:clrMapOvr>
+    <a:masterClrMapping/>
+  </p:clrMapOvr>
+</p:sld>
+</file>
+
+<file path=ppt/slides/slide14.xml><?xml version="1.0" encoding="utf-8"?>
+<p:sld xmlns:a="http://schemas.openxmlformats.org/drawingml/2006/main" xmlns:r="http://schemas.openxmlformats.org/officeDocument/2006/relationships" xmlns:p="http://schemas.openxmlformats.org/presentationml/2006/main">
+  <p:cSld>
+    <p:bg>
+      <p:bgPr>
+        <a:solidFill>
+          <a:schemeClr val="bg1"/>
+        </a:solidFill>
+        <a:effectLst/>
+      </p:bgPr>
+    </p:bg>
+    <p:spTree>
+      <p:nvGrpSpPr>
+        <p:cNvPr id="1" name="">
+          <a:extLst>
+            <a:ext uri="{FF2B5EF4-FFF2-40B4-BE49-F238E27FC236}">
+              <a16:creationId xmlns:a16="http://schemas.microsoft.com/office/drawing/2014/main" id="{71290C44-336E-CCDC-633E-838BC1023193}"/>
+            </a:ext>
+          </a:extLst>
+        </p:cNvPr>
+        <p:cNvGrpSpPr/>
+        <p:nvPr/>
+      </p:nvGrpSpPr>
+      <p:grpSpPr>
+        <a:xfrm>
+          <a:off x="0" y="0"/>
+          <a:ext cx="0" cy="0"/>
+          <a:chOff x="0" y="0"/>
+          <a:chExt cx="0" cy="0"/>
+        </a:xfrm>
+      </p:grpSpPr>
+      <p:sp useBgFill="1">
+        <p:nvSpPr>
+          <p:cNvPr id="10" name="Rectangle 9">
+            <a:extLst>
+              <a:ext uri="{FF2B5EF4-FFF2-40B4-BE49-F238E27FC236}">
+                <a16:creationId xmlns:a16="http://schemas.microsoft.com/office/drawing/2014/main" id="{32AEEBC8-9D30-42EF-95F2-386C2653FBF0}"/>
+              </a:ext>
+              <a:ext uri="{C183D7F6-B498-43B3-948B-1728B52AA6E4}">
+                <adec:decorative xmlns:adec="http://schemas.microsoft.com/office/drawing/2017/decorative" val="1"/>
+              </a:ext>
+            </a:extLst>
+          </p:cNvPr>
+          <p:cNvSpPr>
+            <a:spLocks noGrp="1" noRot="1" noChangeAspect="1" noMove="1" noResize="1" noEditPoints="1" noAdjustHandles="1" noChangeArrowheads="1" noChangeShapeType="1" noTextEdit="1"/>
+          </p:cNvSpPr>
+          <p:nvPr>
+            <p:extLst>
+              <p:ext uri="{386F3935-93C4-4BCD-93E2-E3B085C9AB24}">
+                <p16:designElem xmlns:p16="http://schemas.microsoft.com/office/powerpoint/2015/main" val="1"/>
+              </p:ext>
+            </p:extLst>
+          </p:nvPr>
+        </p:nvSpPr>
+        <p:spPr>
+          <a:xfrm>
+            <a:off x="0" y="0"/>
+            <a:ext cx="12192000" cy="6858000"/>
+          </a:xfrm>
+          <a:prstGeom prst="rect">
+            <a:avLst/>
+          </a:prstGeom>
+          <a:ln>
+            <a:noFill/>
+          </a:ln>
+        </p:spPr>
+        <p:style>
+          <a:lnRef idx="2">
+            <a:schemeClr val="accent1">
+              <a:shade val="50000"/>
+            </a:schemeClr>
+          </a:lnRef>
+          <a:fillRef idx="1">
+            <a:schemeClr val="accent1"/>
+          </a:fillRef>
+          <a:effectRef idx="0">
+            <a:schemeClr val="accent1"/>
+          </a:effectRef>
+          <a:fontRef idx="minor">
+            <a:schemeClr val="lt1"/>
+          </a:fontRef>
+        </p:style>
+        <p:txBody>
+          <a:bodyPr rtlCol="0" anchor="ctr"/>
+          <a:lstStyle/>
+          <a:p>
+            <a:pPr algn="ctr"/>
+            <a:endParaRPr lang="en-US"/>
+          </a:p>
+        </p:txBody>
+      </p:sp>
+      <p:sp>
+        <p:nvSpPr>
+          <p:cNvPr id="2" name="Título 1">
+            <a:extLst>
+              <a:ext uri="{FF2B5EF4-FFF2-40B4-BE49-F238E27FC236}">
+                <a16:creationId xmlns:a16="http://schemas.microsoft.com/office/drawing/2014/main" id="{3AAFF58D-131C-C6E6-EF92-0E88CAB085DF}"/>
+              </a:ext>
+            </a:extLst>
+          </p:cNvPr>
+          <p:cNvSpPr>
+            <a:spLocks noGrp="1"/>
+          </p:cNvSpPr>
+          <p:nvPr>
+            <p:ph type="title"/>
+          </p:nvPr>
+        </p:nvSpPr>
+        <p:spPr>
+          <a:xfrm>
+            <a:off x="630936" y="502920"/>
+            <a:ext cx="3419856" cy="1463040"/>
+          </a:xfrm>
+        </p:spPr>
+        <p:txBody>
+          <a:bodyPr anchor="ctr">
+            <a:normAutofit/>
+          </a:bodyPr>
+          <a:lstStyle/>
+          <a:p>
+            <a:r>
+              <a:rPr lang="es-ES_tradnl" sz="4800"/>
+              <a:t>Supercluster</a:t>
+            </a:r>
+          </a:p>
+        </p:txBody>
+      </p:sp>
+      <p:sp>
+        <p:nvSpPr>
+          <p:cNvPr id="12" name="sketch line">
+            <a:extLst>
+              <a:ext uri="{FF2B5EF4-FFF2-40B4-BE49-F238E27FC236}">
+                <a16:creationId xmlns:a16="http://schemas.microsoft.com/office/drawing/2014/main" id="{2E92FA66-67D7-4CB4-94D3-E643A9AD4757}"/>
+              </a:ext>
+              <a:ext uri="{C183D7F6-B498-43B3-948B-1728B52AA6E4}">
+                <adec:decorative xmlns:adec="http://schemas.microsoft.com/office/drawing/2017/decorative" val="1"/>
+              </a:ext>
+            </a:extLst>
+          </p:cNvPr>
+          <p:cNvSpPr>
+            <a:spLocks noGrp="1" noRot="1" noChangeAspect="1" noMove="1" noResize="1" noEditPoints="1" noAdjustHandles="1" noChangeArrowheads="1" noChangeShapeType="1" noTextEdit="1"/>
+          </p:cNvSpPr>
+          <p:nvPr>
+            <p:extLst>
+              <p:ext uri="{386F3935-93C4-4BCD-93E2-E3B085C9AB24}">
+                <p16:designElem xmlns:p16="http://schemas.microsoft.com/office/powerpoint/2015/main" val="1"/>
+              </p:ext>
+            </p:extLst>
+          </p:nvPr>
+        </p:nvSpPr>
+        <p:spPr>
+          <a:xfrm rot="5400000">
+            <a:off x="3566159" y="1225296"/>
+            <a:ext cx="1554480" cy="18288"/>
+          </a:xfrm>
+          <a:custGeom>
+            <a:avLst/>
+            <a:gdLst>
+              <a:gd name="csX0" fmla="*/ 0 w 1554480"/>
+              <a:gd name="csY0" fmla="*/ 0 h 18288"/>
+              <a:gd name="csX1" fmla="*/ 549250 w 1554480"/>
+              <a:gd name="csY1" fmla="*/ 0 h 18288"/>
+              <a:gd name="csX2" fmla="*/ 1082954 w 1554480"/>
+              <a:gd name="csY2" fmla="*/ 0 h 18288"/>
+              <a:gd name="csX3" fmla="*/ 1554480 w 1554480"/>
+              <a:gd name="csY3" fmla="*/ 0 h 18288"/>
+              <a:gd name="csX4" fmla="*/ 1554480 w 1554480"/>
+              <a:gd name="csY4" fmla="*/ 18288 h 18288"/>
+              <a:gd name="csX5" fmla="*/ 1067410 w 1554480"/>
+              <a:gd name="csY5" fmla="*/ 18288 h 18288"/>
+              <a:gd name="csX6" fmla="*/ 549250 w 1554480"/>
+              <a:gd name="csY6" fmla="*/ 18288 h 18288"/>
+              <a:gd name="csX7" fmla="*/ 0 w 1554480"/>
+              <a:gd name="csY7" fmla="*/ 18288 h 18288"/>
+              <a:gd name="csX8" fmla="*/ 0 w 1554480"/>
+              <a:gd name="csY8" fmla="*/ 0 h 18288"/>
+            </a:gdLst>
+            <a:ahLst/>
+            <a:cxnLst>
+              <a:cxn ang="0">
+                <a:pos x="csX0" y="csY0"/>
+              </a:cxn>
+              <a:cxn ang="0">
+                <a:pos x="csX1" y="csY1"/>
+              </a:cxn>
+              <a:cxn ang="0">
+                <a:pos x="csX2" y="csY2"/>
+              </a:cxn>
+              <a:cxn ang="0">
+                <a:pos x="csX3" y="csY3"/>
+              </a:cxn>
+              <a:cxn ang="0">
+                <a:pos x="csX4" y="csY4"/>
+              </a:cxn>
+              <a:cxn ang="0">
+                <a:pos x="csX5" y="csY5"/>
+              </a:cxn>
+              <a:cxn ang="0">
+                <a:pos x="csX6" y="csY6"/>
+              </a:cxn>
+              <a:cxn ang="0">
+                <a:pos x="csX7" y="csY7"/>
+              </a:cxn>
+              <a:cxn ang="0">
+                <a:pos x="csX8" y="csY8"/>
+              </a:cxn>
+            </a:cxnLst>
+            <a:rect l="l" t="t" r="r" b="b"/>
+            <a:pathLst>
+              <a:path w="1554480" h="18288" fill="none" extrusionOk="0">
+                <a:moveTo>
+                  <a:pt x="0" y="0"/>
+                </a:moveTo>
+                <a:cubicBezTo>
+                  <a:pt x="114141" y="-19864"/>
+                  <a:pt x="345055" y="-1657"/>
+                  <a:pt x="549250" y="0"/>
+                </a:cubicBezTo>
+                <a:cubicBezTo>
+                  <a:pt x="753445" y="1657"/>
+                  <a:pt x="862292" y="-5674"/>
+                  <a:pt x="1082954" y="0"/>
+                </a:cubicBezTo>
+                <a:cubicBezTo>
+                  <a:pt x="1303616" y="5674"/>
+                  <a:pt x="1363530" y="4537"/>
+                  <a:pt x="1554480" y="0"/>
+                </a:cubicBezTo>
+                <a:cubicBezTo>
+                  <a:pt x="1554963" y="7176"/>
+                  <a:pt x="1553909" y="13682"/>
+                  <a:pt x="1554480" y="18288"/>
+                </a:cubicBezTo>
+                <a:cubicBezTo>
+                  <a:pt x="1338847" y="6127"/>
+                  <a:pt x="1215066" y="37851"/>
+                  <a:pt x="1067410" y="18288"/>
+                </a:cubicBezTo>
+                <a:cubicBezTo>
+                  <a:pt x="919754" y="-1275"/>
+                  <a:pt x="800465" y="3080"/>
+                  <a:pt x="549250" y="18288"/>
+                </a:cubicBezTo>
+                <a:cubicBezTo>
+                  <a:pt x="298035" y="33496"/>
+                  <a:pt x="158868" y="22769"/>
+                  <a:pt x="0" y="18288"/>
+                </a:cubicBezTo>
+                <a:cubicBezTo>
+                  <a:pt x="-655" y="13237"/>
+                  <a:pt x="709" y="4645"/>
+                  <a:pt x="0" y="0"/>
+                </a:cubicBezTo>
+                <a:close/>
+              </a:path>
+              <a:path w="1554480" h="18288" stroke="0" extrusionOk="0">
+                <a:moveTo>
+                  <a:pt x="0" y="0"/>
+                </a:moveTo>
+                <a:cubicBezTo>
+                  <a:pt x="249941" y="-58"/>
+                  <a:pt x="367334" y="23448"/>
+                  <a:pt x="502615" y="0"/>
+                </a:cubicBezTo>
+                <a:cubicBezTo>
+                  <a:pt x="637897" y="-23448"/>
+                  <a:pt x="813653" y="-20418"/>
+                  <a:pt x="974141" y="0"/>
+                </a:cubicBezTo>
+                <a:cubicBezTo>
+                  <a:pt x="1134629" y="20418"/>
+                  <a:pt x="1268772" y="6288"/>
+                  <a:pt x="1554480" y="0"/>
+                </a:cubicBezTo>
+                <a:cubicBezTo>
+                  <a:pt x="1554917" y="7222"/>
+                  <a:pt x="1555359" y="13299"/>
+                  <a:pt x="1554480" y="18288"/>
+                </a:cubicBezTo>
+                <a:cubicBezTo>
+                  <a:pt x="1336087" y="12172"/>
+                  <a:pt x="1310024" y="19759"/>
+                  <a:pt x="1067410" y="18288"/>
+                </a:cubicBezTo>
+                <a:cubicBezTo>
+                  <a:pt x="824796" y="16818"/>
+                  <a:pt x="787902" y="34647"/>
+                  <a:pt x="518160" y="18288"/>
+                </a:cubicBezTo>
+                <a:cubicBezTo>
+                  <a:pt x="248418" y="1930"/>
+                  <a:pt x="133160" y="9205"/>
+                  <a:pt x="0" y="18288"/>
+                </a:cubicBezTo>
+                <a:cubicBezTo>
+                  <a:pt x="-643" y="9451"/>
+                  <a:pt x="-340" y="7114"/>
+                  <a:pt x="0" y="0"/>
+                </a:cubicBezTo>
+                <a:close/>
+              </a:path>
+            </a:pathLst>
+          </a:custGeom>
+          <a:solidFill>
+            <a:schemeClr val="accent2"/>
+          </a:solidFill>
+          <a:ln w="41275" cap="rnd">
+            <a:solidFill>
+              <a:schemeClr val="accent2"/>
+            </a:solidFill>
+            <a:round/>
+            <a:extLst>
+              <a:ext uri="{C807C97D-BFC1-408E-A445-0C87EB9F89A2}">
+                <ask:lineSketchStyleProps xmlns:ask="http://schemas.microsoft.com/office/drawing/2018/sketchyshapes" sd="1219033472">
+                  <a:prstGeom prst="rect">
+                    <a:avLst/>
+                  </a:prstGeom>
+                  <ask:type>
+                    <ask:lineSketchFreehand/>
+                  </ask:type>
+                </ask:lineSketchStyleProps>
+              </a:ext>
+            </a:extLst>
+          </a:ln>
+        </p:spPr>
+        <p:style>
+          <a:lnRef idx="2">
+            <a:schemeClr val="accent1">
+              <a:shade val="50000"/>
+            </a:schemeClr>
+          </a:lnRef>
+          <a:fillRef idx="1">
+            <a:schemeClr val="accent1"/>
+          </a:fillRef>
+          <a:effectRef idx="0">
+            <a:schemeClr val="accent1"/>
+          </a:effectRef>
+          <a:fontRef idx="minor">
+            <a:schemeClr val="lt1"/>
+          </a:fontRef>
+        </p:style>
+        <p:txBody>
+          <a:bodyPr rtlCol="0" anchor="ctr"/>
+          <a:lstStyle/>
+          <a:p>
+            <a:pPr algn="ctr"/>
+            <a:endParaRPr lang="en-US"/>
+          </a:p>
+        </p:txBody>
+      </p:sp>
+      <p:sp>
+        <p:nvSpPr>
+          <p:cNvPr id="3" name="Espaço Reservado para Conteúdo 2">
+            <a:extLst>
+              <a:ext uri="{FF2B5EF4-FFF2-40B4-BE49-F238E27FC236}">
+                <a16:creationId xmlns:a16="http://schemas.microsoft.com/office/drawing/2014/main" id="{4DBC10EE-6D83-2DEE-5947-2DFB55333A85}"/>
+              </a:ext>
+            </a:extLst>
+          </p:cNvPr>
+          <p:cNvSpPr>
+            <a:spLocks noGrp="1"/>
+          </p:cNvSpPr>
+          <p:nvPr>
+            <p:ph idx="1"/>
+          </p:nvPr>
+        </p:nvSpPr>
+        <p:spPr>
+          <a:xfrm>
+            <a:off x="4654295" y="502920"/>
+            <a:ext cx="6894576" cy="1463040"/>
+          </a:xfrm>
+        </p:spPr>
+        <p:txBody>
+          <a:bodyPr anchor="ctr">
+            <a:normAutofit/>
+          </a:bodyPr>
+          <a:lstStyle/>
+          <a:p>
+            <a:r>
+              <a:rPr lang="es-ES_tradnl" sz="2200" dirty="0"/>
+              <a:t>Altura de corte 16 </a:t>
+            </a:r>
+            <a:r>
+              <a:rPr lang="es-ES_tradnl" sz="2200" dirty="0" err="1"/>
+              <a:t>gera</a:t>
+            </a:r>
+            <a:r>
+              <a:rPr lang="es-ES_tradnl" sz="2200" dirty="0"/>
+              <a:t> 4 </a:t>
+            </a:r>
+            <a:r>
+              <a:rPr lang="es-ES_tradnl" sz="2200" dirty="0" err="1"/>
+              <a:t>clusters</a:t>
+            </a:r>
+            <a:r>
+              <a:rPr lang="es-ES_tradnl" sz="2200" dirty="0"/>
+              <a:t>, grupos </a:t>
+            </a:r>
+            <a:r>
+              <a:rPr lang="es-ES_tradnl" sz="2200" dirty="0" err="1"/>
+              <a:t>estão</a:t>
+            </a:r>
+            <a:r>
+              <a:rPr lang="es-ES_tradnl" sz="2200" dirty="0"/>
+              <a:t> </a:t>
+            </a:r>
+            <a:r>
+              <a:rPr lang="es-ES_tradnl" sz="2200" dirty="0" err="1"/>
+              <a:t>bem</a:t>
+            </a:r>
+            <a:r>
+              <a:rPr lang="es-ES_tradnl" sz="2200" dirty="0"/>
+              <a:t> formados e </a:t>
+            </a:r>
+            <a:r>
+              <a:rPr lang="es-ES_tradnl" sz="2200" dirty="0" err="1"/>
+              <a:t>estáveis</a:t>
+            </a:r>
+            <a:endParaRPr lang="es-ES_tradnl" sz="2200" dirty="0"/>
+          </a:p>
+        </p:txBody>
+      </p:sp>
+      <p:pic>
+        <p:nvPicPr>
+          <p:cNvPr id="5" name="Imagem 4" descr="Tela de computador com texto preto sobre fundo branco&#10;&#10;O conteúdo gerado por IA pode estar incorreto.">
+            <a:extLst>
+              <a:ext uri="{FF2B5EF4-FFF2-40B4-BE49-F238E27FC236}">
+                <a16:creationId xmlns:a16="http://schemas.microsoft.com/office/drawing/2014/main" id="{FE68A41C-9E97-EFCC-EE4D-173DA97D388C}"/>
+              </a:ext>
+            </a:extLst>
+          </p:cNvPr>
+          <p:cNvPicPr>
+            <a:picLocks noChangeAspect="1"/>
+          </p:cNvPicPr>
+          <p:nvPr/>
+        </p:nvPicPr>
+        <p:blipFill>
+          <a:blip r:embed="rId2"/>
+          <a:stretch>
+            <a:fillRect/>
+          </a:stretch>
+        </p:blipFill>
+        <p:spPr>
+          <a:xfrm>
+            <a:off x="1924326" y="1965960"/>
+            <a:ext cx="8343348" cy="4860000"/>
+          </a:xfrm>
+          <a:prstGeom prst="rect">
+            <a:avLst/>
+          </a:prstGeom>
+        </p:spPr>
+      </p:pic>
+    </p:spTree>
+    <p:extLst>
+      <p:ext uri="{BB962C8B-B14F-4D97-AF65-F5344CB8AC3E}">
+        <p14:creationId xmlns:p14="http://schemas.microsoft.com/office/powerpoint/2010/main" val="679699183"/>
+      </p:ext>
+    </p:extLst>
+  </p:cSld>
+  <p:clrMapOvr>
+    <a:masterClrMapping/>
+  </p:clrMapOvr>
+</p:sld>
+</file>
+
+<file path=ppt/slides/slide15.xml><?xml version="1.0" encoding="utf-8"?>
+<p:sld xmlns:a="http://schemas.openxmlformats.org/drawingml/2006/main" xmlns:r="http://schemas.openxmlformats.org/officeDocument/2006/relationships" xmlns:p="http://schemas.openxmlformats.org/presentationml/2006/main">
+  <p:cSld>
+    <p:bg>
+      <p:bgPr>
+        <a:solidFill>
+          <a:schemeClr val="bg1"/>
+        </a:solidFill>
+        <a:effectLst/>
+      </p:bgPr>
+    </p:bg>
+    <p:spTree>
+      <p:nvGrpSpPr>
+        <p:cNvPr id="1" name=""/>
+        <p:cNvGrpSpPr/>
+        <p:nvPr/>
+      </p:nvGrpSpPr>
+      <p:grpSpPr>
+        <a:xfrm>
+          <a:off x="0" y="0"/>
+          <a:ext cx="0" cy="0"/>
+          <a:chOff x="0" y="0"/>
+          <a:chExt cx="0" cy="0"/>
+        </a:xfrm>
+      </p:grpSpPr>
+      <p:sp useBgFill="1">
+        <p:nvSpPr>
+          <p:cNvPr id="26" name="Rectangle 22">
+            <a:extLst>
+              <a:ext uri="{FF2B5EF4-FFF2-40B4-BE49-F238E27FC236}">
+                <a16:creationId xmlns:a16="http://schemas.microsoft.com/office/drawing/2014/main" id="{32AEEBC8-9D30-42EF-95F2-386C2653FBF0}"/>
+              </a:ext>
+              <a:ext uri="{C183D7F6-B498-43B3-948B-1728B52AA6E4}">
+                <adec:decorative xmlns:adec="http://schemas.microsoft.com/office/drawing/2017/decorative" val="1"/>
+              </a:ext>
+            </a:extLst>
+          </p:cNvPr>
+          <p:cNvSpPr>
+            <a:spLocks noGrp="1" noRot="1" noChangeAspect="1" noMove="1" noResize="1" noEditPoints="1" noAdjustHandles="1" noChangeArrowheads="1" noChangeShapeType="1" noTextEdit="1"/>
+          </p:cNvSpPr>
+          <p:nvPr>
+            <p:extLst>
+              <p:ext uri="{386F3935-93C4-4BCD-93E2-E3B085C9AB24}">
+                <p16:designElem xmlns:p16="http://schemas.microsoft.com/office/powerpoint/2015/main" val="1"/>
+              </p:ext>
+            </p:extLst>
+          </p:nvPr>
+        </p:nvSpPr>
+        <p:spPr>
+          <a:xfrm>
+            <a:off x="0" y="0"/>
+            <a:ext cx="12192000" cy="6858000"/>
+          </a:xfrm>
+          <a:prstGeom prst="rect">
+            <a:avLst/>
+          </a:prstGeom>
+          <a:ln>
+            <a:noFill/>
+          </a:ln>
+        </p:spPr>
+        <p:style>
+          <a:lnRef idx="2">
+            <a:schemeClr val="accent1">
+              <a:shade val="50000"/>
+            </a:schemeClr>
+          </a:lnRef>
+          <a:fillRef idx="1">
+            <a:schemeClr val="accent1"/>
+          </a:fillRef>
+          <a:effectRef idx="0">
+            <a:schemeClr val="accent1"/>
+          </a:effectRef>
+          <a:fontRef idx="minor">
+            <a:schemeClr val="lt1"/>
+          </a:fontRef>
+        </p:style>
+        <p:txBody>
+          <a:bodyPr rtlCol="0" anchor="ctr"/>
+          <a:lstStyle/>
+          <a:p>
+            <a:pPr algn="ctr"/>
+            <a:endParaRPr lang="en-US"/>
+          </a:p>
+        </p:txBody>
+      </p:sp>
+      <p:sp>
+        <p:nvSpPr>
+          <p:cNvPr id="2" name="Título 1">
+            <a:extLst>
+              <a:ext uri="{FF2B5EF4-FFF2-40B4-BE49-F238E27FC236}">
+                <a16:creationId xmlns:a16="http://schemas.microsoft.com/office/drawing/2014/main" id="{52CC2B11-5723-D99E-1483-7C82DA517D94}"/>
+              </a:ext>
+            </a:extLst>
+          </p:cNvPr>
+          <p:cNvSpPr>
+            <a:spLocks noGrp="1"/>
+          </p:cNvSpPr>
+          <p:nvPr>
+            <p:ph type="title"/>
+          </p:nvPr>
+        </p:nvSpPr>
+        <p:spPr>
+          <a:xfrm>
+            <a:off x="630936" y="502920"/>
+            <a:ext cx="3419856" cy="1463040"/>
+          </a:xfrm>
+        </p:spPr>
+        <p:txBody>
+          <a:bodyPr anchor="ctr">
+            <a:normAutofit/>
+          </a:bodyPr>
+          <a:lstStyle/>
+          <a:p>
+            <a:r>
+              <a:rPr lang="es-ES_tradnl" dirty="0" err="1"/>
+              <a:t>Clusterização</a:t>
+            </a:r>
+            <a:r>
+              <a:rPr lang="es-ES_tradnl" dirty="0"/>
+              <a:t> Final</a:t>
+            </a:r>
+          </a:p>
+        </p:txBody>
+      </p:sp>
+      <p:sp>
+        <p:nvSpPr>
+          <p:cNvPr id="25" name="sketch line">
+            <a:extLst>
+              <a:ext uri="{FF2B5EF4-FFF2-40B4-BE49-F238E27FC236}">
+                <a16:creationId xmlns:a16="http://schemas.microsoft.com/office/drawing/2014/main" id="{2E92FA66-67D7-4CB4-94D3-E643A9AD4757}"/>
+              </a:ext>
+              <a:ext uri="{C183D7F6-B498-43B3-948B-1728B52AA6E4}">
+                <adec:decorative xmlns:adec="http://schemas.microsoft.com/office/drawing/2017/decorative" val="1"/>
+              </a:ext>
+            </a:extLst>
+          </p:cNvPr>
+          <p:cNvSpPr>
+            <a:spLocks noGrp="1" noRot="1" noChangeAspect="1" noMove="1" noResize="1" noEditPoints="1" noAdjustHandles="1" noChangeArrowheads="1" noChangeShapeType="1" noTextEdit="1"/>
+          </p:cNvSpPr>
+          <p:nvPr>
+            <p:extLst>
+              <p:ext uri="{386F3935-93C4-4BCD-93E2-E3B085C9AB24}">
+                <p16:designElem xmlns:p16="http://schemas.microsoft.com/office/powerpoint/2015/main" val="1"/>
+              </p:ext>
+            </p:extLst>
+          </p:nvPr>
+        </p:nvSpPr>
+        <p:spPr>
+          <a:xfrm rot="5400000">
+            <a:off x="3566159" y="1225296"/>
+            <a:ext cx="1554480" cy="18288"/>
+          </a:xfrm>
+          <a:custGeom>
+            <a:avLst/>
+            <a:gdLst>
+              <a:gd name="csX0" fmla="*/ 0 w 1554480"/>
+              <a:gd name="csY0" fmla="*/ 0 h 18288"/>
+              <a:gd name="csX1" fmla="*/ 549250 w 1554480"/>
+              <a:gd name="csY1" fmla="*/ 0 h 18288"/>
+              <a:gd name="csX2" fmla="*/ 1082954 w 1554480"/>
+              <a:gd name="csY2" fmla="*/ 0 h 18288"/>
+              <a:gd name="csX3" fmla="*/ 1554480 w 1554480"/>
+              <a:gd name="csY3" fmla="*/ 0 h 18288"/>
+              <a:gd name="csX4" fmla="*/ 1554480 w 1554480"/>
+              <a:gd name="csY4" fmla="*/ 18288 h 18288"/>
+              <a:gd name="csX5" fmla="*/ 1067410 w 1554480"/>
+              <a:gd name="csY5" fmla="*/ 18288 h 18288"/>
+              <a:gd name="csX6" fmla="*/ 549250 w 1554480"/>
+              <a:gd name="csY6" fmla="*/ 18288 h 18288"/>
+              <a:gd name="csX7" fmla="*/ 0 w 1554480"/>
+              <a:gd name="csY7" fmla="*/ 18288 h 18288"/>
+              <a:gd name="csX8" fmla="*/ 0 w 1554480"/>
+              <a:gd name="csY8" fmla="*/ 0 h 18288"/>
+            </a:gdLst>
+            <a:ahLst/>
+            <a:cxnLst>
+              <a:cxn ang="0">
+                <a:pos x="csX0" y="csY0"/>
+              </a:cxn>
+              <a:cxn ang="0">
+                <a:pos x="csX1" y="csY1"/>
+              </a:cxn>
+              <a:cxn ang="0">
+                <a:pos x="csX2" y="csY2"/>
+              </a:cxn>
+              <a:cxn ang="0">
+                <a:pos x="csX3" y="csY3"/>
+              </a:cxn>
+              <a:cxn ang="0">
+                <a:pos x="csX4" y="csY4"/>
+              </a:cxn>
+              <a:cxn ang="0">
+                <a:pos x="csX5" y="csY5"/>
+              </a:cxn>
+              <a:cxn ang="0">
+                <a:pos x="csX6" y="csY6"/>
+              </a:cxn>
+              <a:cxn ang="0">
+                <a:pos x="csX7" y="csY7"/>
+              </a:cxn>
+              <a:cxn ang="0">
+                <a:pos x="csX8" y="csY8"/>
+              </a:cxn>
+            </a:cxnLst>
+            <a:rect l="l" t="t" r="r" b="b"/>
+            <a:pathLst>
+              <a:path w="1554480" h="18288" fill="none" extrusionOk="0">
+                <a:moveTo>
+                  <a:pt x="0" y="0"/>
+                </a:moveTo>
+                <a:cubicBezTo>
+                  <a:pt x="114141" y="-19864"/>
+                  <a:pt x="345055" y="-1657"/>
+                  <a:pt x="549250" y="0"/>
+                </a:cubicBezTo>
+                <a:cubicBezTo>
+                  <a:pt x="753445" y="1657"/>
+                  <a:pt x="862292" y="-5674"/>
+                  <a:pt x="1082954" y="0"/>
+                </a:cubicBezTo>
+                <a:cubicBezTo>
+                  <a:pt x="1303616" y="5674"/>
+                  <a:pt x="1363530" y="4537"/>
+                  <a:pt x="1554480" y="0"/>
+                </a:cubicBezTo>
+                <a:cubicBezTo>
+                  <a:pt x="1554963" y="7176"/>
+                  <a:pt x="1553909" y="13682"/>
+                  <a:pt x="1554480" y="18288"/>
+                </a:cubicBezTo>
+                <a:cubicBezTo>
+                  <a:pt x="1338847" y="6127"/>
+                  <a:pt x="1215066" y="37851"/>
+                  <a:pt x="1067410" y="18288"/>
+                </a:cubicBezTo>
+                <a:cubicBezTo>
+                  <a:pt x="919754" y="-1275"/>
+                  <a:pt x="800465" y="3080"/>
+                  <a:pt x="549250" y="18288"/>
+                </a:cubicBezTo>
+                <a:cubicBezTo>
+                  <a:pt x="298035" y="33496"/>
+                  <a:pt x="158868" y="22769"/>
+                  <a:pt x="0" y="18288"/>
+                </a:cubicBezTo>
+                <a:cubicBezTo>
+                  <a:pt x="-655" y="13237"/>
+                  <a:pt x="709" y="4645"/>
+                  <a:pt x="0" y="0"/>
+                </a:cubicBezTo>
+                <a:close/>
+              </a:path>
+              <a:path w="1554480" h="18288" stroke="0" extrusionOk="0">
+                <a:moveTo>
+                  <a:pt x="0" y="0"/>
+                </a:moveTo>
+                <a:cubicBezTo>
+                  <a:pt x="249941" y="-58"/>
+                  <a:pt x="367334" y="23448"/>
+                  <a:pt x="502615" y="0"/>
+                </a:cubicBezTo>
+                <a:cubicBezTo>
+                  <a:pt x="637897" y="-23448"/>
+                  <a:pt x="813653" y="-20418"/>
+                  <a:pt x="974141" y="0"/>
+                </a:cubicBezTo>
+                <a:cubicBezTo>
+                  <a:pt x="1134629" y="20418"/>
+                  <a:pt x="1268772" y="6288"/>
+                  <a:pt x="1554480" y="0"/>
+                </a:cubicBezTo>
+                <a:cubicBezTo>
+                  <a:pt x="1554917" y="7222"/>
+                  <a:pt x="1555359" y="13299"/>
+                  <a:pt x="1554480" y="18288"/>
+                </a:cubicBezTo>
+                <a:cubicBezTo>
+                  <a:pt x="1336087" y="12172"/>
+                  <a:pt x="1310024" y="19759"/>
+                  <a:pt x="1067410" y="18288"/>
+                </a:cubicBezTo>
+                <a:cubicBezTo>
+                  <a:pt x="824796" y="16818"/>
+                  <a:pt x="787902" y="34647"/>
+                  <a:pt x="518160" y="18288"/>
+                </a:cubicBezTo>
+                <a:cubicBezTo>
+                  <a:pt x="248418" y="1930"/>
+                  <a:pt x="133160" y="9205"/>
+                  <a:pt x="0" y="18288"/>
+                </a:cubicBezTo>
+                <a:cubicBezTo>
+                  <a:pt x="-643" y="9451"/>
+                  <a:pt x="-340" y="7114"/>
+                  <a:pt x="0" y="0"/>
+                </a:cubicBezTo>
+                <a:close/>
+              </a:path>
+            </a:pathLst>
+          </a:custGeom>
+          <a:solidFill>
+            <a:schemeClr val="accent2"/>
+          </a:solidFill>
+          <a:ln w="41275" cap="rnd">
+            <a:solidFill>
+              <a:schemeClr val="accent2"/>
+            </a:solidFill>
+            <a:round/>
+            <a:extLst>
+              <a:ext uri="{C807C97D-BFC1-408E-A445-0C87EB9F89A2}">
+                <ask:lineSketchStyleProps xmlns:ask="http://schemas.microsoft.com/office/drawing/2018/sketchyshapes" sd="1219033472">
+                  <a:prstGeom prst="rect">
+                    <a:avLst/>
+                  </a:prstGeom>
+                  <ask:type>
+                    <ask:lineSketchFreehand/>
+                  </ask:type>
+                </ask:lineSketchStyleProps>
+              </a:ext>
+            </a:extLst>
+          </a:ln>
+        </p:spPr>
+        <p:style>
+          <a:lnRef idx="2">
+            <a:schemeClr val="accent1">
+              <a:shade val="50000"/>
+            </a:schemeClr>
+          </a:lnRef>
+          <a:fillRef idx="1">
+            <a:schemeClr val="accent1"/>
+          </a:fillRef>
+          <a:effectRef idx="0">
+            <a:schemeClr val="accent1"/>
+          </a:effectRef>
+          <a:fontRef idx="minor">
+            <a:schemeClr val="lt1"/>
+          </a:fontRef>
+        </p:style>
+        <p:txBody>
+          <a:bodyPr rtlCol="0" anchor="ctr"/>
+          <a:lstStyle/>
+          <a:p>
+            <a:pPr algn="ctr"/>
+            <a:endParaRPr lang="en-US"/>
+          </a:p>
+        </p:txBody>
+      </p:sp>
+      <p:sp>
+        <p:nvSpPr>
+          <p:cNvPr id="3" name="Espaço Reservado para Conteúdo 2">
+            <a:extLst>
+              <a:ext uri="{FF2B5EF4-FFF2-40B4-BE49-F238E27FC236}">
+                <a16:creationId xmlns:a16="http://schemas.microsoft.com/office/drawing/2014/main" id="{9479C1F5-4B9E-F241-2FB6-734B10FA1503}"/>
+              </a:ext>
+            </a:extLst>
+          </p:cNvPr>
+          <p:cNvSpPr>
+            <a:spLocks noGrp="1"/>
+          </p:cNvSpPr>
+          <p:nvPr>
+            <p:ph idx="1"/>
+          </p:nvPr>
+        </p:nvSpPr>
+        <p:spPr>
+          <a:xfrm>
+            <a:off x="4654295" y="502920"/>
+            <a:ext cx="6894576" cy="1463040"/>
+          </a:xfrm>
+        </p:spPr>
+        <p:txBody>
+          <a:bodyPr anchor="ctr">
+            <a:normAutofit/>
+          </a:bodyPr>
+          <a:lstStyle/>
+          <a:p>
+            <a:r>
+              <a:rPr lang="es-ES_tradnl" sz="2200"/>
+              <a:t>Versão final consolidada em 2 niveis: primeiro grandes grupos por densidades, depois separa grande grupo por aglomeração</a:t>
+            </a:r>
+          </a:p>
+        </p:txBody>
+      </p:sp>
+      <p:pic>
+        <p:nvPicPr>
+          <p:cNvPr id="7" name="Imagem 6" descr="Gráfico&#10;&#10;O conteúdo gerado por IA pode estar incorreto.">
+            <a:extLst>
+              <a:ext uri="{FF2B5EF4-FFF2-40B4-BE49-F238E27FC236}">
+                <a16:creationId xmlns:a16="http://schemas.microsoft.com/office/drawing/2014/main" id="{62DA13FC-A675-1B6F-B108-735399743550}"/>
+              </a:ext>
+            </a:extLst>
+          </p:cNvPr>
+          <p:cNvPicPr>
+            <a:picLocks noChangeAspect="1"/>
+          </p:cNvPicPr>
+          <p:nvPr/>
+        </p:nvPicPr>
+        <p:blipFill>
+          <a:blip r:embed="rId2"/>
+          <a:srcRect t="6610" r="2" b="610"/>
+          <a:stretch>
+            <a:fillRect/>
+          </a:stretch>
+        </p:blipFill>
+        <p:spPr>
+          <a:xfrm>
+            <a:off x="1781950" y="1965960"/>
+            <a:ext cx="8628100" cy="5303520"/>
+          </a:xfrm>
+          <a:prstGeom prst="rect">
+            <a:avLst/>
+          </a:prstGeom>
+        </p:spPr>
+      </p:pic>
+    </p:spTree>
+    <p:extLst>
+      <p:ext uri="{BB962C8B-B14F-4D97-AF65-F5344CB8AC3E}">
+        <p14:creationId xmlns:p14="http://schemas.microsoft.com/office/powerpoint/2010/main" val="943627413"/>
       </p:ext>
     </p:extLst>
   </p:cSld>
@@ -9766,7 +12219,7 @@
           <a:p>
             <a:r>
               <a:rPr lang="es-ES_tradnl" dirty="0"/>
-              <a:t>1750 </a:t>
+              <a:t>1734 </a:t>
             </a:r>
             <a:r>
               <a:rPr lang="es-ES_tradnl" dirty="0" err="1"/>
@@ -10030,6 +12483,14 @@
 <file path=ppt/slides/slide6.xml><?xml version="1.0" encoding="utf-8"?>
 <p:sld xmlns:a="http://schemas.openxmlformats.org/drawingml/2006/main" xmlns:r="http://schemas.openxmlformats.org/officeDocument/2006/relationships" xmlns:p="http://schemas.openxmlformats.org/presentationml/2006/main">
   <p:cSld>
+    <p:bg>
+      <p:bgPr>
+        <a:solidFill>
+          <a:schemeClr val="bg1"/>
+        </a:solidFill>
+        <a:effectLst/>
+      </p:bgPr>
+    </p:bg>
     <p:spTree>
       <p:nvGrpSpPr>
         <p:cNvPr id="1" name="">
@@ -10050,6 +12511,66 @@
           <a:chExt cx="0" cy="0"/>
         </a:xfrm>
       </p:grpSpPr>
+      <p:sp useBgFill="1">
+        <p:nvSpPr>
+          <p:cNvPr id="26" name="Rectangle 25">
+            <a:extLst>
+              <a:ext uri="{FF2B5EF4-FFF2-40B4-BE49-F238E27FC236}">
+                <a16:creationId xmlns:a16="http://schemas.microsoft.com/office/drawing/2014/main" id="{665DBBEF-238B-476B-96AB-8AAC3224ECEA}"/>
+              </a:ext>
+              <a:ext uri="{C183D7F6-B498-43B3-948B-1728B52AA6E4}">
+                <adec:decorative xmlns:adec="http://schemas.microsoft.com/office/drawing/2017/decorative" val="1"/>
+              </a:ext>
+            </a:extLst>
+          </p:cNvPr>
+          <p:cNvSpPr>
+            <a:spLocks noGrp="1" noRot="1" noChangeAspect="1" noMove="1" noResize="1" noEditPoints="1" noAdjustHandles="1" noChangeArrowheads="1" noChangeShapeType="1" noTextEdit="1"/>
+          </p:cNvSpPr>
+          <p:nvPr>
+            <p:extLst>
+              <p:ext uri="{386F3935-93C4-4BCD-93E2-E3B085C9AB24}">
+                <p16:designElem xmlns:p16="http://schemas.microsoft.com/office/powerpoint/2015/main" val="1"/>
+              </p:ext>
+            </p:extLst>
+          </p:nvPr>
+        </p:nvSpPr>
+        <p:spPr>
+          <a:xfrm>
+            <a:off x="0" y="0"/>
+            <a:ext cx="12192000" cy="6858000"/>
+          </a:xfrm>
+          <a:prstGeom prst="rect">
+            <a:avLst/>
+          </a:prstGeom>
+          <a:ln>
+            <a:noFill/>
+          </a:ln>
+        </p:spPr>
+        <p:style>
+          <a:lnRef idx="2">
+            <a:schemeClr val="accent1">
+              <a:shade val="50000"/>
+            </a:schemeClr>
+          </a:lnRef>
+          <a:fillRef idx="1">
+            <a:schemeClr val="accent1"/>
+          </a:fillRef>
+          <a:effectRef idx="0">
+            <a:schemeClr val="accent1"/>
+          </a:effectRef>
+          <a:fontRef idx="minor">
+            <a:schemeClr val="lt1"/>
+          </a:fontRef>
+        </p:style>
+        <p:txBody>
+          <a:bodyPr rtlCol="0" anchor="ctr"/>
+          <a:lstStyle/>
+          <a:p>
+            <a:pPr algn="ctr"/>
+            <a:endParaRPr lang="en-US"/>
+          </a:p>
+        </p:txBody>
+      </p:sp>
       <p:sp>
         <p:nvSpPr>
           <p:cNvPr id="2" name="Título 1">
@@ -10066,13 +12587,27 @@
             <p:ph type="title"/>
           </p:nvPr>
         </p:nvSpPr>
-        <p:spPr/>
+        <p:spPr>
+          <a:xfrm>
+            <a:off x="638882" y="639193"/>
+            <a:ext cx="3571810" cy="3573516"/>
+          </a:xfrm>
+        </p:spPr>
         <p:txBody>
-          <a:bodyPr/>
+          <a:bodyPr vert="horz" lIns="91440" tIns="45720" rIns="91440" bIns="45720" rtlCol="0" anchor="b">
+            <a:normAutofit/>
+          </a:bodyPr>
           <a:lstStyle/>
           <a:p>
             <a:r>
-              <a:rPr lang="es-ES_tradnl" dirty="0"/>
+              <a:rPr lang="en-US" sz="6600" kern="1200">
+                <a:solidFill>
+                  <a:schemeClr val="tx1"/>
+                </a:solidFill>
+                <a:latin typeface="+mj-lt"/>
+                <a:ea typeface="+mj-ea"/>
+                <a:cs typeface="+mj-cs"/>
+              </a:rPr>
               <a:t>PCA</a:t>
             </a:r>
           </a:p>
@@ -10094,67 +12629,338 @@
             <p:ph idx="1"/>
           </p:nvPr>
         </p:nvSpPr>
-        <p:spPr/>
+        <p:spPr>
+          <a:xfrm>
+            <a:off x="638882" y="4631161"/>
+            <a:ext cx="3571810" cy="1559327"/>
+          </a:xfrm>
+        </p:spPr>
         <p:txBody>
-          <a:bodyPr/>
+          <a:bodyPr vert="horz" lIns="91440" tIns="45720" rIns="91440" bIns="45720" rtlCol="0">
+            <a:normAutofit/>
+          </a:bodyPr>
           <a:lstStyle/>
           <a:p>
-            <a:r>
-              <a:rPr lang="es-ES_tradnl" dirty="0" err="1"/>
-              <a:t>Ausência</a:t>
-            </a:r>
-            <a:r>
-              <a:rPr lang="es-ES_tradnl" dirty="0"/>
-              <a:t> de </a:t>
-            </a:r>
-            <a:r>
-              <a:rPr lang="es-ES_tradnl" dirty="0" err="1"/>
-              <a:t>linearidade</a:t>
-            </a:r>
-            <a:r>
-              <a:rPr lang="es-ES_tradnl" dirty="0"/>
-              <a:t> faz </a:t>
-            </a:r>
-            <a:r>
-              <a:rPr lang="es-ES_tradnl" dirty="0" err="1"/>
-              <a:t>com</a:t>
-            </a:r>
-            <a:r>
-              <a:rPr lang="es-ES_tradnl" dirty="0"/>
-              <a:t> que o modelo </a:t>
-            </a:r>
-            <a:r>
-              <a:rPr lang="es-ES_tradnl" dirty="0" err="1"/>
-              <a:t>não</a:t>
-            </a:r>
-            <a:r>
-              <a:rPr lang="es-ES_tradnl" dirty="0"/>
-              <a:t> </a:t>
-            </a:r>
-            <a:r>
-              <a:rPr lang="es-ES_tradnl" dirty="0" err="1"/>
-              <a:t>gere</a:t>
-            </a:r>
-            <a:r>
-              <a:rPr lang="es-ES_tradnl" dirty="0"/>
-              <a:t> boas </a:t>
-            </a:r>
-            <a:r>
-              <a:rPr lang="es-ES_tradnl" dirty="0" err="1"/>
-              <a:t>projeções</a:t>
-            </a:r>
-            <a:r>
-              <a:rPr lang="es-ES_tradnl" dirty="0"/>
-              <a:t> para </a:t>
-            </a:r>
-            <a:r>
-              <a:rPr lang="es-ES_tradnl" dirty="0" err="1"/>
-              <a:t>clusterização</a:t>
-            </a:r>
-            <a:endParaRPr lang="es-ES_tradnl" dirty="0"/>
+            <a:pPr marL="0" indent="0">
+              <a:buNone/>
+            </a:pPr>
+            <a:r>
+              <a:rPr lang="en-US" sz="2400" kern="1200">
+                <a:solidFill>
+                  <a:schemeClr val="tx1"/>
+                </a:solidFill>
+                <a:latin typeface="+mn-lt"/>
+                <a:ea typeface="+mn-ea"/>
+                <a:cs typeface="+mn-cs"/>
+              </a:rPr>
+              <a:t>Ausência de linearidade faz com que o modelo não gere boas projeções para clusterização</a:t>
+            </a:r>
           </a:p>
         </p:txBody>
       </p:sp>
+      <p:sp>
+        <p:nvSpPr>
+          <p:cNvPr id="28" name="sketch line">
+            <a:extLst>
+              <a:ext uri="{FF2B5EF4-FFF2-40B4-BE49-F238E27FC236}">
+                <a16:creationId xmlns:a16="http://schemas.microsoft.com/office/drawing/2014/main" id="{3FCFB1DE-0B7E-48CC-BA90-B2AB0889F9D6}"/>
+              </a:ext>
+              <a:ext uri="{C183D7F6-B498-43B3-948B-1728B52AA6E4}">
+                <adec:decorative xmlns:adec="http://schemas.microsoft.com/office/drawing/2017/decorative" val="1"/>
+              </a:ext>
+            </a:extLst>
+          </p:cNvPr>
+          <p:cNvSpPr>
+            <a:spLocks noGrp="1" noRot="1" noChangeAspect="1" noMove="1" noResize="1" noEditPoints="1" noAdjustHandles="1" noChangeArrowheads="1" noChangeShapeType="1" noTextEdit="1"/>
+          </p:cNvSpPr>
+          <p:nvPr>
+            <p:extLst>
+              <p:ext uri="{386F3935-93C4-4BCD-93E2-E3B085C9AB24}">
+                <p16:designElem xmlns:p16="http://schemas.microsoft.com/office/powerpoint/2015/main" val="1"/>
+              </p:ext>
+            </p:extLst>
+          </p:nvPr>
+        </p:nvSpPr>
+        <p:spPr>
+          <a:xfrm>
+            <a:off x="643278" y="4409267"/>
+            <a:ext cx="3255095" cy="18288"/>
+          </a:xfrm>
+          <a:custGeom>
+            <a:avLst/>
+            <a:gdLst>
+              <a:gd name="csX0" fmla="*/ 0 w 3255095"/>
+              <a:gd name="csY0" fmla="*/ 0 h 18288"/>
+              <a:gd name="csX1" fmla="*/ 618468 w 3255095"/>
+              <a:gd name="csY1" fmla="*/ 0 h 18288"/>
+              <a:gd name="csX2" fmla="*/ 1269487 w 3255095"/>
+              <a:gd name="csY2" fmla="*/ 0 h 18288"/>
+              <a:gd name="csX3" fmla="*/ 1953057 w 3255095"/>
+              <a:gd name="csY3" fmla="*/ 0 h 18288"/>
+              <a:gd name="csX4" fmla="*/ 2636627 w 3255095"/>
+              <a:gd name="csY4" fmla="*/ 0 h 18288"/>
+              <a:gd name="csX5" fmla="*/ 3255095 w 3255095"/>
+              <a:gd name="csY5" fmla="*/ 0 h 18288"/>
+              <a:gd name="csX6" fmla="*/ 3255095 w 3255095"/>
+              <a:gd name="csY6" fmla="*/ 18288 h 18288"/>
+              <a:gd name="csX7" fmla="*/ 2538974 w 3255095"/>
+              <a:gd name="csY7" fmla="*/ 18288 h 18288"/>
+              <a:gd name="csX8" fmla="*/ 1822853 w 3255095"/>
+              <a:gd name="csY8" fmla="*/ 18288 h 18288"/>
+              <a:gd name="csX9" fmla="*/ 1171834 w 3255095"/>
+              <a:gd name="csY9" fmla="*/ 18288 h 18288"/>
+              <a:gd name="csX10" fmla="*/ 0 w 3255095"/>
+              <a:gd name="csY10" fmla="*/ 18288 h 18288"/>
+              <a:gd name="csX11" fmla="*/ 0 w 3255095"/>
+              <a:gd name="csY11" fmla="*/ 0 h 18288"/>
+            </a:gdLst>
+            <a:ahLst/>
+            <a:cxnLst>
+              <a:cxn ang="0">
+                <a:pos x="csX0" y="csY0"/>
+              </a:cxn>
+              <a:cxn ang="0">
+                <a:pos x="csX1" y="csY1"/>
+              </a:cxn>
+              <a:cxn ang="0">
+                <a:pos x="csX2" y="csY2"/>
+              </a:cxn>
+              <a:cxn ang="0">
+                <a:pos x="csX3" y="csY3"/>
+              </a:cxn>
+              <a:cxn ang="0">
+                <a:pos x="csX4" y="csY4"/>
+              </a:cxn>
+              <a:cxn ang="0">
+                <a:pos x="csX5" y="csY5"/>
+              </a:cxn>
+              <a:cxn ang="0">
+                <a:pos x="csX6" y="csY6"/>
+              </a:cxn>
+              <a:cxn ang="0">
+                <a:pos x="csX7" y="csY7"/>
+              </a:cxn>
+              <a:cxn ang="0">
+                <a:pos x="csX8" y="csY8"/>
+              </a:cxn>
+              <a:cxn ang="0">
+                <a:pos x="csX9" y="csY9"/>
+              </a:cxn>
+              <a:cxn ang="0">
+                <a:pos x="csX10" y="csY10"/>
+              </a:cxn>
+              <a:cxn ang="0">
+                <a:pos x="csX11" y="csY11"/>
+              </a:cxn>
+            </a:cxnLst>
+            <a:rect l="l" t="t" r="r" b="b"/>
+            <a:pathLst>
+              <a:path w="3255095" h="18288" fill="none" extrusionOk="0">
+                <a:moveTo>
+                  <a:pt x="0" y="0"/>
+                </a:moveTo>
+                <a:cubicBezTo>
+                  <a:pt x="240201" y="-22123"/>
+                  <a:pt x="462021" y="-19623"/>
+                  <a:pt x="618468" y="0"/>
+                </a:cubicBezTo>
+                <a:cubicBezTo>
+                  <a:pt x="774915" y="19623"/>
+                  <a:pt x="974734" y="2035"/>
+                  <a:pt x="1269487" y="0"/>
+                </a:cubicBezTo>
+                <a:cubicBezTo>
+                  <a:pt x="1564240" y="-2035"/>
+                  <a:pt x="1733579" y="10639"/>
+                  <a:pt x="1953057" y="0"/>
+                </a:cubicBezTo>
+                <a:cubicBezTo>
+                  <a:pt x="2172535" y="-10639"/>
+                  <a:pt x="2453962" y="14018"/>
+                  <a:pt x="2636627" y="0"/>
+                </a:cubicBezTo>
+                <a:cubicBezTo>
+                  <a:pt x="2819292" y="-14018"/>
+                  <a:pt x="3121375" y="5399"/>
+                  <a:pt x="3255095" y="0"/>
+                </a:cubicBezTo>
+                <a:cubicBezTo>
+                  <a:pt x="3254386" y="8157"/>
+                  <a:pt x="3254682" y="12125"/>
+                  <a:pt x="3255095" y="18288"/>
+                </a:cubicBezTo>
+                <a:cubicBezTo>
+                  <a:pt x="3088545" y="23203"/>
+                  <a:pt x="2687475" y="7419"/>
+                  <a:pt x="2538974" y="18288"/>
+                </a:cubicBezTo>
+                <a:cubicBezTo>
+                  <a:pt x="2390473" y="29157"/>
+                  <a:pt x="2137381" y="-8959"/>
+                  <a:pt x="1822853" y="18288"/>
+                </a:cubicBezTo>
+                <a:cubicBezTo>
+                  <a:pt x="1508325" y="45535"/>
+                  <a:pt x="1466437" y="20385"/>
+                  <a:pt x="1171834" y="18288"/>
+                </a:cubicBezTo>
+                <a:cubicBezTo>
+                  <a:pt x="877231" y="16191"/>
+                  <a:pt x="561097" y="37643"/>
+                  <a:pt x="0" y="18288"/>
+                </a:cubicBezTo>
+                <a:cubicBezTo>
+                  <a:pt x="-46" y="12483"/>
+                  <a:pt x="-203" y="6491"/>
+                  <a:pt x="0" y="0"/>
+                </a:cubicBezTo>
+                <a:close/>
+              </a:path>
+              <a:path w="3255095" h="18288" stroke="0" extrusionOk="0">
+                <a:moveTo>
+                  <a:pt x="0" y="0"/>
+                </a:moveTo>
+                <a:cubicBezTo>
+                  <a:pt x="291965" y="19429"/>
+                  <a:pt x="363155" y="8568"/>
+                  <a:pt x="618468" y="0"/>
+                </a:cubicBezTo>
+                <a:cubicBezTo>
+                  <a:pt x="873781" y="-8568"/>
+                  <a:pt x="904459" y="-19505"/>
+                  <a:pt x="1171834" y="0"/>
+                </a:cubicBezTo>
+                <a:cubicBezTo>
+                  <a:pt x="1439209" y="19505"/>
+                  <a:pt x="1744369" y="9790"/>
+                  <a:pt x="1887955" y="0"/>
+                </a:cubicBezTo>
+                <a:cubicBezTo>
+                  <a:pt x="2031541" y="-9790"/>
+                  <a:pt x="2346378" y="21240"/>
+                  <a:pt x="2506423" y="0"/>
+                </a:cubicBezTo>
+                <a:cubicBezTo>
+                  <a:pt x="2666468" y="-21240"/>
+                  <a:pt x="2990257" y="30414"/>
+                  <a:pt x="3255095" y="0"/>
+                </a:cubicBezTo>
+                <a:cubicBezTo>
+                  <a:pt x="3254831" y="4493"/>
+                  <a:pt x="3255479" y="9472"/>
+                  <a:pt x="3255095" y="18288"/>
+                </a:cubicBezTo>
+                <a:cubicBezTo>
+                  <a:pt x="3120743" y="16690"/>
+                  <a:pt x="2759628" y="42462"/>
+                  <a:pt x="2604076" y="18288"/>
+                </a:cubicBezTo>
+                <a:cubicBezTo>
+                  <a:pt x="2448524" y="-5886"/>
+                  <a:pt x="2184336" y="19599"/>
+                  <a:pt x="1887955" y="18288"/>
+                </a:cubicBezTo>
+                <a:cubicBezTo>
+                  <a:pt x="1591574" y="16977"/>
+                  <a:pt x="1548845" y="6870"/>
+                  <a:pt x="1334589" y="18288"/>
+                </a:cubicBezTo>
+                <a:cubicBezTo>
+                  <a:pt x="1120333" y="29706"/>
+                  <a:pt x="996014" y="9662"/>
+                  <a:pt x="683570" y="18288"/>
+                </a:cubicBezTo>
+                <a:cubicBezTo>
+                  <a:pt x="371126" y="26914"/>
+                  <a:pt x="198687" y="16167"/>
+                  <a:pt x="0" y="18288"/>
+                </a:cubicBezTo>
+                <a:cubicBezTo>
+                  <a:pt x="843" y="9577"/>
+                  <a:pt x="371" y="6900"/>
+                  <a:pt x="0" y="0"/>
+                </a:cubicBezTo>
+                <a:close/>
+              </a:path>
+            </a:pathLst>
+          </a:custGeom>
+          <a:solidFill>
+            <a:schemeClr val="accent2"/>
+          </a:solidFill>
+          <a:ln w="38100" cap="rnd">
+            <a:solidFill>
+              <a:schemeClr val="accent2"/>
+            </a:solidFill>
+            <a:round/>
+            <a:extLst>
+              <a:ext uri="{C807C97D-BFC1-408E-A445-0C87EB9F89A2}">
+                <ask:lineSketchStyleProps xmlns:ask="http://schemas.microsoft.com/office/drawing/2018/sketchyshapes" sd="1219033472">
+                  <a:prstGeom prst="rect">
+                    <a:avLst/>
+                  </a:prstGeom>
+                  <ask:type>
+                    <ask:lineSketchFreehand/>
+                  </ask:type>
+                </ask:lineSketchStyleProps>
+              </a:ext>
+            </a:extLst>
+          </a:ln>
+        </p:spPr>
+        <p:style>
+          <a:lnRef idx="2">
+            <a:schemeClr val="accent1">
+              <a:shade val="50000"/>
+            </a:schemeClr>
+          </a:lnRef>
+          <a:fillRef idx="1">
+            <a:schemeClr val="accent1"/>
+          </a:fillRef>
+          <a:effectRef idx="0">
+            <a:schemeClr val="accent1"/>
+          </a:effectRef>
+          <a:fontRef idx="minor">
+            <a:schemeClr val="lt1"/>
+          </a:fontRef>
+        </p:style>
+        <p:txBody>
+          <a:bodyPr rtlCol="0" anchor="ctr"/>
+          <a:lstStyle/>
+          <a:p>
+            <a:pPr algn="ctr"/>
+            <a:endParaRPr lang="en-US"/>
+          </a:p>
+        </p:txBody>
+      </p:sp>
+      <p:pic>
+        <p:nvPicPr>
+          <p:cNvPr id="4" name="Imagem 3" descr="Gráfico, Gráfico de dispersão&#10;&#10;O conteúdo gerado por IA pode estar incorreto.">
+            <a:extLst>
+              <a:ext uri="{FF2B5EF4-FFF2-40B4-BE49-F238E27FC236}">
+                <a16:creationId xmlns:a16="http://schemas.microsoft.com/office/drawing/2014/main" id="{5408D942-8E0D-F460-14F6-8D8DC4C82609}"/>
+              </a:ext>
+            </a:extLst>
+          </p:cNvPr>
+          <p:cNvPicPr>
+            <a:picLocks noChangeAspect="1"/>
+          </p:cNvPicPr>
+          <p:nvPr/>
+        </p:nvPicPr>
+        <p:blipFill>
+          <a:blip r:embed="rId3"/>
+          <a:stretch>
+            <a:fillRect/>
+          </a:stretch>
+        </p:blipFill>
+        <p:spPr>
+          <a:xfrm>
+            <a:off x="5058529" y="218938"/>
+            <a:ext cx="7133471" cy="6420124"/>
+          </a:xfrm>
+          <a:prstGeom prst="rect">
+            <a:avLst/>
+          </a:prstGeom>
+        </p:spPr>
+      </p:pic>
     </p:spTree>
     <p:extLst>
       <p:ext uri="{BB962C8B-B14F-4D97-AF65-F5344CB8AC3E}">
@@ -10165,12 +12971,112 @@
   <p:clrMapOvr>
     <a:masterClrMapping/>
   </p:clrMapOvr>
+  <p:timing>
+    <p:tnLst>
+      <p:par>
+        <p:cTn id="1" dur="indefinite" restart="never" nodeType="tmRoot">
+          <p:childTnLst>
+            <p:seq concurrent="1" nextAc="seek">
+              <p:cTn id="2" dur="indefinite" nodeType="mainSeq">
+                <p:childTnLst>
+                  <p:par>
+                    <p:cTn id="3" fill="hold">
+                      <p:stCondLst>
+                        <p:cond delay="indefinite"/>
+                        <p:cond evt="onBegin" delay="0">
+                          <p:tn val="2"/>
+                        </p:cond>
+                      </p:stCondLst>
+                      <p:childTnLst>
+                        <p:par>
+                          <p:cTn id="4" fill="hold">
+                            <p:stCondLst>
+                              <p:cond delay="0"/>
+                            </p:stCondLst>
+                            <p:childTnLst>
+                              <p:par>
+                                <p:cTn id="5" presetID="10" presetClass="entr" presetSubtype="0" fill="hold" grpId="0" nodeType="withEffect">
+                                  <p:stCondLst>
+                                    <p:cond delay="1000"/>
+                                  </p:stCondLst>
+                                  <p:iterate>
+                                    <p:tmPct val="10000"/>
+                                  </p:iterate>
+                                  <p:childTnLst>
+                                    <p:set>
+                                      <p:cBhvr>
+                                        <p:cTn id="6" dur="1" fill="hold">
+                                          <p:stCondLst>
+                                            <p:cond delay="0"/>
+                                          </p:stCondLst>
+                                        </p:cTn>
+                                        <p:tgtEl>
+                                          <p:spTgt spid="2"/>
+                                        </p:tgtEl>
+                                        <p:attrNameLst>
+                                          <p:attrName>style.visibility</p:attrName>
+                                        </p:attrNameLst>
+                                      </p:cBhvr>
+                                      <p:to>
+                                        <p:strVal val="visible"/>
+                                      </p:to>
+                                    </p:set>
+                                    <p:animEffect transition="in" filter="fade">
+                                      <p:cBhvr>
+                                        <p:cTn id="7" dur="700"/>
+                                        <p:tgtEl>
+                                          <p:spTgt spid="2"/>
+                                        </p:tgtEl>
+                                      </p:cBhvr>
+                                    </p:animEffect>
+                                  </p:childTnLst>
+                                </p:cTn>
+                              </p:par>
+                            </p:childTnLst>
+                          </p:cTn>
+                        </p:par>
+                      </p:childTnLst>
+                    </p:cTn>
+                  </p:par>
+                </p:childTnLst>
+              </p:cTn>
+              <p:prevCondLst>
+                <p:cond evt="onPrev" delay="0">
+                  <p:tgtEl>
+                    <p:sldTgt/>
+                  </p:tgtEl>
+                </p:cond>
+              </p:prevCondLst>
+              <p:nextCondLst>
+                <p:cond evt="onNext" delay="0">
+                  <p:tgtEl>
+                    <p:sldTgt/>
+                  </p:tgtEl>
+                </p:cond>
+              </p:nextCondLst>
+            </p:seq>
+          </p:childTnLst>
+        </p:cTn>
+      </p:par>
+    </p:tnLst>
+    <p:bldLst>
+      <p:bldP spid="2" grpId="0"/>
+    </p:bldLst>
+  </p:timing>
 </p:sld>
 </file>
 
 <file path=ppt/slides/slide7.xml><?xml version="1.0" encoding="utf-8"?>
 <p:sld xmlns:a="http://schemas.openxmlformats.org/drawingml/2006/main" xmlns:r="http://schemas.openxmlformats.org/officeDocument/2006/relationships" xmlns:p="http://schemas.openxmlformats.org/presentationml/2006/main">
   <p:cSld>
+    <p:bg>
+      <p:bgPr>
+        <a:solidFill>
+          <a:schemeClr val="bg1"/>
+        </a:solidFill>
+        <a:effectLst/>
+      </p:bgPr>
+    </p:bg>
     <p:spTree>
       <p:nvGrpSpPr>
         <p:cNvPr id="1" name="">
@@ -10191,6 +13097,66 @@
           <a:chExt cx="0" cy="0"/>
         </a:xfrm>
       </p:grpSpPr>
+      <p:sp useBgFill="1">
+        <p:nvSpPr>
+          <p:cNvPr id="26" name="Rectangle 25">
+            <a:extLst>
+              <a:ext uri="{FF2B5EF4-FFF2-40B4-BE49-F238E27FC236}">
+                <a16:creationId xmlns:a16="http://schemas.microsoft.com/office/drawing/2014/main" id="{2B97F24A-32CE-4C1C-A50D-3016B394DCFB}"/>
+              </a:ext>
+              <a:ext uri="{C183D7F6-B498-43B3-948B-1728B52AA6E4}">
+                <adec:decorative xmlns:adec="http://schemas.microsoft.com/office/drawing/2017/decorative" val="1"/>
+              </a:ext>
+            </a:extLst>
+          </p:cNvPr>
+          <p:cNvSpPr>
+            <a:spLocks noGrp="1" noRot="1" noChangeAspect="1" noMove="1" noResize="1" noEditPoints="1" noAdjustHandles="1" noChangeArrowheads="1" noChangeShapeType="1" noTextEdit="1"/>
+          </p:cNvSpPr>
+          <p:nvPr>
+            <p:extLst>
+              <p:ext uri="{386F3935-93C4-4BCD-93E2-E3B085C9AB24}">
+                <p16:designElem xmlns:p16="http://schemas.microsoft.com/office/powerpoint/2015/main" val="1"/>
+              </p:ext>
+            </p:extLst>
+          </p:nvPr>
+        </p:nvSpPr>
+        <p:spPr>
+          <a:xfrm>
+            <a:off x="0" y="0"/>
+            <a:ext cx="12192000" cy="6858000"/>
+          </a:xfrm>
+          <a:prstGeom prst="rect">
+            <a:avLst/>
+          </a:prstGeom>
+          <a:ln>
+            <a:noFill/>
+          </a:ln>
+        </p:spPr>
+        <p:style>
+          <a:lnRef idx="2">
+            <a:schemeClr val="accent1">
+              <a:shade val="50000"/>
+            </a:schemeClr>
+          </a:lnRef>
+          <a:fillRef idx="1">
+            <a:schemeClr val="accent1"/>
+          </a:fillRef>
+          <a:effectRef idx="0">
+            <a:schemeClr val="accent1"/>
+          </a:effectRef>
+          <a:fontRef idx="minor">
+            <a:schemeClr val="lt1"/>
+          </a:fontRef>
+        </p:style>
+        <p:txBody>
+          <a:bodyPr rtlCol="0" anchor="ctr"/>
+          <a:lstStyle/>
+          <a:p>
+            <a:pPr algn="ctr"/>
+            <a:endParaRPr lang="en-US"/>
+          </a:p>
+        </p:txBody>
+      </p:sp>
       <p:sp>
         <p:nvSpPr>
           <p:cNvPr id="2" name="Título 1">
@@ -10207,15 +13173,295 @@
             <p:ph type="title"/>
           </p:nvPr>
         </p:nvSpPr>
-        <p:spPr/>
+        <p:spPr>
+          <a:xfrm>
+            <a:off x="630936" y="639520"/>
+            <a:ext cx="3429000" cy="1719072"/>
+          </a:xfrm>
+        </p:spPr>
         <p:txBody>
-          <a:bodyPr/>
+          <a:bodyPr vert="horz" lIns="91440" tIns="45720" rIns="91440" bIns="45720" rtlCol="0" anchor="b">
+            <a:normAutofit/>
+          </a:bodyPr>
           <a:lstStyle/>
           <a:p>
             <a:r>
-              <a:rPr lang="es-ES_tradnl" dirty="0"/>
+              <a:rPr lang="en-US" sz="5400"/>
               <a:t>T-SNE</a:t>
             </a:r>
+          </a:p>
+        </p:txBody>
+      </p:sp>
+      <p:sp>
+        <p:nvSpPr>
+          <p:cNvPr id="28" name="sketch line">
+            <a:extLst>
+              <a:ext uri="{FF2B5EF4-FFF2-40B4-BE49-F238E27FC236}">
+                <a16:creationId xmlns:a16="http://schemas.microsoft.com/office/drawing/2014/main" id="{CD8B4F24-440B-49E9-B85D-733523DC064B}"/>
+              </a:ext>
+              <a:ext uri="{C183D7F6-B498-43B3-948B-1728B52AA6E4}">
+                <adec:decorative xmlns:adec="http://schemas.microsoft.com/office/drawing/2017/decorative" val="1"/>
+              </a:ext>
+            </a:extLst>
+          </p:cNvPr>
+          <p:cNvSpPr>
+            <a:spLocks noGrp="1" noRot="1" noChangeAspect="1" noMove="1" noResize="1" noEditPoints="1" noAdjustHandles="1" noChangeArrowheads="1" noChangeShapeType="1" noTextEdit="1"/>
+          </p:cNvSpPr>
+          <p:nvPr>
+            <p:extLst>
+              <p:ext uri="{386F3935-93C4-4BCD-93E2-E3B085C9AB24}">
+                <p16:designElem xmlns:p16="http://schemas.microsoft.com/office/powerpoint/2015/main" val="1"/>
+              </p:ext>
+            </p:extLst>
+          </p:nvPr>
+        </p:nvSpPr>
+        <p:spPr>
+          <a:xfrm>
+            <a:off x="643278" y="2573756"/>
+            <a:ext cx="3255095" cy="18288"/>
+          </a:xfrm>
+          <a:custGeom>
+            <a:avLst/>
+            <a:gdLst>
+              <a:gd name="csX0" fmla="*/ 0 w 3255095"/>
+              <a:gd name="csY0" fmla="*/ 0 h 18288"/>
+              <a:gd name="csX1" fmla="*/ 618468 w 3255095"/>
+              <a:gd name="csY1" fmla="*/ 0 h 18288"/>
+              <a:gd name="csX2" fmla="*/ 1269487 w 3255095"/>
+              <a:gd name="csY2" fmla="*/ 0 h 18288"/>
+              <a:gd name="csX3" fmla="*/ 1953057 w 3255095"/>
+              <a:gd name="csY3" fmla="*/ 0 h 18288"/>
+              <a:gd name="csX4" fmla="*/ 2636627 w 3255095"/>
+              <a:gd name="csY4" fmla="*/ 0 h 18288"/>
+              <a:gd name="csX5" fmla="*/ 3255095 w 3255095"/>
+              <a:gd name="csY5" fmla="*/ 0 h 18288"/>
+              <a:gd name="csX6" fmla="*/ 3255095 w 3255095"/>
+              <a:gd name="csY6" fmla="*/ 18288 h 18288"/>
+              <a:gd name="csX7" fmla="*/ 2538974 w 3255095"/>
+              <a:gd name="csY7" fmla="*/ 18288 h 18288"/>
+              <a:gd name="csX8" fmla="*/ 1822853 w 3255095"/>
+              <a:gd name="csY8" fmla="*/ 18288 h 18288"/>
+              <a:gd name="csX9" fmla="*/ 1171834 w 3255095"/>
+              <a:gd name="csY9" fmla="*/ 18288 h 18288"/>
+              <a:gd name="csX10" fmla="*/ 0 w 3255095"/>
+              <a:gd name="csY10" fmla="*/ 18288 h 18288"/>
+              <a:gd name="csX11" fmla="*/ 0 w 3255095"/>
+              <a:gd name="csY11" fmla="*/ 0 h 18288"/>
+            </a:gdLst>
+            <a:ahLst/>
+            <a:cxnLst>
+              <a:cxn ang="0">
+                <a:pos x="csX0" y="csY0"/>
+              </a:cxn>
+              <a:cxn ang="0">
+                <a:pos x="csX1" y="csY1"/>
+              </a:cxn>
+              <a:cxn ang="0">
+                <a:pos x="csX2" y="csY2"/>
+              </a:cxn>
+              <a:cxn ang="0">
+                <a:pos x="csX3" y="csY3"/>
+              </a:cxn>
+              <a:cxn ang="0">
+                <a:pos x="csX4" y="csY4"/>
+              </a:cxn>
+              <a:cxn ang="0">
+                <a:pos x="csX5" y="csY5"/>
+              </a:cxn>
+              <a:cxn ang="0">
+                <a:pos x="csX6" y="csY6"/>
+              </a:cxn>
+              <a:cxn ang="0">
+                <a:pos x="csX7" y="csY7"/>
+              </a:cxn>
+              <a:cxn ang="0">
+                <a:pos x="csX8" y="csY8"/>
+              </a:cxn>
+              <a:cxn ang="0">
+                <a:pos x="csX9" y="csY9"/>
+              </a:cxn>
+              <a:cxn ang="0">
+                <a:pos x="csX10" y="csY10"/>
+              </a:cxn>
+              <a:cxn ang="0">
+                <a:pos x="csX11" y="csY11"/>
+              </a:cxn>
+            </a:cxnLst>
+            <a:rect l="l" t="t" r="r" b="b"/>
+            <a:pathLst>
+              <a:path w="3255095" h="18288" fill="none" extrusionOk="0">
+                <a:moveTo>
+                  <a:pt x="0" y="0"/>
+                </a:moveTo>
+                <a:cubicBezTo>
+                  <a:pt x="240201" y="-22123"/>
+                  <a:pt x="462021" y="-19623"/>
+                  <a:pt x="618468" y="0"/>
+                </a:cubicBezTo>
+                <a:cubicBezTo>
+                  <a:pt x="774915" y="19623"/>
+                  <a:pt x="974734" y="2035"/>
+                  <a:pt x="1269487" y="0"/>
+                </a:cubicBezTo>
+                <a:cubicBezTo>
+                  <a:pt x="1564240" y="-2035"/>
+                  <a:pt x="1733579" y="10639"/>
+                  <a:pt x="1953057" y="0"/>
+                </a:cubicBezTo>
+                <a:cubicBezTo>
+                  <a:pt x="2172535" y="-10639"/>
+                  <a:pt x="2453962" y="14018"/>
+                  <a:pt x="2636627" y="0"/>
+                </a:cubicBezTo>
+                <a:cubicBezTo>
+                  <a:pt x="2819292" y="-14018"/>
+                  <a:pt x="3121375" y="5399"/>
+                  <a:pt x="3255095" y="0"/>
+                </a:cubicBezTo>
+                <a:cubicBezTo>
+                  <a:pt x="3254386" y="8157"/>
+                  <a:pt x="3254682" y="12125"/>
+                  <a:pt x="3255095" y="18288"/>
+                </a:cubicBezTo>
+                <a:cubicBezTo>
+                  <a:pt x="3088545" y="23203"/>
+                  <a:pt x="2687475" y="7419"/>
+                  <a:pt x="2538974" y="18288"/>
+                </a:cubicBezTo>
+                <a:cubicBezTo>
+                  <a:pt x="2390473" y="29157"/>
+                  <a:pt x="2137381" y="-8959"/>
+                  <a:pt x="1822853" y="18288"/>
+                </a:cubicBezTo>
+                <a:cubicBezTo>
+                  <a:pt x="1508325" y="45535"/>
+                  <a:pt x="1466437" y="20385"/>
+                  <a:pt x="1171834" y="18288"/>
+                </a:cubicBezTo>
+                <a:cubicBezTo>
+                  <a:pt x="877231" y="16191"/>
+                  <a:pt x="561097" y="37643"/>
+                  <a:pt x="0" y="18288"/>
+                </a:cubicBezTo>
+                <a:cubicBezTo>
+                  <a:pt x="-46" y="12483"/>
+                  <a:pt x="-203" y="6491"/>
+                  <a:pt x="0" y="0"/>
+                </a:cubicBezTo>
+                <a:close/>
+              </a:path>
+              <a:path w="3255095" h="18288" stroke="0" extrusionOk="0">
+                <a:moveTo>
+                  <a:pt x="0" y="0"/>
+                </a:moveTo>
+                <a:cubicBezTo>
+                  <a:pt x="291965" y="19429"/>
+                  <a:pt x="363155" y="8568"/>
+                  <a:pt x="618468" y="0"/>
+                </a:cubicBezTo>
+                <a:cubicBezTo>
+                  <a:pt x="873781" y="-8568"/>
+                  <a:pt x="904459" y="-19505"/>
+                  <a:pt x="1171834" y="0"/>
+                </a:cubicBezTo>
+                <a:cubicBezTo>
+                  <a:pt x="1439209" y="19505"/>
+                  <a:pt x="1744369" y="9790"/>
+                  <a:pt x="1887955" y="0"/>
+                </a:cubicBezTo>
+                <a:cubicBezTo>
+                  <a:pt x="2031541" y="-9790"/>
+                  <a:pt x="2346378" y="21240"/>
+                  <a:pt x="2506423" y="0"/>
+                </a:cubicBezTo>
+                <a:cubicBezTo>
+                  <a:pt x="2666468" y="-21240"/>
+                  <a:pt x="2990257" y="30414"/>
+                  <a:pt x="3255095" y="0"/>
+                </a:cubicBezTo>
+                <a:cubicBezTo>
+                  <a:pt x="3254831" y="4493"/>
+                  <a:pt x="3255479" y="9472"/>
+                  <a:pt x="3255095" y="18288"/>
+                </a:cubicBezTo>
+                <a:cubicBezTo>
+                  <a:pt x="3120743" y="16690"/>
+                  <a:pt x="2759628" y="42462"/>
+                  <a:pt x="2604076" y="18288"/>
+                </a:cubicBezTo>
+                <a:cubicBezTo>
+                  <a:pt x="2448524" y="-5886"/>
+                  <a:pt x="2184336" y="19599"/>
+                  <a:pt x="1887955" y="18288"/>
+                </a:cubicBezTo>
+                <a:cubicBezTo>
+                  <a:pt x="1591574" y="16977"/>
+                  <a:pt x="1548845" y="6870"/>
+                  <a:pt x="1334589" y="18288"/>
+                </a:cubicBezTo>
+                <a:cubicBezTo>
+                  <a:pt x="1120333" y="29706"/>
+                  <a:pt x="996014" y="9662"/>
+                  <a:pt x="683570" y="18288"/>
+                </a:cubicBezTo>
+                <a:cubicBezTo>
+                  <a:pt x="371126" y="26914"/>
+                  <a:pt x="198687" y="16167"/>
+                  <a:pt x="0" y="18288"/>
+                </a:cubicBezTo>
+                <a:cubicBezTo>
+                  <a:pt x="843" y="9577"/>
+                  <a:pt x="371" y="6900"/>
+                  <a:pt x="0" y="0"/>
+                </a:cubicBezTo>
+                <a:close/>
+              </a:path>
+            </a:pathLst>
+          </a:custGeom>
+          <a:solidFill>
+            <a:schemeClr val="accent2"/>
+          </a:solidFill>
+          <a:ln w="38100" cap="rnd">
+            <a:solidFill>
+              <a:schemeClr val="accent2"/>
+            </a:solidFill>
+            <a:round/>
+            <a:extLst>
+              <a:ext uri="{C807C97D-BFC1-408E-A445-0C87EB9F89A2}">
+                <ask:lineSketchStyleProps xmlns:ask="http://schemas.microsoft.com/office/drawing/2018/sketchyshapes" sd="1219033472">
+                  <a:prstGeom prst="rect">
+                    <a:avLst/>
+                  </a:prstGeom>
+                  <ask:type>
+                    <ask:lineSketchFreehand/>
+                  </ask:type>
+                </ask:lineSketchStyleProps>
+              </a:ext>
+            </a:extLst>
+          </a:ln>
+        </p:spPr>
+        <p:style>
+          <a:lnRef idx="2">
+            <a:schemeClr val="accent1">
+              <a:shade val="50000"/>
+            </a:schemeClr>
+          </a:lnRef>
+          <a:fillRef idx="1">
+            <a:schemeClr val="accent1"/>
+          </a:fillRef>
+          <a:effectRef idx="0">
+            <a:schemeClr val="accent1"/>
+          </a:effectRef>
+          <a:fontRef idx="minor">
+            <a:schemeClr val="lt1"/>
+          </a:fontRef>
+        </p:style>
+        <p:txBody>
+          <a:bodyPr rtlCol="0" anchor="ctr"/>
+          <a:lstStyle/>
+          <a:p>
+            <a:pPr algn="ctr"/>
+            <a:endParaRPr lang="en-US"/>
           </a:p>
         </p:txBody>
       </p:sp>
@@ -10235,58 +13481,58 @@
             <p:ph idx="1"/>
           </p:nvPr>
         </p:nvSpPr>
-        <p:spPr/>
+        <p:spPr>
+          <a:xfrm>
+            <a:off x="630936" y="2807208"/>
+            <a:ext cx="3429000" cy="3410712"/>
+          </a:xfrm>
+        </p:spPr>
         <p:txBody>
-          <a:bodyPr/>
+          <a:bodyPr vert="horz" lIns="91440" tIns="45720" rIns="91440" bIns="45720" rtlCol="0" anchor="t">
+            <a:normAutofit/>
+          </a:bodyPr>
           <a:lstStyle/>
           <a:p>
-            <a:r>
-              <a:rPr lang="es-ES_tradnl" dirty="0"/>
-              <a:t>Captura </a:t>
-            </a:r>
-            <a:r>
-              <a:rPr lang="es-ES_tradnl" dirty="0" err="1"/>
-              <a:t>alguns</a:t>
-            </a:r>
-            <a:r>
-              <a:rPr lang="es-ES_tradnl" dirty="0"/>
-              <a:t> grupos </a:t>
-            </a:r>
-            <a:r>
-              <a:rPr lang="es-ES_tradnl" dirty="0" err="1"/>
-              <a:t>porém</a:t>
-            </a:r>
-            <a:r>
-              <a:rPr lang="es-ES_tradnl" dirty="0"/>
-              <a:t> </a:t>
-            </a:r>
-            <a:r>
-              <a:rPr lang="es-ES_tradnl" dirty="0" err="1"/>
-              <a:t>não</a:t>
-            </a:r>
-            <a:r>
-              <a:rPr lang="es-ES_tradnl" dirty="0"/>
-              <a:t> abre </a:t>
-            </a:r>
-            <a:r>
-              <a:rPr lang="es-ES_tradnl" dirty="0" err="1"/>
-              <a:t>bem</a:t>
-            </a:r>
-            <a:r>
-              <a:rPr lang="es-ES_tradnl" dirty="0"/>
-              <a:t> </a:t>
-            </a:r>
-            <a:r>
-              <a:rPr lang="es-ES_tradnl" dirty="0" err="1"/>
-              <a:t>um</a:t>
-            </a:r>
-            <a:r>
-              <a:rPr lang="es-ES_tradnl" dirty="0"/>
-              <a:t> grupo importante de rotas</a:t>
+            <a:pPr marL="0" indent="0">
+              <a:buNone/>
+            </a:pPr>
+            <a:r>
+              <a:rPr lang="en-US" sz="2200"/>
+              <a:t>Captura alguns grupos porém não abre bem um grupo importante de rotas</a:t>
             </a:r>
           </a:p>
         </p:txBody>
       </p:sp>
+      <p:pic>
+        <p:nvPicPr>
+          <p:cNvPr id="4" name="Imagem 3" descr="Gráfico, Gráfico de dispersão&#10;&#10;O conteúdo gerado por IA pode estar incorreto.">
+            <a:extLst>
+              <a:ext uri="{FF2B5EF4-FFF2-40B4-BE49-F238E27FC236}">
+                <a16:creationId xmlns:a16="http://schemas.microsoft.com/office/drawing/2014/main" id="{981549CE-8EC9-FAE7-7C18-708A33567E2D}"/>
+              </a:ext>
+            </a:extLst>
+          </p:cNvPr>
+          <p:cNvPicPr>
+            <a:picLocks noChangeAspect="1"/>
+          </p:cNvPicPr>
+          <p:nvPr/>
+        </p:nvPicPr>
+        <p:blipFill>
+          <a:blip r:embed="rId3"/>
+          <a:stretch>
+            <a:fillRect/>
+          </a:stretch>
+        </p:blipFill>
+        <p:spPr>
+          <a:xfrm>
+            <a:off x="4059936" y="406418"/>
+            <a:ext cx="7748915" cy="6045163"/>
+          </a:xfrm>
+          <a:prstGeom prst="rect">
+            <a:avLst/>
+          </a:prstGeom>
+        </p:spPr>
+      </p:pic>
     </p:spTree>
     <p:extLst>
       <p:ext uri="{BB962C8B-B14F-4D97-AF65-F5344CB8AC3E}">
@@ -10297,12 +13543,112 @@
   <p:clrMapOvr>
     <a:masterClrMapping/>
   </p:clrMapOvr>
+  <p:timing>
+    <p:tnLst>
+      <p:par>
+        <p:cTn id="1" dur="indefinite" restart="never" nodeType="tmRoot">
+          <p:childTnLst>
+            <p:seq concurrent="1" nextAc="seek">
+              <p:cTn id="2" dur="indefinite" nodeType="mainSeq">
+                <p:childTnLst>
+                  <p:par>
+                    <p:cTn id="3" fill="hold">
+                      <p:stCondLst>
+                        <p:cond delay="indefinite"/>
+                        <p:cond evt="onBegin" delay="0">
+                          <p:tn val="2"/>
+                        </p:cond>
+                      </p:stCondLst>
+                      <p:childTnLst>
+                        <p:par>
+                          <p:cTn id="4" fill="hold">
+                            <p:stCondLst>
+                              <p:cond delay="0"/>
+                            </p:stCondLst>
+                            <p:childTnLst>
+                              <p:par>
+                                <p:cTn id="5" presetID="10" presetClass="entr" presetSubtype="0" fill="hold" grpId="0" nodeType="withEffect">
+                                  <p:stCondLst>
+                                    <p:cond delay="1000"/>
+                                  </p:stCondLst>
+                                  <p:iterate>
+                                    <p:tmPct val="10000"/>
+                                  </p:iterate>
+                                  <p:childTnLst>
+                                    <p:set>
+                                      <p:cBhvr>
+                                        <p:cTn id="6" dur="1" fill="hold">
+                                          <p:stCondLst>
+                                            <p:cond delay="0"/>
+                                          </p:stCondLst>
+                                        </p:cTn>
+                                        <p:tgtEl>
+                                          <p:spTgt spid="2"/>
+                                        </p:tgtEl>
+                                        <p:attrNameLst>
+                                          <p:attrName>style.visibility</p:attrName>
+                                        </p:attrNameLst>
+                                      </p:cBhvr>
+                                      <p:to>
+                                        <p:strVal val="visible"/>
+                                      </p:to>
+                                    </p:set>
+                                    <p:animEffect transition="in" filter="fade">
+                                      <p:cBhvr>
+                                        <p:cTn id="7" dur="700"/>
+                                        <p:tgtEl>
+                                          <p:spTgt spid="2"/>
+                                        </p:tgtEl>
+                                      </p:cBhvr>
+                                    </p:animEffect>
+                                  </p:childTnLst>
+                                </p:cTn>
+                              </p:par>
+                            </p:childTnLst>
+                          </p:cTn>
+                        </p:par>
+                      </p:childTnLst>
+                    </p:cTn>
+                  </p:par>
+                </p:childTnLst>
+              </p:cTn>
+              <p:prevCondLst>
+                <p:cond evt="onPrev" delay="0">
+                  <p:tgtEl>
+                    <p:sldTgt/>
+                  </p:tgtEl>
+                </p:cond>
+              </p:prevCondLst>
+              <p:nextCondLst>
+                <p:cond evt="onNext" delay="0">
+                  <p:tgtEl>
+                    <p:sldTgt/>
+                  </p:tgtEl>
+                </p:cond>
+              </p:nextCondLst>
+            </p:seq>
+          </p:childTnLst>
+        </p:cTn>
+      </p:par>
+    </p:tnLst>
+    <p:bldLst>
+      <p:bldP spid="2" grpId="0"/>
+    </p:bldLst>
+  </p:timing>
 </p:sld>
 </file>
 
 <file path=ppt/slides/slide8.xml><?xml version="1.0" encoding="utf-8"?>
 <p:sld xmlns:a="http://schemas.openxmlformats.org/drawingml/2006/main" xmlns:r="http://schemas.openxmlformats.org/officeDocument/2006/relationships" xmlns:p="http://schemas.openxmlformats.org/presentationml/2006/main">
   <p:cSld>
+    <p:bg>
+      <p:bgPr>
+        <a:solidFill>
+          <a:schemeClr val="bg1"/>
+        </a:solidFill>
+        <a:effectLst/>
+      </p:bgPr>
+    </p:bg>
     <p:spTree>
       <p:nvGrpSpPr>
         <p:cNvPr id="1" name="">
@@ -10323,6 +13669,66 @@
           <a:chExt cx="0" cy="0"/>
         </a:xfrm>
       </p:grpSpPr>
+      <p:sp useBgFill="1">
+        <p:nvSpPr>
+          <p:cNvPr id="19" name="Rectangle 18">
+            <a:extLst>
+              <a:ext uri="{FF2B5EF4-FFF2-40B4-BE49-F238E27FC236}">
+                <a16:creationId xmlns:a16="http://schemas.microsoft.com/office/drawing/2014/main" id="{743AA782-23D1-4521-8CAD-47662984AA08}"/>
+              </a:ext>
+              <a:ext uri="{C183D7F6-B498-43B3-948B-1728B52AA6E4}">
+                <adec:decorative xmlns:adec="http://schemas.microsoft.com/office/drawing/2017/decorative" val="1"/>
+              </a:ext>
+            </a:extLst>
+          </p:cNvPr>
+          <p:cNvSpPr>
+            <a:spLocks noGrp="1" noRot="1" noChangeAspect="1" noMove="1" noResize="1" noEditPoints="1" noAdjustHandles="1" noChangeArrowheads="1" noChangeShapeType="1" noTextEdit="1"/>
+          </p:cNvSpPr>
+          <p:nvPr>
+            <p:extLst>
+              <p:ext uri="{386F3935-93C4-4BCD-93E2-E3B085C9AB24}">
+                <p16:designElem xmlns:p16="http://schemas.microsoft.com/office/powerpoint/2015/main" val="1"/>
+              </p:ext>
+            </p:extLst>
+          </p:nvPr>
+        </p:nvSpPr>
+        <p:spPr>
+          <a:xfrm>
+            <a:off x="0" y="0"/>
+            <a:ext cx="12192000" cy="6858000"/>
+          </a:xfrm>
+          <a:prstGeom prst="rect">
+            <a:avLst/>
+          </a:prstGeom>
+          <a:ln>
+            <a:noFill/>
+          </a:ln>
+        </p:spPr>
+        <p:style>
+          <a:lnRef idx="2">
+            <a:schemeClr val="accent1">
+              <a:shade val="50000"/>
+            </a:schemeClr>
+          </a:lnRef>
+          <a:fillRef idx="1">
+            <a:schemeClr val="accent1"/>
+          </a:fillRef>
+          <a:effectRef idx="0">
+            <a:schemeClr val="accent1"/>
+          </a:effectRef>
+          <a:fontRef idx="minor">
+            <a:schemeClr val="lt1"/>
+          </a:fontRef>
+        </p:style>
+        <p:txBody>
+          <a:bodyPr rtlCol="0" anchor="ctr"/>
+          <a:lstStyle/>
+          <a:p>
+            <a:pPr algn="ctr"/>
+            <a:endParaRPr lang="en-US"/>
+          </a:p>
+        </p:txBody>
+      </p:sp>
       <p:sp>
         <p:nvSpPr>
           <p:cNvPr id="2" name="Título 1">
@@ -10339,15 +13745,295 @@
             <p:ph type="title"/>
           </p:nvPr>
         </p:nvSpPr>
-        <p:spPr/>
+        <p:spPr>
+          <a:xfrm>
+            <a:off x="630936" y="640080"/>
+            <a:ext cx="4818888" cy="1481328"/>
+          </a:xfrm>
+        </p:spPr>
         <p:txBody>
-          <a:bodyPr/>
+          <a:bodyPr anchor="b">
+            <a:normAutofit/>
+          </a:bodyPr>
           <a:lstStyle/>
           <a:p>
             <a:r>
-              <a:rPr lang="es-ES_tradnl" dirty="0"/>
+              <a:rPr lang="es-ES_tradnl" sz="5400"/>
               <a:t>UMAP 2D</a:t>
             </a:r>
+          </a:p>
+        </p:txBody>
+      </p:sp>
+      <p:sp>
+        <p:nvSpPr>
+          <p:cNvPr id="21" name="sketch line">
+            <a:extLst>
+              <a:ext uri="{FF2B5EF4-FFF2-40B4-BE49-F238E27FC236}">
+                <a16:creationId xmlns:a16="http://schemas.microsoft.com/office/drawing/2014/main" id="{71877DBC-BB60-40F0-AC93-2ACDBAAE60CE}"/>
+              </a:ext>
+              <a:ext uri="{C183D7F6-B498-43B3-948B-1728B52AA6E4}">
+                <adec:decorative xmlns:adec="http://schemas.microsoft.com/office/drawing/2017/decorative" val="1"/>
+              </a:ext>
+            </a:extLst>
+          </p:cNvPr>
+          <p:cNvSpPr>
+            <a:spLocks noGrp="1" noRot="1" noChangeAspect="1" noMove="1" noResize="1" noEditPoints="1" noAdjustHandles="1" noChangeArrowheads="1" noChangeShapeType="1" noTextEdit="1"/>
+          </p:cNvSpPr>
+          <p:nvPr>
+            <p:extLst>
+              <p:ext uri="{386F3935-93C4-4BCD-93E2-E3B085C9AB24}">
+                <p16:designElem xmlns:p16="http://schemas.microsoft.com/office/powerpoint/2015/main" val="1"/>
+              </p:ext>
+            </p:extLst>
+          </p:nvPr>
+        </p:nvSpPr>
+        <p:spPr>
+          <a:xfrm>
+            <a:off x="643278" y="2372868"/>
+            <a:ext cx="3255095" cy="18288"/>
+          </a:xfrm>
+          <a:custGeom>
+            <a:avLst/>
+            <a:gdLst>
+              <a:gd name="csX0" fmla="*/ 0 w 3255095"/>
+              <a:gd name="csY0" fmla="*/ 0 h 18288"/>
+              <a:gd name="csX1" fmla="*/ 618468 w 3255095"/>
+              <a:gd name="csY1" fmla="*/ 0 h 18288"/>
+              <a:gd name="csX2" fmla="*/ 1269487 w 3255095"/>
+              <a:gd name="csY2" fmla="*/ 0 h 18288"/>
+              <a:gd name="csX3" fmla="*/ 1953057 w 3255095"/>
+              <a:gd name="csY3" fmla="*/ 0 h 18288"/>
+              <a:gd name="csX4" fmla="*/ 2636627 w 3255095"/>
+              <a:gd name="csY4" fmla="*/ 0 h 18288"/>
+              <a:gd name="csX5" fmla="*/ 3255095 w 3255095"/>
+              <a:gd name="csY5" fmla="*/ 0 h 18288"/>
+              <a:gd name="csX6" fmla="*/ 3255095 w 3255095"/>
+              <a:gd name="csY6" fmla="*/ 18288 h 18288"/>
+              <a:gd name="csX7" fmla="*/ 2538974 w 3255095"/>
+              <a:gd name="csY7" fmla="*/ 18288 h 18288"/>
+              <a:gd name="csX8" fmla="*/ 1822853 w 3255095"/>
+              <a:gd name="csY8" fmla="*/ 18288 h 18288"/>
+              <a:gd name="csX9" fmla="*/ 1171834 w 3255095"/>
+              <a:gd name="csY9" fmla="*/ 18288 h 18288"/>
+              <a:gd name="csX10" fmla="*/ 0 w 3255095"/>
+              <a:gd name="csY10" fmla="*/ 18288 h 18288"/>
+              <a:gd name="csX11" fmla="*/ 0 w 3255095"/>
+              <a:gd name="csY11" fmla="*/ 0 h 18288"/>
+            </a:gdLst>
+            <a:ahLst/>
+            <a:cxnLst>
+              <a:cxn ang="0">
+                <a:pos x="csX0" y="csY0"/>
+              </a:cxn>
+              <a:cxn ang="0">
+                <a:pos x="csX1" y="csY1"/>
+              </a:cxn>
+              <a:cxn ang="0">
+                <a:pos x="csX2" y="csY2"/>
+              </a:cxn>
+              <a:cxn ang="0">
+                <a:pos x="csX3" y="csY3"/>
+              </a:cxn>
+              <a:cxn ang="0">
+                <a:pos x="csX4" y="csY4"/>
+              </a:cxn>
+              <a:cxn ang="0">
+                <a:pos x="csX5" y="csY5"/>
+              </a:cxn>
+              <a:cxn ang="0">
+                <a:pos x="csX6" y="csY6"/>
+              </a:cxn>
+              <a:cxn ang="0">
+                <a:pos x="csX7" y="csY7"/>
+              </a:cxn>
+              <a:cxn ang="0">
+                <a:pos x="csX8" y="csY8"/>
+              </a:cxn>
+              <a:cxn ang="0">
+                <a:pos x="csX9" y="csY9"/>
+              </a:cxn>
+              <a:cxn ang="0">
+                <a:pos x="csX10" y="csY10"/>
+              </a:cxn>
+              <a:cxn ang="0">
+                <a:pos x="csX11" y="csY11"/>
+              </a:cxn>
+            </a:cxnLst>
+            <a:rect l="l" t="t" r="r" b="b"/>
+            <a:pathLst>
+              <a:path w="3255095" h="18288" fill="none" extrusionOk="0">
+                <a:moveTo>
+                  <a:pt x="0" y="0"/>
+                </a:moveTo>
+                <a:cubicBezTo>
+                  <a:pt x="240201" y="-22123"/>
+                  <a:pt x="462021" y="-19623"/>
+                  <a:pt x="618468" y="0"/>
+                </a:cubicBezTo>
+                <a:cubicBezTo>
+                  <a:pt x="774915" y="19623"/>
+                  <a:pt x="974734" y="2035"/>
+                  <a:pt x="1269487" y="0"/>
+                </a:cubicBezTo>
+                <a:cubicBezTo>
+                  <a:pt x="1564240" y="-2035"/>
+                  <a:pt x="1733579" y="10639"/>
+                  <a:pt x="1953057" y="0"/>
+                </a:cubicBezTo>
+                <a:cubicBezTo>
+                  <a:pt x="2172535" y="-10639"/>
+                  <a:pt x="2453962" y="14018"/>
+                  <a:pt x="2636627" y="0"/>
+                </a:cubicBezTo>
+                <a:cubicBezTo>
+                  <a:pt x="2819292" y="-14018"/>
+                  <a:pt x="3121375" y="5399"/>
+                  <a:pt x="3255095" y="0"/>
+                </a:cubicBezTo>
+                <a:cubicBezTo>
+                  <a:pt x="3254386" y="8157"/>
+                  <a:pt x="3254682" y="12125"/>
+                  <a:pt x="3255095" y="18288"/>
+                </a:cubicBezTo>
+                <a:cubicBezTo>
+                  <a:pt x="3088545" y="23203"/>
+                  <a:pt x="2687475" y="7419"/>
+                  <a:pt x="2538974" y="18288"/>
+                </a:cubicBezTo>
+                <a:cubicBezTo>
+                  <a:pt x="2390473" y="29157"/>
+                  <a:pt x="2137381" y="-8959"/>
+                  <a:pt x="1822853" y="18288"/>
+                </a:cubicBezTo>
+                <a:cubicBezTo>
+                  <a:pt x="1508325" y="45535"/>
+                  <a:pt x="1466437" y="20385"/>
+                  <a:pt x="1171834" y="18288"/>
+                </a:cubicBezTo>
+                <a:cubicBezTo>
+                  <a:pt x="877231" y="16191"/>
+                  <a:pt x="561097" y="37643"/>
+                  <a:pt x="0" y="18288"/>
+                </a:cubicBezTo>
+                <a:cubicBezTo>
+                  <a:pt x="-46" y="12483"/>
+                  <a:pt x="-203" y="6491"/>
+                  <a:pt x="0" y="0"/>
+                </a:cubicBezTo>
+                <a:close/>
+              </a:path>
+              <a:path w="3255095" h="18288" stroke="0" extrusionOk="0">
+                <a:moveTo>
+                  <a:pt x="0" y="0"/>
+                </a:moveTo>
+                <a:cubicBezTo>
+                  <a:pt x="291965" y="19429"/>
+                  <a:pt x="363155" y="8568"/>
+                  <a:pt x="618468" y="0"/>
+                </a:cubicBezTo>
+                <a:cubicBezTo>
+                  <a:pt x="873781" y="-8568"/>
+                  <a:pt x="904459" y="-19505"/>
+                  <a:pt x="1171834" y="0"/>
+                </a:cubicBezTo>
+                <a:cubicBezTo>
+                  <a:pt x="1439209" y="19505"/>
+                  <a:pt x="1744369" y="9790"/>
+                  <a:pt x="1887955" y="0"/>
+                </a:cubicBezTo>
+                <a:cubicBezTo>
+                  <a:pt x="2031541" y="-9790"/>
+                  <a:pt x="2346378" y="21240"/>
+                  <a:pt x="2506423" y="0"/>
+                </a:cubicBezTo>
+                <a:cubicBezTo>
+                  <a:pt x="2666468" y="-21240"/>
+                  <a:pt x="2990257" y="30414"/>
+                  <a:pt x="3255095" y="0"/>
+                </a:cubicBezTo>
+                <a:cubicBezTo>
+                  <a:pt x="3254831" y="4493"/>
+                  <a:pt x="3255479" y="9472"/>
+                  <a:pt x="3255095" y="18288"/>
+                </a:cubicBezTo>
+                <a:cubicBezTo>
+                  <a:pt x="3120743" y="16690"/>
+                  <a:pt x="2759628" y="42462"/>
+                  <a:pt x="2604076" y="18288"/>
+                </a:cubicBezTo>
+                <a:cubicBezTo>
+                  <a:pt x="2448524" y="-5886"/>
+                  <a:pt x="2184336" y="19599"/>
+                  <a:pt x="1887955" y="18288"/>
+                </a:cubicBezTo>
+                <a:cubicBezTo>
+                  <a:pt x="1591574" y="16977"/>
+                  <a:pt x="1548845" y="6870"/>
+                  <a:pt x="1334589" y="18288"/>
+                </a:cubicBezTo>
+                <a:cubicBezTo>
+                  <a:pt x="1120333" y="29706"/>
+                  <a:pt x="996014" y="9662"/>
+                  <a:pt x="683570" y="18288"/>
+                </a:cubicBezTo>
+                <a:cubicBezTo>
+                  <a:pt x="371126" y="26914"/>
+                  <a:pt x="198687" y="16167"/>
+                  <a:pt x="0" y="18288"/>
+                </a:cubicBezTo>
+                <a:cubicBezTo>
+                  <a:pt x="843" y="9577"/>
+                  <a:pt x="371" y="6900"/>
+                  <a:pt x="0" y="0"/>
+                </a:cubicBezTo>
+                <a:close/>
+              </a:path>
+            </a:pathLst>
+          </a:custGeom>
+          <a:solidFill>
+            <a:schemeClr val="accent2"/>
+          </a:solidFill>
+          <a:ln w="38100" cap="rnd">
+            <a:solidFill>
+              <a:schemeClr val="accent2"/>
+            </a:solidFill>
+            <a:round/>
+            <a:extLst>
+              <a:ext uri="{C807C97D-BFC1-408E-A445-0C87EB9F89A2}">
+                <ask:lineSketchStyleProps xmlns:ask="http://schemas.microsoft.com/office/drawing/2018/sketchyshapes" sd="1219033472">
+                  <a:prstGeom prst="rect">
+                    <a:avLst/>
+                  </a:prstGeom>
+                  <ask:type>
+                    <ask:lineSketchFreehand/>
+                  </ask:type>
+                </ask:lineSketchStyleProps>
+              </a:ext>
+            </a:extLst>
+          </a:ln>
+        </p:spPr>
+        <p:style>
+          <a:lnRef idx="2">
+            <a:schemeClr val="accent1">
+              <a:shade val="50000"/>
+            </a:schemeClr>
+          </a:lnRef>
+          <a:fillRef idx="1">
+            <a:schemeClr val="accent1"/>
+          </a:fillRef>
+          <a:effectRef idx="0">
+            <a:schemeClr val="accent1"/>
+          </a:effectRef>
+          <a:fontRef idx="minor">
+            <a:schemeClr val="lt1"/>
+          </a:fontRef>
+        </p:style>
+        <p:txBody>
+          <a:bodyPr rtlCol="0" anchor="ctr"/>
+          <a:lstStyle/>
+          <a:p>
+            <a:pPr algn="ctr"/>
+            <a:endParaRPr lang="en-US"/>
           </a:p>
         </p:txBody>
       </p:sp>
@@ -10367,72 +14053,61 @@
             <p:ph idx="1"/>
           </p:nvPr>
         </p:nvSpPr>
-        <p:spPr/>
+        <p:spPr>
+          <a:xfrm>
+            <a:off x="630936" y="2660904"/>
+            <a:ext cx="4818888" cy="3547872"/>
+          </a:xfrm>
+        </p:spPr>
         <p:txBody>
-          <a:bodyPr/>
+          <a:bodyPr anchor="t">
+            <a:normAutofit/>
+          </a:bodyPr>
           <a:lstStyle/>
           <a:p>
             <a:r>
-              <a:rPr lang="es-ES_tradnl" dirty="0"/>
-              <a:t>Se </a:t>
-            </a:r>
-            <a:r>
-              <a:rPr lang="es-ES_tradnl" dirty="0" err="1"/>
-              <a:t>assemelha</a:t>
-            </a:r>
-            <a:r>
-              <a:rPr lang="es-ES_tradnl" dirty="0"/>
-              <a:t> a T-SNE 2D, </a:t>
-            </a:r>
-            <a:r>
-              <a:rPr lang="es-ES_tradnl" dirty="0" err="1"/>
-              <a:t>porém</a:t>
-            </a:r>
-            <a:r>
-              <a:rPr lang="es-ES_tradnl" dirty="0"/>
-              <a:t> </a:t>
-            </a:r>
-            <a:r>
-              <a:rPr lang="es-ES_tradnl" dirty="0" err="1"/>
-              <a:t>com</a:t>
-            </a:r>
-            <a:r>
-              <a:rPr lang="es-ES_tradnl" dirty="0"/>
-              <a:t> </a:t>
-            </a:r>
-            <a:r>
-              <a:rPr lang="es-ES_tradnl" dirty="0" err="1"/>
-              <a:t>melhor</a:t>
-            </a:r>
-            <a:r>
-              <a:rPr lang="es-ES_tradnl" dirty="0"/>
-              <a:t> </a:t>
-            </a:r>
-            <a:r>
-              <a:rPr lang="es-ES_tradnl" dirty="0" err="1"/>
-              <a:t>separação</a:t>
-            </a:r>
-            <a:r>
-              <a:rPr lang="es-ES_tradnl" dirty="0"/>
-              <a:t> de grupos</a:t>
-            </a:r>
-          </a:p>
-          <a:p>
-            <a:r>
-              <a:rPr lang="es-ES_tradnl" dirty="0"/>
-              <a:t>HDBSCAN sobre UMAP 2D </a:t>
-            </a:r>
-            <a:r>
-              <a:rPr lang="es-ES_tradnl" dirty="0" err="1"/>
-              <a:t>sugere</a:t>
-            </a:r>
-            <a:r>
-              <a:rPr lang="es-ES_tradnl" dirty="0"/>
-              <a:t> explorar UMAP 3D</a:t>
+              <a:rPr lang="es-ES_tradnl" sz="2200"/>
+              <a:t>Se assemelha a T-SNE 2D, porém com melhor separação de grupos</a:t>
+            </a:r>
+          </a:p>
+          <a:p>
+            <a:r>
+              <a:rPr lang="es-ES_tradnl" sz="2200"/>
+              <a:t>HDBSCAN sobre UMAP 2D sugere explorar UMAP 3D</a:t>
             </a:r>
           </a:p>
         </p:txBody>
       </p:sp>
+      <p:pic>
+        <p:nvPicPr>
+          <p:cNvPr id="4" name="Imagem 3" descr="Gráfico, Gráfico de dispersão&#10;&#10;O conteúdo gerado por IA pode estar incorreto.">
+            <a:extLst>
+              <a:ext uri="{FF2B5EF4-FFF2-40B4-BE49-F238E27FC236}">
+                <a16:creationId xmlns:a16="http://schemas.microsoft.com/office/drawing/2014/main" id="{35EE8FA6-A9CF-A675-23DA-C82AF03F74FB}"/>
+              </a:ext>
+            </a:extLst>
+          </p:cNvPr>
+          <p:cNvPicPr>
+            <a:picLocks noChangeAspect="1"/>
+          </p:cNvPicPr>
+          <p:nvPr/>
+        </p:nvPicPr>
+        <p:blipFill>
+          <a:blip r:embed="rId3"/>
+          <a:stretch>
+            <a:fillRect/>
+          </a:stretch>
+        </p:blipFill>
+        <p:spPr>
+          <a:xfrm>
+            <a:off x="5129190" y="145185"/>
+            <a:ext cx="6431873" cy="6254996"/>
+          </a:xfrm>
+          <a:prstGeom prst="rect">
+            <a:avLst/>
+          </a:prstGeom>
+        </p:spPr>
+      </p:pic>
     </p:spTree>
     <p:extLst>
       <p:ext uri="{BB962C8B-B14F-4D97-AF65-F5344CB8AC3E}">
@@ -10449,6 +14124,14 @@
 <file path=ppt/slides/slide9.xml><?xml version="1.0" encoding="utf-8"?>
 <p:sld xmlns:a="http://schemas.openxmlformats.org/drawingml/2006/main" xmlns:r="http://schemas.openxmlformats.org/officeDocument/2006/relationships" xmlns:p="http://schemas.openxmlformats.org/presentationml/2006/main">
   <p:cSld>
+    <p:bg>
+      <p:bgPr>
+        <a:solidFill>
+          <a:schemeClr val="bg1"/>
+        </a:solidFill>
+        <a:effectLst/>
+      </p:bgPr>
+    </p:bg>
     <p:spTree>
       <p:nvGrpSpPr>
         <p:cNvPr id="1" name="">
@@ -10469,6 +14152,66 @@
           <a:chExt cx="0" cy="0"/>
         </a:xfrm>
       </p:grpSpPr>
+      <p:sp useBgFill="1">
+        <p:nvSpPr>
+          <p:cNvPr id="40" name="Rectangle 39">
+            <a:extLst>
+              <a:ext uri="{FF2B5EF4-FFF2-40B4-BE49-F238E27FC236}">
+                <a16:creationId xmlns:a16="http://schemas.microsoft.com/office/drawing/2014/main" id="{2B97F24A-32CE-4C1C-A50D-3016B394DCFB}"/>
+              </a:ext>
+              <a:ext uri="{C183D7F6-B498-43B3-948B-1728B52AA6E4}">
+                <adec:decorative xmlns:adec="http://schemas.microsoft.com/office/drawing/2017/decorative" val="1"/>
+              </a:ext>
+            </a:extLst>
+          </p:cNvPr>
+          <p:cNvSpPr>
+            <a:spLocks noGrp="1" noRot="1" noChangeAspect="1" noMove="1" noResize="1" noEditPoints="1" noAdjustHandles="1" noChangeArrowheads="1" noChangeShapeType="1" noTextEdit="1"/>
+          </p:cNvSpPr>
+          <p:nvPr>
+            <p:extLst>
+              <p:ext uri="{386F3935-93C4-4BCD-93E2-E3B085C9AB24}">
+                <p16:designElem xmlns:p16="http://schemas.microsoft.com/office/powerpoint/2015/main" val="1"/>
+              </p:ext>
+            </p:extLst>
+          </p:nvPr>
+        </p:nvSpPr>
+        <p:spPr>
+          <a:xfrm>
+            <a:off x="0" y="0"/>
+            <a:ext cx="12192000" cy="6858000"/>
+          </a:xfrm>
+          <a:prstGeom prst="rect">
+            <a:avLst/>
+          </a:prstGeom>
+          <a:ln>
+            <a:noFill/>
+          </a:ln>
+        </p:spPr>
+        <p:style>
+          <a:lnRef idx="2">
+            <a:schemeClr val="accent1">
+              <a:shade val="50000"/>
+            </a:schemeClr>
+          </a:lnRef>
+          <a:fillRef idx="1">
+            <a:schemeClr val="accent1"/>
+          </a:fillRef>
+          <a:effectRef idx="0">
+            <a:schemeClr val="accent1"/>
+          </a:effectRef>
+          <a:fontRef idx="minor">
+            <a:schemeClr val="lt1"/>
+          </a:fontRef>
+        </p:style>
+        <p:txBody>
+          <a:bodyPr rtlCol="0" anchor="ctr"/>
+          <a:lstStyle/>
+          <a:p>
+            <a:pPr algn="ctr"/>
+            <a:endParaRPr lang="en-US"/>
+          </a:p>
+        </p:txBody>
+      </p:sp>
       <p:sp>
         <p:nvSpPr>
           <p:cNvPr id="2" name="Título 1">
@@ -10485,15 +14228,295 @@
             <p:ph type="title"/>
           </p:nvPr>
         </p:nvSpPr>
-        <p:spPr/>
+        <p:spPr>
+          <a:xfrm>
+            <a:off x="630936" y="639520"/>
+            <a:ext cx="3429000" cy="1719072"/>
+          </a:xfrm>
+        </p:spPr>
         <p:txBody>
-          <a:bodyPr/>
+          <a:bodyPr anchor="b">
+            <a:normAutofit/>
+          </a:bodyPr>
           <a:lstStyle/>
           <a:p>
             <a:r>
-              <a:rPr lang="es-ES_tradnl" dirty="0"/>
+              <a:rPr lang="es-ES_tradnl" sz="5400" dirty="0"/>
               <a:t>UMAP 3D</a:t>
             </a:r>
+          </a:p>
+        </p:txBody>
+      </p:sp>
+      <p:sp>
+        <p:nvSpPr>
+          <p:cNvPr id="42" name="sketch line">
+            <a:extLst>
+              <a:ext uri="{FF2B5EF4-FFF2-40B4-BE49-F238E27FC236}">
+                <a16:creationId xmlns:a16="http://schemas.microsoft.com/office/drawing/2014/main" id="{6357EC4F-235E-4222-A36F-C7878ACE37F2}"/>
+              </a:ext>
+              <a:ext uri="{C183D7F6-B498-43B3-948B-1728B52AA6E4}">
+                <adec:decorative xmlns:adec="http://schemas.microsoft.com/office/drawing/2017/decorative" val="1"/>
+              </a:ext>
+            </a:extLst>
+          </p:cNvPr>
+          <p:cNvSpPr>
+            <a:spLocks noGrp="1" noRot="1" noChangeAspect="1" noMove="1" noResize="1" noEditPoints="1" noAdjustHandles="1" noChangeArrowheads="1" noChangeShapeType="1" noTextEdit="1"/>
+          </p:cNvSpPr>
+          <p:nvPr>
+            <p:extLst>
+              <p:ext uri="{386F3935-93C4-4BCD-93E2-E3B085C9AB24}">
+                <p16:designElem xmlns:p16="http://schemas.microsoft.com/office/powerpoint/2015/main" val="1"/>
+              </p:ext>
+            </p:extLst>
+          </p:nvPr>
+        </p:nvSpPr>
+        <p:spPr>
+          <a:xfrm>
+            <a:off x="643278" y="2573756"/>
+            <a:ext cx="3255095" cy="18288"/>
+          </a:xfrm>
+          <a:custGeom>
+            <a:avLst/>
+            <a:gdLst>
+              <a:gd name="csX0" fmla="*/ 0 w 3255095"/>
+              <a:gd name="csY0" fmla="*/ 0 h 18288"/>
+              <a:gd name="csX1" fmla="*/ 618468 w 3255095"/>
+              <a:gd name="csY1" fmla="*/ 0 h 18288"/>
+              <a:gd name="csX2" fmla="*/ 1269487 w 3255095"/>
+              <a:gd name="csY2" fmla="*/ 0 h 18288"/>
+              <a:gd name="csX3" fmla="*/ 1953057 w 3255095"/>
+              <a:gd name="csY3" fmla="*/ 0 h 18288"/>
+              <a:gd name="csX4" fmla="*/ 2636627 w 3255095"/>
+              <a:gd name="csY4" fmla="*/ 0 h 18288"/>
+              <a:gd name="csX5" fmla="*/ 3255095 w 3255095"/>
+              <a:gd name="csY5" fmla="*/ 0 h 18288"/>
+              <a:gd name="csX6" fmla="*/ 3255095 w 3255095"/>
+              <a:gd name="csY6" fmla="*/ 18288 h 18288"/>
+              <a:gd name="csX7" fmla="*/ 2538974 w 3255095"/>
+              <a:gd name="csY7" fmla="*/ 18288 h 18288"/>
+              <a:gd name="csX8" fmla="*/ 1822853 w 3255095"/>
+              <a:gd name="csY8" fmla="*/ 18288 h 18288"/>
+              <a:gd name="csX9" fmla="*/ 1171834 w 3255095"/>
+              <a:gd name="csY9" fmla="*/ 18288 h 18288"/>
+              <a:gd name="csX10" fmla="*/ 0 w 3255095"/>
+              <a:gd name="csY10" fmla="*/ 18288 h 18288"/>
+              <a:gd name="csX11" fmla="*/ 0 w 3255095"/>
+              <a:gd name="csY11" fmla="*/ 0 h 18288"/>
+            </a:gdLst>
+            <a:ahLst/>
+            <a:cxnLst>
+              <a:cxn ang="0">
+                <a:pos x="csX0" y="csY0"/>
+              </a:cxn>
+              <a:cxn ang="0">
+                <a:pos x="csX1" y="csY1"/>
+              </a:cxn>
+              <a:cxn ang="0">
+                <a:pos x="csX2" y="csY2"/>
+              </a:cxn>
+              <a:cxn ang="0">
+                <a:pos x="csX3" y="csY3"/>
+              </a:cxn>
+              <a:cxn ang="0">
+                <a:pos x="csX4" y="csY4"/>
+              </a:cxn>
+              <a:cxn ang="0">
+                <a:pos x="csX5" y="csY5"/>
+              </a:cxn>
+              <a:cxn ang="0">
+                <a:pos x="csX6" y="csY6"/>
+              </a:cxn>
+              <a:cxn ang="0">
+                <a:pos x="csX7" y="csY7"/>
+              </a:cxn>
+              <a:cxn ang="0">
+                <a:pos x="csX8" y="csY8"/>
+              </a:cxn>
+              <a:cxn ang="0">
+                <a:pos x="csX9" y="csY9"/>
+              </a:cxn>
+              <a:cxn ang="0">
+                <a:pos x="csX10" y="csY10"/>
+              </a:cxn>
+              <a:cxn ang="0">
+                <a:pos x="csX11" y="csY11"/>
+              </a:cxn>
+            </a:cxnLst>
+            <a:rect l="l" t="t" r="r" b="b"/>
+            <a:pathLst>
+              <a:path w="3255095" h="18288" fill="none" extrusionOk="0">
+                <a:moveTo>
+                  <a:pt x="0" y="0"/>
+                </a:moveTo>
+                <a:cubicBezTo>
+                  <a:pt x="240201" y="-22123"/>
+                  <a:pt x="462021" y="-19623"/>
+                  <a:pt x="618468" y="0"/>
+                </a:cubicBezTo>
+                <a:cubicBezTo>
+                  <a:pt x="774915" y="19623"/>
+                  <a:pt x="974734" y="2035"/>
+                  <a:pt x="1269487" y="0"/>
+                </a:cubicBezTo>
+                <a:cubicBezTo>
+                  <a:pt x="1564240" y="-2035"/>
+                  <a:pt x="1733579" y="10639"/>
+                  <a:pt x="1953057" y="0"/>
+                </a:cubicBezTo>
+                <a:cubicBezTo>
+                  <a:pt x="2172535" y="-10639"/>
+                  <a:pt x="2453962" y="14018"/>
+                  <a:pt x="2636627" y="0"/>
+                </a:cubicBezTo>
+                <a:cubicBezTo>
+                  <a:pt x="2819292" y="-14018"/>
+                  <a:pt x="3121375" y="5399"/>
+                  <a:pt x="3255095" y="0"/>
+                </a:cubicBezTo>
+                <a:cubicBezTo>
+                  <a:pt x="3254386" y="8157"/>
+                  <a:pt x="3254682" y="12125"/>
+                  <a:pt x="3255095" y="18288"/>
+                </a:cubicBezTo>
+                <a:cubicBezTo>
+                  <a:pt x="3088545" y="23203"/>
+                  <a:pt x="2687475" y="7419"/>
+                  <a:pt x="2538974" y="18288"/>
+                </a:cubicBezTo>
+                <a:cubicBezTo>
+                  <a:pt x="2390473" y="29157"/>
+                  <a:pt x="2137381" y="-8959"/>
+                  <a:pt x="1822853" y="18288"/>
+                </a:cubicBezTo>
+                <a:cubicBezTo>
+                  <a:pt x="1508325" y="45535"/>
+                  <a:pt x="1466437" y="20385"/>
+                  <a:pt x="1171834" y="18288"/>
+                </a:cubicBezTo>
+                <a:cubicBezTo>
+                  <a:pt x="877231" y="16191"/>
+                  <a:pt x="561097" y="37643"/>
+                  <a:pt x="0" y="18288"/>
+                </a:cubicBezTo>
+                <a:cubicBezTo>
+                  <a:pt x="-46" y="12483"/>
+                  <a:pt x="-203" y="6491"/>
+                  <a:pt x="0" y="0"/>
+                </a:cubicBezTo>
+                <a:close/>
+              </a:path>
+              <a:path w="3255095" h="18288" stroke="0" extrusionOk="0">
+                <a:moveTo>
+                  <a:pt x="0" y="0"/>
+                </a:moveTo>
+                <a:cubicBezTo>
+                  <a:pt x="291965" y="19429"/>
+                  <a:pt x="363155" y="8568"/>
+                  <a:pt x="618468" y="0"/>
+                </a:cubicBezTo>
+                <a:cubicBezTo>
+                  <a:pt x="873781" y="-8568"/>
+                  <a:pt x="904459" y="-19505"/>
+                  <a:pt x="1171834" y="0"/>
+                </a:cubicBezTo>
+                <a:cubicBezTo>
+                  <a:pt x="1439209" y="19505"/>
+                  <a:pt x="1744369" y="9790"/>
+                  <a:pt x="1887955" y="0"/>
+                </a:cubicBezTo>
+                <a:cubicBezTo>
+                  <a:pt x="2031541" y="-9790"/>
+                  <a:pt x="2346378" y="21240"/>
+                  <a:pt x="2506423" y="0"/>
+                </a:cubicBezTo>
+                <a:cubicBezTo>
+                  <a:pt x="2666468" y="-21240"/>
+                  <a:pt x="2990257" y="30414"/>
+                  <a:pt x="3255095" y="0"/>
+                </a:cubicBezTo>
+                <a:cubicBezTo>
+                  <a:pt x="3254831" y="4493"/>
+                  <a:pt x="3255479" y="9472"/>
+                  <a:pt x="3255095" y="18288"/>
+                </a:cubicBezTo>
+                <a:cubicBezTo>
+                  <a:pt x="3120743" y="16690"/>
+                  <a:pt x="2759628" y="42462"/>
+                  <a:pt x="2604076" y="18288"/>
+                </a:cubicBezTo>
+                <a:cubicBezTo>
+                  <a:pt x="2448524" y="-5886"/>
+                  <a:pt x="2184336" y="19599"/>
+                  <a:pt x="1887955" y="18288"/>
+                </a:cubicBezTo>
+                <a:cubicBezTo>
+                  <a:pt x="1591574" y="16977"/>
+                  <a:pt x="1548845" y="6870"/>
+                  <a:pt x="1334589" y="18288"/>
+                </a:cubicBezTo>
+                <a:cubicBezTo>
+                  <a:pt x="1120333" y="29706"/>
+                  <a:pt x="996014" y="9662"/>
+                  <a:pt x="683570" y="18288"/>
+                </a:cubicBezTo>
+                <a:cubicBezTo>
+                  <a:pt x="371126" y="26914"/>
+                  <a:pt x="198687" y="16167"/>
+                  <a:pt x="0" y="18288"/>
+                </a:cubicBezTo>
+                <a:cubicBezTo>
+                  <a:pt x="843" y="9577"/>
+                  <a:pt x="371" y="6900"/>
+                  <a:pt x="0" y="0"/>
+                </a:cubicBezTo>
+                <a:close/>
+              </a:path>
+            </a:pathLst>
+          </a:custGeom>
+          <a:solidFill>
+            <a:schemeClr val="accent2"/>
+          </a:solidFill>
+          <a:ln w="38100" cap="rnd">
+            <a:solidFill>
+              <a:schemeClr val="accent2"/>
+            </a:solidFill>
+            <a:round/>
+            <a:extLst>
+              <a:ext uri="{C807C97D-BFC1-408E-A445-0C87EB9F89A2}">
+                <ask:lineSketchStyleProps xmlns:ask="http://schemas.microsoft.com/office/drawing/2018/sketchyshapes" sd="1219033472">
+                  <a:prstGeom prst="rect">
+                    <a:avLst/>
+                  </a:prstGeom>
+                  <ask:type>
+                    <ask:lineSketchFreehand/>
+                  </ask:type>
+                </ask:lineSketchStyleProps>
+              </a:ext>
+            </a:extLst>
+          </a:ln>
+        </p:spPr>
+        <p:style>
+          <a:lnRef idx="2">
+            <a:schemeClr val="accent1">
+              <a:shade val="50000"/>
+            </a:schemeClr>
+          </a:lnRef>
+          <a:fillRef idx="1">
+            <a:schemeClr val="accent1"/>
+          </a:fillRef>
+          <a:effectRef idx="0">
+            <a:schemeClr val="accent1"/>
+          </a:effectRef>
+          <a:fontRef idx="minor">
+            <a:schemeClr val="lt1"/>
+          </a:fontRef>
+        </p:style>
+        <p:txBody>
+          <a:bodyPr rtlCol="0" anchor="ctr"/>
+          <a:lstStyle/>
+          <a:p>
+            <a:pPr algn="ctr"/>
+            <a:endParaRPr lang="en-US"/>
           </a:p>
         </p:txBody>
       </p:sp>
@@ -10513,204 +14536,244 @@
             <p:ph idx="1"/>
           </p:nvPr>
         </p:nvSpPr>
-        <p:spPr/>
+        <p:spPr>
+          <a:xfrm>
+            <a:off x="630936" y="2807208"/>
+            <a:ext cx="3429000" cy="3410712"/>
+          </a:xfrm>
+        </p:spPr>
         <p:txBody>
-          <a:bodyPr/>
+          <a:bodyPr anchor="t">
+            <a:normAutofit/>
+          </a:bodyPr>
           <a:lstStyle/>
           <a:p>
             <a:r>
-              <a:rPr lang="es-ES_tradnl" dirty="0"/>
+              <a:rPr lang="es-ES_tradnl" sz="1500" dirty="0"/>
               <a:t>UMAP 3D </a:t>
             </a:r>
             <a:r>
-              <a:rPr lang="es-ES_tradnl" dirty="0" err="1"/>
+              <a:rPr lang="es-ES_tradnl" sz="1500" dirty="0" err="1"/>
               <a:t>mostra</a:t>
             </a:r>
             <a:r>
-              <a:rPr lang="es-ES_tradnl" dirty="0"/>
+              <a:rPr lang="es-ES_tradnl" sz="1500" dirty="0"/>
               <a:t> </a:t>
             </a:r>
             <a:r>
-              <a:rPr lang="es-ES_tradnl" dirty="0" err="1"/>
+              <a:rPr lang="es-ES_tradnl" sz="1500" dirty="0" err="1"/>
               <a:t>melhor</a:t>
             </a:r>
             <a:r>
-              <a:rPr lang="es-ES_tradnl" dirty="0"/>
+              <a:rPr lang="es-ES_tradnl" sz="1500" dirty="0"/>
               <a:t> os grupos</a:t>
             </a:r>
           </a:p>
           <a:p>
             <a:r>
-              <a:rPr lang="es-ES_tradnl" dirty="0" err="1"/>
+              <a:rPr lang="es-ES_tradnl" sz="1500" dirty="0" err="1"/>
               <a:t>Um</a:t>
             </a:r>
             <a:r>
-              <a:rPr lang="es-ES_tradnl" dirty="0"/>
+              <a:rPr lang="es-ES_tradnl" sz="1500" dirty="0"/>
               <a:t> grande grupo </a:t>
             </a:r>
             <a:r>
-              <a:rPr lang="es-ES_tradnl" dirty="0" err="1"/>
+              <a:rPr lang="es-ES_tradnl" sz="1500" dirty="0" err="1"/>
               <a:t>com</a:t>
             </a:r>
             <a:r>
-              <a:rPr lang="es-ES_tradnl" dirty="0"/>
+              <a:rPr lang="es-ES_tradnl" sz="1500" dirty="0"/>
               <a:t> </a:t>
             </a:r>
             <a:r>
-              <a:rPr lang="es-ES_tradnl" dirty="0" err="1"/>
+              <a:rPr lang="es-ES_tradnl" sz="1500" dirty="0" err="1"/>
               <a:t>pouca</a:t>
             </a:r>
             <a:r>
-              <a:rPr lang="es-ES_tradnl" dirty="0"/>
+              <a:rPr lang="es-ES_tradnl" sz="1500" dirty="0"/>
               <a:t> </a:t>
             </a:r>
             <a:r>
-              <a:rPr lang="es-ES_tradnl" dirty="0" err="1"/>
+              <a:rPr lang="es-ES_tradnl" sz="1500" dirty="0" err="1"/>
               <a:t>separação</a:t>
             </a:r>
             <a:r>
-              <a:rPr lang="es-ES_tradnl" dirty="0"/>
-              <a:t> clara exige </a:t>
-            </a:r>
-            <a:r>
-              <a:rPr lang="es-ES_tradnl" dirty="0" err="1"/>
-              <a:t>estudo</a:t>
-            </a:r>
-            <a:r>
-              <a:rPr lang="es-ES_tradnl" dirty="0"/>
+              <a:rPr lang="es-ES_tradnl" sz="1500" dirty="0"/>
+              <a:t> clara </a:t>
+            </a:r>
+            <a:r>
+              <a:rPr lang="es-ES_tradnl" sz="1500" dirty="0" err="1"/>
+              <a:t>mostra</a:t>
+            </a:r>
+            <a:r>
+              <a:rPr lang="es-ES_tradnl" sz="1500" dirty="0"/>
               <a:t> </a:t>
             </a:r>
             <a:r>
-              <a:rPr lang="es-ES_tradnl" dirty="0" err="1"/>
+              <a:rPr lang="es-ES_tradnl" sz="1500" dirty="0" err="1"/>
+              <a:t>limitação</a:t>
+            </a:r>
+            <a:r>
+              <a:rPr lang="es-ES_tradnl" sz="1500" dirty="0"/>
+              <a:t> do método</a:t>
+            </a:r>
+          </a:p>
+          <a:p>
+            <a:r>
+              <a:rPr lang="es-ES_tradnl" sz="1500" dirty="0"/>
+              <a:t>HDBSCAN </a:t>
+            </a:r>
+            <a:r>
+              <a:rPr lang="es-ES_tradnl" sz="1500" dirty="0" err="1"/>
+              <a:t>mostra</a:t>
+            </a:r>
+            <a:r>
+              <a:rPr lang="es-ES_tradnl" sz="1500" dirty="0"/>
+              <a:t> </a:t>
+            </a:r>
+            <a:r>
+              <a:rPr lang="es-ES_tradnl" sz="1500" dirty="0" err="1"/>
+              <a:t>dois</a:t>
+            </a:r>
+            <a:r>
+              <a:rPr lang="es-ES_tradnl" sz="1500" dirty="0"/>
+              <a:t> </a:t>
+            </a:r>
+            <a:r>
+              <a:rPr lang="es-ES_tradnl" sz="1500" dirty="0" err="1"/>
+              <a:t>patamares</a:t>
+            </a:r>
+            <a:r>
+              <a:rPr lang="es-ES_tradnl" sz="1500" dirty="0"/>
+              <a:t> claros de </a:t>
+            </a:r>
+            <a:r>
+              <a:rPr lang="es-ES_tradnl" sz="1500" dirty="0" err="1"/>
+              <a:t>separação</a:t>
+            </a:r>
+            <a:endParaRPr lang="es-ES_tradnl" sz="1500" dirty="0"/>
+          </a:p>
+          <a:p>
+            <a:r>
+              <a:rPr lang="es-ES_tradnl" sz="1500" dirty="0"/>
+              <a:t>Explorar </a:t>
+            </a:r>
+            <a:r>
+              <a:rPr lang="es-ES_tradnl" sz="1500" dirty="0" err="1"/>
               <a:t>melhor</a:t>
             </a:r>
-            <a:endParaRPr lang="es-ES_tradnl" dirty="0"/>
-          </a:p>
-          <a:p>
-            <a:r>
-              <a:rPr lang="es-ES_tradnl" dirty="0"/>
-              <a:t>HDBSCAN </a:t>
-            </a:r>
-            <a:r>
-              <a:rPr lang="es-ES_tradnl" dirty="0" err="1"/>
-              <a:t>mostra</a:t>
-            </a:r>
-            <a:r>
-              <a:rPr lang="es-ES_tradnl" dirty="0"/>
+            <a:r>
+              <a:rPr lang="es-ES_tradnl" sz="1500" dirty="0"/>
+              <a:t> o grande </a:t>
+            </a:r>
+            <a:r>
+              <a:rPr lang="es-ES_tradnl" sz="1500" dirty="0" err="1"/>
+              <a:t>cluster</a:t>
+            </a:r>
+            <a:r>
+              <a:rPr lang="es-ES_tradnl" sz="1500" dirty="0"/>
+              <a:t>:</a:t>
+            </a:r>
+          </a:p>
+          <a:p>
+            <a:pPr lvl="1"/>
+            <a:r>
+              <a:rPr lang="es-ES_tradnl" sz="1500" dirty="0" err="1"/>
+              <a:t>GridSearch</a:t>
+            </a:r>
+            <a:r>
+              <a:rPr lang="es-ES_tradnl" sz="1500" dirty="0"/>
               <a:t> </a:t>
             </a:r>
             <a:r>
-              <a:rPr lang="es-ES_tradnl" dirty="0" err="1"/>
-              <a:t>dois</a:t>
-            </a:r>
-            <a:r>
-              <a:rPr lang="es-ES_tradnl" dirty="0"/>
+              <a:rPr lang="es-ES_tradnl" sz="1500" dirty="0" err="1"/>
+              <a:t>mais</a:t>
+            </a:r>
+            <a:r>
+              <a:rPr lang="es-ES_tradnl" sz="1500" dirty="0"/>
+              <a:t> agresivo?</a:t>
+            </a:r>
+          </a:p>
+          <a:p>
+            <a:pPr lvl="1"/>
+            <a:r>
+              <a:rPr lang="es-ES_tradnl" sz="1500" dirty="0"/>
+              <a:t>Separar o </a:t>
+            </a:r>
+            <a:r>
+              <a:rPr lang="es-ES_tradnl" sz="1500" dirty="0" err="1"/>
+              <a:t>cluster</a:t>
+            </a:r>
+            <a:r>
+              <a:rPr lang="es-ES_tradnl" sz="1500" dirty="0"/>
+              <a:t> em alta </a:t>
+            </a:r>
+            <a:r>
+              <a:rPr lang="es-ES_tradnl" sz="1500" dirty="0" err="1"/>
+              <a:t>dimensão</a:t>
+            </a:r>
+            <a:r>
+              <a:rPr lang="es-ES_tradnl" sz="1500" dirty="0"/>
+              <a:t> e reaplicar UMAP </a:t>
+            </a:r>
+            <a:r>
+              <a:rPr lang="es-ES_tradnl" sz="1500" dirty="0" err="1"/>
+              <a:t>com</a:t>
+            </a:r>
+            <a:r>
+              <a:rPr lang="es-ES_tradnl" sz="1500" dirty="0"/>
               <a:t> </a:t>
             </a:r>
             <a:r>
-              <a:rPr lang="es-ES_tradnl" dirty="0" err="1"/>
-              <a:t>patamares</a:t>
-            </a:r>
-            <a:r>
-              <a:rPr lang="es-ES_tradnl" dirty="0"/>
-              <a:t> claros de </a:t>
-            </a:r>
-            <a:r>
-              <a:rPr lang="es-ES_tradnl" dirty="0" err="1"/>
-              <a:t>separação</a:t>
-            </a:r>
-            <a:endParaRPr lang="es-ES_tradnl" dirty="0"/>
-          </a:p>
-          <a:p>
-            <a:r>
-              <a:rPr lang="es-ES_tradnl" dirty="0"/>
-              <a:t>Explorar </a:t>
-            </a:r>
-            <a:r>
-              <a:rPr lang="es-ES_tradnl" dirty="0" err="1"/>
-              <a:t>melhor</a:t>
-            </a:r>
-            <a:r>
-              <a:rPr lang="es-ES_tradnl" dirty="0"/>
-              <a:t> o grande </a:t>
-            </a:r>
-            <a:r>
-              <a:rPr lang="es-ES_tradnl" dirty="0" err="1"/>
-              <a:t>cluster</a:t>
-            </a:r>
-            <a:r>
-              <a:rPr lang="es-ES_tradnl" dirty="0"/>
-              <a:t>:</a:t>
-            </a:r>
-          </a:p>
-          <a:p>
-            <a:pPr lvl="1"/>
-            <a:r>
-              <a:rPr lang="es-ES_tradnl" dirty="0" err="1"/>
-              <a:t>GridSearch</a:t>
-            </a:r>
-            <a:r>
-              <a:rPr lang="es-ES_tradnl" dirty="0"/>
+              <a:rPr lang="es-ES_tradnl" sz="1500" dirty="0" err="1"/>
+              <a:t>novos</a:t>
+            </a:r>
+            <a:r>
+              <a:rPr lang="es-ES_tradnl" sz="1500" dirty="0"/>
               <a:t> </a:t>
             </a:r>
             <a:r>
-              <a:rPr lang="es-ES_tradnl" dirty="0" err="1"/>
-              <a:t>mais</a:t>
-            </a:r>
-            <a:r>
-              <a:rPr lang="es-ES_tradnl" dirty="0"/>
-              <a:t> agresivo</a:t>
-            </a:r>
-          </a:p>
-          <a:p>
-            <a:pPr lvl="1"/>
-            <a:r>
-              <a:rPr lang="es-ES_tradnl" dirty="0"/>
-              <a:t>Separar o </a:t>
-            </a:r>
-            <a:r>
-              <a:rPr lang="es-ES_tradnl" dirty="0" err="1"/>
-              <a:t>cluster</a:t>
-            </a:r>
-            <a:r>
-              <a:rPr lang="es-ES_tradnl" dirty="0"/>
-              <a:t> em alta </a:t>
-            </a:r>
-            <a:r>
-              <a:rPr lang="es-ES_tradnl" dirty="0" err="1"/>
-              <a:t>dimensão</a:t>
-            </a:r>
-            <a:r>
-              <a:rPr lang="es-ES_tradnl" dirty="0"/>
-              <a:t> e reaplicar UMAP </a:t>
-            </a:r>
-            <a:r>
-              <a:rPr lang="es-ES_tradnl" dirty="0" err="1"/>
-              <a:t>com</a:t>
-            </a:r>
-            <a:r>
-              <a:rPr lang="es-ES_tradnl" dirty="0"/>
-              <a:t> </a:t>
-            </a:r>
-            <a:r>
-              <a:rPr lang="es-ES_tradnl" dirty="0" err="1"/>
-              <a:t>novos</a:t>
-            </a:r>
-            <a:r>
-              <a:rPr lang="es-ES_tradnl" dirty="0"/>
-              <a:t> </a:t>
-            </a:r>
-            <a:r>
-              <a:rPr lang="es-ES_tradnl" dirty="0" err="1"/>
+              <a:rPr lang="es-ES_tradnl" sz="1500" dirty="0" err="1"/>
               <a:t>parametro</a:t>
             </a:r>
-            <a:endParaRPr lang="es-ES_tradnl" dirty="0"/>
-          </a:p>
-          <a:p>
-            <a:endParaRPr lang="es-ES_tradnl" dirty="0"/>
+            <a:endParaRPr lang="es-ES_tradnl" sz="1500" dirty="0"/>
+          </a:p>
+          <a:p>
+            <a:endParaRPr lang="es-ES_tradnl" sz="1500" dirty="0"/>
           </a:p>
         </p:txBody>
       </p:sp>
+      <p:pic>
+        <p:nvPicPr>
+          <p:cNvPr id="4" name="Imagem 3" descr="Gráfico, Gráfico de radar&#10;&#10;O conteúdo gerado por IA pode estar incorreto.">
+            <a:extLst>
+              <a:ext uri="{FF2B5EF4-FFF2-40B4-BE49-F238E27FC236}">
+                <a16:creationId xmlns:a16="http://schemas.microsoft.com/office/drawing/2014/main" id="{2CE7A418-F055-02D5-1E7F-2EC3A1CF3390}"/>
+              </a:ext>
+            </a:extLst>
+          </p:cNvPr>
+          <p:cNvPicPr>
+            <a:picLocks noChangeAspect="1"/>
+          </p:cNvPicPr>
+          <p:nvPr/>
+        </p:nvPicPr>
+        <p:blipFill>
+          <a:blip r:embed="rId3"/>
+          <a:stretch>
+            <a:fillRect/>
+          </a:stretch>
+        </p:blipFill>
+        <p:spPr>
+          <a:xfrm>
+            <a:off x="4059936" y="895646"/>
+            <a:ext cx="8132064" cy="5066707"/>
+          </a:xfrm>
+          <a:prstGeom prst="rect">
+            <a:avLst/>
+          </a:prstGeom>
+        </p:spPr>
+      </p:pic>
     </p:spTree>
     <p:extLst>
       <p:ext uri="{BB962C8B-B14F-4D97-AF65-F5344CB8AC3E}">
